--- a/reports/TSGEX_Simplified_TWD5M_Presentation.pptx
+++ b/reports/TSGEX_Simplified_TWD5M_Presentation.pptx
@@ -16,9 +16,10 @@
     <p:sldId id="264" r:id="rId10"/>
     <p:sldId id="265" r:id="rId11"/>
     <p:sldId id="266" r:id="rId12"/>
+    <p:sldId id="267" r:id="rId13"/>
   </p:sldIdLst>
   <p:notesMasterIdLst>
-    <p:notesMasterId r:id="rId13"/>
+    <p:notesMasterId r:id="rId14"/>
   </p:notesMasterIdLst>
   <p:sldSz cx="12192000" cy="6858000"/>
   <p:notesSz cx="6858000" cy="12192000"/>
@@ -1270,6 +1271,94 @@
             <a:fld id="{F7021451-1387-4CA6-816F-3879F97B5CBC}" type="slidenum">
               <a:rPr lang="en-US"/>
               <a:t>11</a:t>
+            </a:fld>
+            <a:endParaRPr lang="en-US"/>
+          </a:p>
+        </p:txBody>
+      </p:sp>
+    </p:spTree>
+    <p:extLst>
+      <p:ext uri="{BB962C8B-B14F-4D97-AF65-F5344CB8AC3E}">
+        <p14:creationId xmlns:p14="http://schemas.microsoft.com/office/powerpoint/2010/main" val="1024086991"/>
+      </p:ext>
+    </p:extLst>
+  </p:cSld>
+  <p:clrMapOvr>
+    <a:masterClrMapping/>
+  </p:clrMapOvr>
+</p:notes>
+</file>
+
+<file path=ppt/notesSlides/notesSlide12.xml><?xml version="1.0" encoding="utf-8"?>
+<p:notes xmlns:a="http://schemas.openxmlformats.org/drawingml/2006/main" xmlns:r="http://schemas.openxmlformats.org/officeDocument/2006/relationships" xmlns:p="http://schemas.openxmlformats.org/presentationml/2006/main">
+  <p:cSld>
+    <p:spTree>
+      <p:nvGrpSpPr>
+        <p:cNvPr id="1" name=""/>
+        <p:cNvGrpSpPr/>
+        <p:nvPr/>
+      </p:nvGrpSpPr>
+      <p:grpSpPr>
+        <a:xfrm>
+          <a:off x="0" y="0"/>
+          <a:ext cx="0" cy="0"/>
+          <a:chOff x="0" y="0"/>
+          <a:chExt cx="0" cy="0"/>
+        </a:xfrm>
+      </p:grpSpPr>
+      <p:sp>
+        <p:nvSpPr>
+          <p:cNvPr id="2" name="Slide Image Placeholder 1"/>
+          <p:cNvSpPr>
+            <a:spLocks noGrp="1" noRot="1" noChangeAspect="1"/>
+          </p:cNvSpPr>
+          <p:nvPr>
+            <p:ph type="sldImg"/>
+          </p:nvPr>
+        </p:nvSpPr>
+        <p:spPr/>
+      </p:sp>
+      <p:sp>
+        <p:nvSpPr>
+          <p:cNvPr id="3" name="Notes Placeholder 2"/>
+          <p:cNvSpPr>
+            <a:spLocks noGrp="1"/>
+          </p:cNvSpPr>
+          <p:nvPr>
+            <p:ph type="body" idx="1"/>
+          </p:nvPr>
+        </p:nvSpPr>
+        <p:spPr/>
+        <p:txBody>
+          <a:bodyPr/>
+          <a:lstStyle/>
+          <a:p>
+            <a:r>
+              <a:rPr lang="en-US" dirty="0"/>
+              <a:t/>
+            </a:r>
+            <a:endParaRPr lang="en-US" dirty="0"/>
+          </a:p>
+        </p:txBody>
+      </p:sp>
+      <p:sp>
+        <p:nvSpPr>
+          <p:cNvPr id="4" name="Slide Number Placeholder 3"/>
+          <p:cNvSpPr>
+            <a:spLocks noGrp="1"/>
+          </p:cNvSpPr>
+          <p:nvPr>
+            <p:ph type="sldNum" sz="quarter" idx="10"/>
+          </p:nvPr>
+        </p:nvSpPr>
+        <p:spPr/>
+        <p:txBody>
+          <a:bodyPr/>
+          <a:lstStyle/>
+          <a:p>
+            <a:fld id="{F7021451-1387-4CA6-816F-3879F97B5CBC}" type="slidenum">
+              <a:rPr lang="en-US"/>
+              <a:t>12</a:t>
             </a:fld>
             <a:endParaRPr lang="en-US"/>
           </a:p>
@@ -2951,7 +3040,7 @@
                 <a:ea typeface="Microsoft JhengHei" pitchFamily="34" charset="-122"/>
                 <a:cs typeface="Microsoft JhengHei" pitchFamily="34" charset="-120"/>
               </a:rPr>
-              <a:t>幾個重要提醒</a:t>
+              <a:t>建議怎麼分配？三種組合方案</a:t>
             </a:r>
             <a:endParaRPr lang="en-US" sz="2700" dirty="0"/>
           </a:p>
@@ -2993,42 +3082,1333 @@
                 <a:ea typeface="Microsoft JhengHei" pitchFamily="34" charset="-122"/>
                 <a:cs typeface="Microsoft JhengHei" pitchFamily="34" charset="-120"/>
               </a:rPr>
-              <a:t>白話版風險與安全措施說明</a:t>
+              <a:t>NT$500萬，依「求穩」到「求高報酬」排列</a:t>
             </a:r>
             <a:endParaRPr lang="en-US" sz="1350" dirty="0"/>
           </a:p>
         </p:txBody>
       </p:sp>
-      <p:sp>
-        <p:nvSpPr>
-          <p:cNvPr id="4" name="Shape 2"/>
+      <p:graphicFrame>
+        <p:nvGraphicFramePr>
+          <p:cNvPr id="4" name="Chart 0" descr=""/>
+          <p:cNvGraphicFramePr/>
+          <p:nvPr/>
+        </p:nvGraphicFramePr>
+        <p:xfrm>
+          <a:off x="548640" y="1508760"/>
+          <a:ext cx="5394960" cy="3017520"/>
+        </p:xfrm>
+        <a:graphic xmlns:a="http://schemas.openxmlformats.org/drawingml/2006/main">
+          <a:graphicData uri="http://schemas.openxmlformats.org/drawingml/2006/chart">
+            <c:chart xmlns:c="http://schemas.openxmlformats.org/drawingml/2006/chart" r:id="rId1"/>
+          </a:graphicData>
+        </a:graphic>
+      </p:graphicFrame>
+      <p:graphicFrame>
+        <p:nvGraphicFramePr>
+          <p:cNvPr id="11" name="Table 0"/>
+          <p:cNvGraphicFramePr>
+            <a:graphicFrameLocks noGrp="1"/>
+          </p:cNvGraphicFramePr>
+          <p:nvPr>
+            <p:extLst>
+              <p:ext uri="{D42A27DB-BD31-4B8C-83A1-F6EECF244321}">
+                <p14:modId xmlns:p14="http://schemas.microsoft.com/office/powerpoint/2010/main" val="1579011935"/>
+              </p:ext>
+            </p:extLst>
+          </p:nvPr>
+        </p:nvGraphicFramePr>
+        <p:xfrm>
+          <a:off x="6172200" y="1508760"/>
+          <a:ext cx="5468112" cy="914400"/>
+        </p:xfrm>
+        <a:graphic>
+          <a:graphicData uri="http://schemas.openxmlformats.org/drawingml/2006/table">
+            <a:tbl>
+              <a:tblPr/>
+              <a:tblGrid>
+                <a:gridCol w="1417320"/>
+                <a:gridCol w="1051560"/>
+                <a:gridCol w="1188720"/>
+                <a:gridCol w="1051560"/>
+                <a:gridCol w="758952"/>
+              </a:tblGrid>
+              <a:tr h="548640">
+                <a:tc>
+                  <a:txBody>
+                    <a:bodyPr/>
+                    <a:lstStyle/>
+                    <a:p>
+                      <a:pPr algn="ctr" indent="0" marL="0">
+                        <a:buNone/>
+                      </a:pPr>
+                      <a:r>
+                        <a:rPr lang="en-US" sz="1000" b="1" dirty="0">
+                          <a:solidFill>
+                            <a:srgbClr val="FFFFFF"/>
+                          </a:solidFill>
+                        </a:rPr>
+                        <a:t>方案</a:t>
+                      </a:r>
+                      <a:endParaRPr lang="en-US" sz="1000" dirty="0"/>
+                    </a:p>
+                  </a:txBody>
+                  <a:tcPr marL="73152" marR="73152" marT="54864" marB="54864" anchor="ctr">
+                    <a:lnL w="9525" cap="flat" cmpd="sng" algn="ctr">
+                      <a:solidFill>
+                        <a:srgbClr val="E2E8F0"/>
+                      </a:solidFill>
+                      <a:prstDash val="solid"/>
+                      <a:round/>
+                      <a:headEnd type="none" w="med" len="med"/>
+                      <a:tailEnd type="none" w="med" len="med"/>
+                    </a:lnL>
+                    <a:lnR w="9525" cap="flat" cmpd="sng" algn="ctr">
+                      <a:solidFill>
+                        <a:srgbClr val="E2E8F0"/>
+                      </a:solidFill>
+                      <a:prstDash val="solid"/>
+                      <a:round/>
+                      <a:headEnd type="none" w="med" len="med"/>
+                      <a:tailEnd type="none" w="med" len="med"/>
+                    </a:lnR>
+                    <a:lnT w="9525" cap="flat" cmpd="sng" algn="ctr">
+                      <a:solidFill>
+                        <a:srgbClr val="E2E8F0"/>
+                      </a:solidFill>
+                      <a:prstDash val="solid"/>
+                      <a:round/>
+                      <a:headEnd type="none" w="med" len="med"/>
+                      <a:tailEnd type="none" w="med" len="med"/>
+                    </a:lnT>
+                    <a:lnB w="9525" cap="flat" cmpd="sng" algn="ctr">
+                      <a:solidFill>
+                        <a:srgbClr val="E2E8F0"/>
+                      </a:solidFill>
+                      <a:prstDash val="solid"/>
+                      <a:round/>
+                      <a:headEnd type="none" w="med" len="med"/>
+                      <a:tailEnd type="none" w="med" len="med"/>
+                    </a:lnB>
+                    <a:solidFill>
+                      <a:srgbClr val="0F172A"/>
+                    </a:solidFill>
+                  </a:tcPr>
+                </a:tc>
+                <a:tc>
+                  <a:txBody>
+                    <a:bodyPr/>
+                    <a:lstStyle/>
+                    <a:p>
+                      <a:pPr algn="ctr" indent="0" marL="0">
+                        <a:buNone/>
+                      </a:pPr>
+                      <a:r>
+                        <a:rPr lang="en-US" sz="1000" b="1" dirty="0">
+                          <a:solidFill>
+                            <a:srgbClr val="FFFFFF"/>
+                          </a:solidFill>
+                        </a:rPr>
+                        <a:t>①出借</a:t>
+                      </a:r>
+                      <a:endParaRPr lang="en-US" sz="1000" dirty="0"/>
+                    </a:p>
+                  </a:txBody>
+                  <a:tcPr marL="73152" marR="73152" marT="54864" marB="54864" anchor="ctr">
+                    <a:lnL w="9525" cap="flat" cmpd="sng" algn="ctr">
+                      <a:solidFill>
+                        <a:srgbClr val="E2E8F0"/>
+                      </a:solidFill>
+                      <a:prstDash val="solid"/>
+                      <a:round/>
+                      <a:headEnd type="none" w="med" len="med"/>
+                      <a:tailEnd type="none" w="med" len="med"/>
+                    </a:lnL>
+                    <a:lnR w="9525" cap="flat" cmpd="sng" algn="ctr">
+                      <a:solidFill>
+                        <a:srgbClr val="E2E8F0"/>
+                      </a:solidFill>
+                      <a:prstDash val="solid"/>
+                      <a:round/>
+                      <a:headEnd type="none" w="med" len="med"/>
+                      <a:tailEnd type="none" w="med" len="med"/>
+                    </a:lnR>
+                    <a:lnT w="9525" cap="flat" cmpd="sng" algn="ctr">
+                      <a:solidFill>
+                        <a:srgbClr val="E2E8F0"/>
+                      </a:solidFill>
+                      <a:prstDash val="solid"/>
+                      <a:round/>
+                      <a:headEnd type="none" w="med" len="med"/>
+                      <a:tailEnd type="none" w="med" len="med"/>
+                    </a:lnT>
+                    <a:lnB w="9525" cap="flat" cmpd="sng" algn="ctr">
+                      <a:solidFill>
+                        <a:srgbClr val="E2E8F0"/>
+                      </a:solidFill>
+                      <a:prstDash val="solid"/>
+                      <a:round/>
+                      <a:headEnd type="none" w="med" len="med"/>
+                      <a:tailEnd type="none" w="med" len="med"/>
+                    </a:lnB>
+                    <a:solidFill>
+                      <a:srgbClr val="0F172A"/>
+                    </a:solidFill>
+                  </a:tcPr>
+                </a:tc>
+                <a:tc>
+                  <a:txBody>
+                    <a:bodyPr/>
+                    <a:lstStyle/>
+                    <a:p>
+                      <a:pPr algn="ctr" indent="0" marL="0">
+                        <a:buNone/>
+                      </a:pPr>
+                      <a:r>
+                        <a:rPr lang="en-US" sz="1000" b="1" dirty="0">
+                          <a:solidFill>
+                            <a:srgbClr val="FFFFFF"/>
+                          </a:solidFill>
+                        </a:rPr>
+                        <a:t>②③活期</a:t>
+                      </a:r>
+                      <a:endParaRPr lang="en-US" sz="1000" dirty="0"/>
+                    </a:p>
+                  </a:txBody>
+                  <a:tcPr marL="73152" marR="73152" marT="54864" marB="54864" anchor="ctr">
+                    <a:lnL w="9525" cap="flat" cmpd="sng" algn="ctr">
+                      <a:solidFill>
+                        <a:srgbClr val="E2E8F0"/>
+                      </a:solidFill>
+                      <a:prstDash val="solid"/>
+                      <a:round/>
+                      <a:headEnd type="none" w="med" len="med"/>
+                      <a:tailEnd type="none" w="med" len="med"/>
+                    </a:lnL>
+                    <a:lnR w="9525" cap="flat" cmpd="sng" algn="ctr">
+                      <a:solidFill>
+                        <a:srgbClr val="E2E8F0"/>
+                      </a:solidFill>
+                      <a:prstDash val="solid"/>
+                      <a:round/>
+                      <a:headEnd type="none" w="med" len="med"/>
+                      <a:tailEnd type="none" w="med" len="med"/>
+                    </a:lnR>
+                    <a:lnT w="9525" cap="flat" cmpd="sng" algn="ctr">
+                      <a:solidFill>
+                        <a:srgbClr val="E2E8F0"/>
+                      </a:solidFill>
+                      <a:prstDash val="solid"/>
+                      <a:round/>
+                      <a:headEnd type="none" w="med" len="med"/>
+                      <a:tailEnd type="none" w="med" len="med"/>
+                    </a:lnT>
+                    <a:lnB w="9525" cap="flat" cmpd="sng" algn="ctr">
+                      <a:solidFill>
+                        <a:srgbClr val="E2E8F0"/>
+                      </a:solidFill>
+                      <a:prstDash val="solid"/>
+                      <a:round/>
+                      <a:headEnd type="none" w="med" len="med"/>
+                      <a:tailEnd type="none" w="med" len="med"/>
+                    </a:lnB>
+                    <a:solidFill>
+                      <a:srgbClr val="0F172A"/>
+                    </a:solidFill>
+                  </a:tcPr>
+                </a:tc>
+                <a:tc>
+                  <a:txBody>
+                    <a:bodyPr/>
+                    <a:lstStyle/>
+                    <a:p>
+                      <a:pPr algn="ctr" indent="0" marL="0">
+                        <a:buNone/>
+                      </a:pPr>
+                      <a:r>
+                        <a:rPr lang="en-US" sz="1000" b="1" dirty="0">
+                          <a:solidFill>
+                            <a:srgbClr val="FFFFFF"/>
+                          </a:solidFill>
+                        </a:rPr>
+                        <a:t>④⑤雙幣</a:t>
+                      </a:r>
+                      <a:endParaRPr lang="en-US" sz="1000" dirty="0"/>
+                    </a:p>
+                  </a:txBody>
+                  <a:tcPr marL="73152" marR="73152" marT="54864" marB="54864" anchor="ctr">
+                    <a:lnL w="9525" cap="flat" cmpd="sng" algn="ctr">
+                      <a:solidFill>
+                        <a:srgbClr val="E2E8F0"/>
+                      </a:solidFill>
+                      <a:prstDash val="solid"/>
+                      <a:round/>
+                      <a:headEnd type="none" w="med" len="med"/>
+                      <a:tailEnd type="none" w="med" len="med"/>
+                    </a:lnL>
+                    <a:lnR w="9525" cap="flat" cmpd="sng" algn="ctr">
+                      <a:solidFill>
+                        <a:srgbClr val="E2E8F0"/>
+                      </a:solidFill>
+                      <a:prstDash val="solid"/>
+                      <a:round/>
+                      <a:headEnd type="none" w="med" len="med"/>
+                      <a:tailEnd type="none" w="med" len="med"/>
+                    </a:lnR>
+                    <a:lnT w="9525" cap="flat" cmpd="sng" algn="ctr">
+                      <a:solidFill>
+                        <a:srgbClr val="E2E8F0"/>
+                      </a:solidFill>
+                      <a:prstDash val="solid"/>
+                      <a:round/>
+                      <a:headEnd type="none" w="med" len="med"/>
+                      <a:tailEnd type="none" w="med" len="med"/>
+                    </a:lnT>
+                    <a:lnB w="9525" cap="flat" cmpd="sng" algn="ctr">
+                      <a:solidFill>
+                        <a:srgbClr val="E2E8F0"/>
+                      </a:solidFill>
+                      <a:prstDash val="solid"/>
+                      <a:round/>
+                      <a:headEnd type="none" w="med" len="med"/>
+                      <a:tailEnd type="none" w="med" len="med"/>
+                    </a:lnB>
+                    <a:solidFill>
+                      <a:srgbClr val="0F172A"/>
+                    </a:solidFill>
+                  </a:tcPr>
+                </a:tc>
+                <a:tc>
+                  <a:txBody>
+                    <a:bodyPr/>
+                    <a:lstStyle/>
+                    <a:p>
+                      <a:pPr algn="ctr" indent="0" marL="0">
+                        <a:buNone/>
+                      </a:pPr>
+                      <a:r>
+                        <a:rPr lang="en-US" sz="1000" b="1" dirty="0">
+                          <a:solidFill>
+                            <a:srgbClr val="FFFFFF"/>
+                          </a:solidFill>
+                        </a:rPr>
+                        <a:t>一年預估獲利</a:t>
+                      </a:r>
+                      <a:endParaRPr lang="en-US" sz="1000" dirty="0"/>
+                    </a:p>
+                  </a:txBody>
+                  <a:tcPr marL="73152" marR="73152" marT="54864" marB="54864" anchor="ctr">
+                    <a:lnL w="9525" cap="flat" cmpd="sng" algn="ctr">
+                      <a:solidFill>
+                        <a:srgbClr val="E2E8F0"/>
+                      </a:solidFill>
+                      <a:prstDash val="solid"/>
+                      <a:round/>
+                      <a:headEnd type="none" w="med" len="med"/>
+                      <a:tailEnd type="none" w="med" len="med"/>
+                    </a:lnL>
+                    <a:lnR w="9525" cap="flat" cmpd="sng" algn="ctr">
+                      <a:solidFill>
+                        <a:srgbClr val="E2E8F0"/>
+                      </a:solidFill>
+                      <a:prstDash val="solid"/>
+                      <a:round/>
+                      <a:headEnd type="none" w="med" len="med"/>
+                      <a:tailEnd type="none" w="med" len="med"/>
+                    </a:lnR>
+                    <a:lnT w="9525" cap="flat" cmpd="sng" algn="ctr">
+                      <a:solidFill>
+                        <a:srgbClr val="E2E8F0"/>
+                      </a:solidFill>
+                      <a:prstDash val="solid"/>
+                      <a:round/>
+                      <a:headEnd type="none" w="med" len="med"/>
+                      <a:tailEnd type="none" w="med" len="med"/>
+                    </a:lnT>
+                    <a:lnB w="9525" cap="flat" cmpd="sng" algn="ctr">
+                      <a:solidFill>
+                        <a:srgbClr val="E2E8F0"/>
+                      </a:solidFill>
+                      <a:prstDash val="solid"/>
+                      <a:round/>
+                      <a:headEnd type="none" w="med" len="med"/>
+                      <a:tailEnd type="none" w="med" len="med"/>
+                    </a:lnB>
+                    <a:solidFill>
+                      <a:srgbClr val="0F172A"/>
+                    </a:solidFill>
+                  </a:tcPr>
+                </a:tc>
+              </a:tr>
+              <a:tr h="548640">
+                <a:tc>
+                  <a:txBody>
+                    <a:bodyPr/>
+                    <a:lstStyle/>
+                    <a:p>
+                      <a:pPr algn="ctr" indent="0" marL="0">
+                        <a:buNone/>
+                      </a:pPr>
+                      <a:r>
+                        <a:rPr lang="en-US" sz="1000" dirty="0">
+                          <a:solidFill>
+                            <a:srgbClr val="334155"/>
+                          </a:solidFill>
+                        </a:rPr>
+                        <a:t>A 求穩為主</a:t>
+                      </a:r>
+                      <a:endParaRPr lang="en-US" sz="1000" dirty="0"/>
+                    </a:p>
+                  </a:txBody>
+                  <a:tcPr marL="73152" marR="73152" marT="54864" marB="54864" anchor="ctr">
+                    <a:lnL w="9525" cap="flat" cmpd="sng" algn="ctr">
+                      <a:solidFill>
+                        <a:srgbClr val="E2E8F0"/>
+                      </a:solidFill>
+                      <a:prstDash val="solid"/>
+                      <a:round/>
+                      <a:headEnd type="none" w="med" len="med"/>
+                      <a:tailEnd type="none" w="med" len="med"/>
+                    </a:lnL>
+                    <a:lnR w="9525" cap="flat" cmpd="sng" algn="ctr">
+                      <a:solidFill>
+                        <a:srgbClr val="E2E8F0"/>
+                      </a:solidFill>
+                      <a:prstDash val="solid"/>
+                      <a:round/>
+                      <a:headEnd type="none" w="med" len="med"/>
+                      <a:tailEnd type="none" w="med" len="med"/>
+                    </a:lnR>
+                    <a:lnT w="9525" cap="flat" cmpd="sng" algn="ctr">
+                      <a:solidFill>
+                        <a:srgbClr val="E2E8F0"/>
+                      </a:solidFill>
+                      <a:prstDash val="solid"/>
+                      <a:round/>
+                      <a:headEnd type="none" w="med" len="med"/>
+                      <a:tailEnd type="none" w="med" len="med"/>
+                    </a:lnT>
+                    <a:lnB w="9525" cap="flat" cmpd="sng" algn="ctr">
+                      <a:solidFill>
+                        <a:srgbClr val="E2E8F0"/>
+                      </a:solidFill>
+                      <a:prstDash val="solid"/>
+                      <a:round/>
+                      <a:headEnd type="none" w="med" len="med"/>
+                      <a:tailEnd type="none" w="med" len="med"/>
+                    </a:lnB>
+                    <a:solidFill>
+                      <a:srgbClr val="FFFFFF"/>
+                    </a:solidFill>
+                  </a:tcPr>
+                </a:tc>
+                <a:tc>
+                  <a:txBody>
+                    <a:bodyPr/>
+                    <a:lstStyle/>
+                    <a:p>
+                      <a:pPr algn="ctr" indent="0" marL="0">
+                        <a:buNone/>
+                      </a:pPr>
+                      <a:r>
+                        <a:rPr lang="en-US" sz="1000" dirty="0">
+                          <a:solidFill>
+                            <a:srgbClr val="334155"/>
+                          </a:solidFill>
+                        </a:rPr>
+                        <a:t>70%</a:t>
+                      </a:r>
+                      <a:endParaRPr lang="en-US" sz="1000" dirty="0"/>
+                    </a:p>
+                  </a:txBody>
+                  <a:tcPr marL="73152" marR="73152" marT="54864" marB="54864" anchor="ctr">
+                    <a:lnL w="9525" cap="flat" cmpd="sng" algn="ctr">
+                      <a:solidFill>
+                        <a:srgbClr val="E2E8F0"/>
+                      </a:solidFill>
+                      <a:prstDash val="solid"/>
+                      <a:round/>
+                      <a:headEnd type="none" w="med" len="med"/>
+                      <a:tailEnd type="none" w="med" len="med"/>
+                    </a:lnL>
+                    <a:lnR w="9525" cap="flat" cmpd="sng" algn="ctr">
+                      <a:solidFill>
+                        <a:srgbClr val="E2E8F0"/>
+                      </a:solidFill>
+                      <a:prstDash val="solid"/>
+                      <a:round/>
+                      <a:headEnd type="none" w="med" len="med"/>
+                      <a:tailEnd type="none" w="med" len="med"/>
+                    </a:lnR>
+                    <a:lnT w="9525" cap="flat" cmpd="sng" algn="ctr">
+                      <a:solidFill>
+                        <a:srgbClr val="E2E8F0"/>
+                      </a:solidFill>
+                      <a:prstDash val="solid"/>
+                      <a:round/>
+                      <a:headEnd type="none" w="med" len="med"/>
+                      <a:tailEnd type="none" w="med" len="med"/>
+                    </a:lnT>
+                    <a:lnB w="9525" cap="flat" cmpd="sng" algn="ctr">
+                      <a:solidFill>
+                        <a:srgbClr val="E2E8F0"/>
+                      </a:solidFill>
+                      <a:prstDash val="solid"/>
+                      <a:round/>
+                      <a:headEnd type="none" w="med" len="med"/>
+                      <a:tailEnd type="none" w="med" len="med"/>
+                    </a:lnB>
+                    <a:solidFill>
+                      <a:srgbClr val="FFFFFF"/>
+                    </a:solidFill>
+                  </a:tcPr>
+                </a:tc>
+                <a:tc>
+                  <a:txBody>
+                    <a:bodyPr/>
+                    <a:lstStyle/>
+                    <a:p>
+                      <a:pPr algn="ctr" indent="0" marL="0">
+                        <a:buNone/>
+                      </a:pPr>
+                      <a:r>
+                        <a:rPr lang="en-US" sz="1000" dirty="0">
+                          <a:solidFill>
+                            <a:srgbClr val="334155"/>
+                          </a:solidFill>
+                        </a:rPr>
+                        <a:t>20%</a:t>
+                      </a:r>
+                      <a:endParaRPr lang="en-US" sz="1000" dirty="0"/>
+                    </a:p>
+                  </a:txBody>
+                  <a:tcPr marL="73152" marR="73152" marT="54864" marB="54864" anchor="ctr">
+                    <a:lnL w="9525" cap="flat" cmpd="sng" algn="ctr">
+                      <a:solidFill>
+                        <a:srgbClr val="E2E8F0"/>
+                      </a:solidFill>
+                      <a:prstDash val="solid"/>
+                      <a:round/>
+                      <a:headEnd type="none" w="med" len="med"/>
+                      <a:tailEnd type="none" w="med" len="med"/>
+                    </a:lnL>
+                    <a:lnR w="9525" cap="flat" cmpd="sng" algn="ctr">
+                      <a:solidFill>
+                        <a:srgbClr val="E2E8F0"/>
+                      </a:solidFill>
+                      <a:prstDash val="solid"/>
+                      <a:round/>
+                      <a:headEnd type="none" w="med" len="med"/>
+                      <a:tailEnd type="none" w="med" len="med"/>
+                    </a:lnR>
+                    <a:lnT w="9525" cap="flat" cmpd="sng" algn="ctr">
+                      <a:solidFill>
+                        <a:srgbClr val="E2E8F0"/>
+                      </a:solidFill>
+                      <a:prstDash val="solid"/>
+                      <a:round/>
+                      <a:headEnd type="none" w="med" len="med"/>
+                      <a:tailEnd type="none" w="med" len="med"/>
+                    </a:lnT>
+                    <a:lnB w="9525" cap="flat" cmpd="sng" algn="ctr">
+                      <a:solidFill>
+                        <a:srgbClr val="E2E8F0"/>
+                      </a:solidFill>
+                      <a:prstDash val="solid"/>
+                      <a:round/>
+                      <a:headEnd type="none" w="med" len="med"/>
+                      <a:tailEnd type="none" w="med" len="med"/>
+                    </a:lnB>
+                    <a:solidFill>
+                      <a:srgbClr val="FFFFFF"/>
+                    </a:solidFill>
+                  </a:tcPr>
+                </a:tc>
+                <a:tc>
+                  <a:txBody>
+                    <a:bodyPr/>
+                    <a:lstStyle/>
+                    <a:p>
+                      <a:pPr algn="ctr" indent="0" marL="0">
+                        <a:buNone/>
+                      </a:pPr>
+                      <a:r>
+                        <a:rPr lang="en-US" sz="1000" dirty="0">
+                          <a:solidFill>
+                            <a:srgbClr val="334155"/>
+                          </a:solidFill>
+                        </a:rPr>
+                        <a:t>10%</a:t>
+                      </a:r>
+                      <a:endParaRPr lang="en-US" sz="1000" dirty="0"/>
+                    </a:p>
+                  </a:txBody>
+                  <a:tcPr marL="73152" marR="73152" marT="54864" marB="54864" anchor="ctr">
+                    <a:lnL w="9525" cap="flat" cmpd="sng" algn="ctr">
+                      <a:solidFill>
+                        <a:srgbClr val="E2E8F0"/>
+                      </a:solidFill>
+                      <a:prstDash val="solid"/>
+                      <a:round/>
+                      <a:headEnd type="none" w="med" len="med"/>
+                      <a:tailEnd type="none" w="med" len="med"/>
+                    </a:lnL>
+                    <a:lnR w="9525" cap="flat" cmpd="sng" algn="ctr">
+                      <a:solidFill>
+                        <a:srgbClr val="E2E8F0"/>
+                      </a:solidFill>
+                      <a:prstDash val="solid"/>
+                      <a:round/>
+                      <a:headEnd type="none" w="med" len="med"/>
+                      <a:tailEnd type="none" w="med" len="med"/>
+                    </a:lnR>
+                    <a:lnT w="9525" cap="flat" cmpd="sng" algn="ctr">
+                      <a:solidFill>
+                        <a:srgbClr val="E2E8F0"/>
+                      </a:solidFill>
+                      <a:prstDash val="solid"/>
+                      <a:round/>
+                      <a:headEnd type="none" w="med" len="med"/>
+                      <a:tailEnd type="none" w="med" len="med"/>
+                    </a:lnT>
+                    <a:lnB w="9525" cap="flat" cmpd="sng" algn="ctr">
+                      <a:solidFill>
+                        <a:srgbClr val="E2E8F0"/>
+                      </a:solidFill>
+                      <a:prstDash val="solid"/>
+                      <a:round/>
+                      <a:headEnd type="none" w="med" len="med"/>
+                      <a:tailEnd type="none" w="med" len="med"/>
+                    </a:lnB>
+                    <a:solidFill>
+                      <a:srgbClr val="FFFFFF"/>
+                    </a:solidFill>
+                  </a:tcPr>
+                </a:tc>
+                <a:tc>
+                  <a:txBody>
+                    <a:bodyPr/>
+                    <a:lstStyle/>
+                    <a:p>
+                      <a:pPr algn="ctr" indent="0" marL="0">
+                        <a:buNone/>
+                      </a:pPr>
+                      <a:r>
+                        <a:rPr lang="en-US" sz="1000" dirty="0">
+                          <a:solidFill>
+                            <a:srgbClr val="334155"/>
+                          </a:solidFill>
+                        </a:rPr>
+                        <a:t>NT$607,500</a:t>
+                      </a:r>
+                      <a:endParaRPr lang="en-US" sz="1000" dirty="0"/>
+                    </a:p>
+                  </a:txBody>
+                  <a:tcPr marL="73152" marR="73152" marT="54864" marB="54864" anchor="ctr">
+                    <a:lnL w="9525" cap="flat" cmpd="sng" algn="ctr">
+                      <a:solidFill>
+                        <a:srgbClr val="E2E8F0"/>
+                      </a:solidFill>
+                      <a:prstDash val="solid"/>
+                      <a:round/>
+                      <a:headEnd type="none" w="med" len="med"/>
+                      <a:tailEnd type="none" w="med" len="med"/>
+                    </a:lnL>
+                    <a:lnR w="9525" cap="flat" cmpd="sng" algn="ctr">
+                      <a:solidFill>
+                        <a:srgbClr val="E2E8F0"/>
+                      </a:solidFill>
+                      <a:prstDash val="solid"/>
+                      <a:round/>
+                      <a:headEnd type="none" w="med" len="med"/>
+                      <a:tailEnd type="none" w="med" len="med"/>
+                    </a:lnR>
+                    <a:lnT w="9525" cap="flat" cmpd="sng" algn="ctr">
+                      <a:solidFill>
+                        <a:srgbClr val="E2E8F0"/>
+                      </a:solidFill>
+                      <a:prstDash val="solid"/>
+                      <a:round/>
+                      <a:headEnd type="none" w="med" len="med"/>
+                      <a:tailEnd type="none" w="med" len="med"/>
+                    </a:lnT>
+                    <a:lnB w="9525" cap="flat" cmpd="sng" algn="ctr">
+                      <a:solidFill>
+                        <a:srgbClr val="E2E8F0"/>
+                      </a:solidFill>
+                      <a:prstDash val="solid"/>
+                      <a:round/>
+                      <a:headEnd type="none" w="med" len="med"/>
+                      <a:tailEnd type="none" w="med" len="med"/>
+                    </a:lnB>
+                    <a:solidFill>
+                      <a:srgbClr val="FFFFFF"/>
+                    </a:solidFill>
+                  </a:tcPr>
+                </a:tc>
+              </a:tr>
+              <a:tr h="548640">
+                <a:tc>
+                  <a:txBody>
+                    <a:bodyPr/>
+                    <a:lstStyle/>
+                    <a:p>
+                      <a:pPr algn="ctr" indent="0" marL="0">
+                        <a:buNone/>
+                      </a:pPr>
+                      <a:r>
+                        <a:rPr lang="en-US" sz="1000" dirty="0">
+                          <a:solidFill>
+                            <a:srgbClr val="334155"/>
+                          </a:solidFill>
+                        </a:rPr>
+                        <a:t>B 穩中求進</a:t>
+                      </a:r>
+                      <a:endParaRPr lang="en-US" sz="1000" dirty="0"/>
+                    </a:p>
+                  </a:txBody>
+                  <a:tcPr marL="73152" marR="73152" marT="54864" marB="54864" anchor="ctr">
+                    <a:lnL w="9525" cap="flat" cmpd="sng" algn="ctr">
+                      <a:solidFill>
+                        <a:srgbClr val="E2E8F0"/>
+                      </a:solidFill>
+                      <a:prstDash val="solid"/>
+                      <a:round/>
+                      <a:headEnd type="none" w="med" len="med"/>
+                      <a:tailEnd type="none" w="med" len="med"/>
+                    </a:lnL>
+                    <a:lnR w="9525" cap="flat" cmpd="sng" algn="ctr">
+                      <a:solidFill>
+                        <a:srgbClr val="E2E8F0"/>
+                      </a:solidFill>
+                      <a:prstDash val="solid"/>
+                      <a:round/>
+                      <a:headEnd type="none" w="med" len="med"/>
+                      <a:tailEnd type="none" w="med" len="med"/>
+                    </a:lnR>
+                    <a:lnT w="9525" cap="flat" cmpd="sng" algn="ctr">
+                      <a:solidFill>
+                        <a:srgbClr val="E2E8F0"/>
+                      </a:solidFill>
+                      <a:prstDash val="solid"/>
+                      <a:round/>
+                      <a:headEnd type="none" w="med" len="med"/>
+                      <a:tailEnd type="none" w="med" len="med"/>
+                    </a:lnT>
+                    <a:lnB w="9525" cap="flat" cmpd="sng" algn="ctr">
+                      <a:solidFill>
+                        <a:srgbClr val="E2E8F0"/>
+                      </a:solidFill>
+                      <a:prstDash val="solid"/>
+                      <a:round/>
+                      <a:headEnd type="none" w="med" len="med"/>
+                      <a:tailEnd type="none" w="med" len="med"/>
+                    </a:lnB>
+                    <a:solidFill>
+                      <a:srgbClr val="F8FAFC"/>
+                    </a:solidFill>
+                  </a:tcPr>
+                </a:tc>
+                <a:tc>
+                  <a:txBody>
+                    <a:bodyPr/>
+                    <a:lstStyle/>
+                    <a:p>
+                      <a:pPr algn="ctr" indent="0" marL="0">
+                        <a:buNone/>
+                      </a:pPr>
+                      <a:r>
+                        <a:rPr lang="en-US" sz="1000" dirty="0">
+                          <a:solidFill>
+                            <a:srgbClr val="334155"/>
+                          </a:solidFill>
+                        </a:rPr>
+                        <a:t>55%</a:t>
+                      </a:r>
+                      <a:endParaRPr lang="en-US" sz="1000" dirty="0"/>
+                    </a:p>
+                  </a:txBody>
+                  <a:tcPr marL="73152" marR="73152" marT="54864" marB="54864" anchor="ctr">
+                    <a:lnL w="9525" cap="flat" cmpd="sng" algn="ctr">
+                      <a:solidFill>
+                        <a:srgbClr val="E2E8F0"/>
+                      </a:solidFill>
+                      <a:prstDash val="solid"/>
+                      <a:round/>
+                      <a:headEnd type="none" w="med" len="med"/>
+                      <a:tailEnd type="none" w="med" len="med"/>
+                    </a:lnL>
+                    <a:lnR w="9525" cap="flat" cmpd="sng" algn="ctr">
+                      <a:solidFill>
+                        <a:srgbClr val="E2E8F0"/>
+                      </a:solidFill>
+                      <a:prstDash val="solid"/>
+                      <a:round/>
+                      <a:headEnd type="none" w="med" len="med"/>
+                      <a:tailEnd type="none" w="med" len="med"/>
+                    </a:lnR>
+                    <a:lnT w="9525" cap="flat" cmpd="sng" algn="ctr">
+                      <a:solidFill>
+                        <a:srgbClr val="E2E8F0"/>
+                      </a:solidFill>
+                      <a:prstDash val="solid"/>
+                      <a:round/>
+                      <a:headEnd type="none" w="med" len="med"/>
+                      <a:tailEnd type="none" w="med" len="med"/>
+                    </a:lnT>
+                    <a:lnB w="9525" cap="flat" cmpd="sng" algn="ctr">
+                      <a:solidFill>
+                        <a:srgbClr val="E2E8F0"/>
+                      </a:solidFill>
+                      <a:prstDash val="solid"/>
+                      <a:round/>
+                      <a:headEnd type="none" w="med" len="med"/>
+                      <a:tailEnd type="none" w="med" len="med"/>
+                    </a:lnB>
+                    <a:solidFill>
+                      <a:srgbClr val="F8FAFC"/>
+                    </a:solidFill>
+                  </a:tcPr>
+                </a:tc>
+                <a:tc>
+                  <a:txBody>
+                    <a:bodyPr/>
+                    <a:lstStyle/>
+                    <a:p>
+                      <a:pPr algn="ctr" indent="0" marL="0">
+                        <a:buNone/>
+                      </a:pPr>
+                      <a:r>
+                        <a:rPr lang="en-US" sz="1000" dirty="0">
+                          <a:solidFill>
+                            <a:srgbClr val="334155"/>
+                          </a:solidFill>
+                        </a:rPr>
+                        <a:t>20%</a:t>
+                      </a:r>
+                      <a:endParaRPr lang="en-US" sz="1000" dirty="0"/>
+                    </a:p>
+                  </a:txBody>
+                  <a:tcPr marL="73152" marR="73152" marT="54864" marB="54864" anchor="ctr">
+                    <a:lnL w="9525" cap="flat" cmpd="sng" algn="ctr">
+                      <a:solidFill>
+                        <a:srgbClr val="E2E8F0"/>
+                      </a:solidFill>
+                      <a:prstDash val="solid"/>
+                      <a:round/>
+                      <a:headEnd type="none" w="med" len="med"/>
+                      <a:tailEnd type="none" w="med" len="med"/>
+                    </a:lnL>
+                    <a:lnR w="9525" cap="flat" cmpd="sng" algn="ctr">
+                      <a:solidFill>
+                        <a:srgbClr val="E2E8F0"/>
+                      </a:solidFill>
+                      <a:prstDash val="solid"/>
+                      <a:round/>
+                      <a:headEnd type="none" w="med" len="med"/>
+                      <a:tailEnd type="none" w="med" len="med"/>
+                    </a:lnR>
+                    <a:lnT w="9525" cap="flat" cmpd="sng" algn="ctr">
+                      <a:solidFill>
+                        <a:srgbClr val="E2E8F0"/>
+                      </a:solidFill>
+                      <a:prstDash val="solid"/>
+                      <a:round/>
+                      <a:headEnd type="none" w="med" len="med"/>
+                      <a:tailEnd type="none" w="med" len="med"/>
+                    </a:lnT>
+                    <a:lnB w="9525" cap="flat" cmpd="sng" algn="ctr">
+                      <a:solidFill>
+                        <a:srgbClr val="E2E8F0"/>
+                      </a:solidFill>
+                      <a:prstDash val="solid"/>
+                      <a:round/>
+                      <a:headEnd type="none" w="med" len="med"/>
+                      <a:tailEnd type="none" w="med" len="med"/>
+                    </a:lnB>
+                    <a:solidFill>
+                      <a:srgbClr val="F8FAFC"/>
+                    </a:solidFill>
+                  </a:tcPr>
+                </a:tc>
+                <a:tc>
+                  <a:txBody>
+                    <a:bodyPr/>
+                    <a:lstStyle/>
+                    <a:p>
+                      <a:pPr algn="ctr" indent="0" marL="0">
+                        <a:buNone/>
+                      </a:pPr>
+                      <a:r>
+                        <a:rPr lang="en-US" sz="1000" dirty="0">
+                          <a:solidFill>
+                            <a:srgbClr val="334155"/>
+                          </a:solidFill>
+                        </a:rPr>
+                        <a:t>25%</a:t>
+                      </a:r>
+                      <a:endParaRPr lang="en-US" sz="1000" dirty="0"/>
+                    </a:p>
+                  </a:txBody>
+                  <a:tcPr marL="73152" marR="73152" marT="54864" marB="54864" anchor="ctr">
+                    <a:lnL w="9525" cap="flat" cmpd="sng" algn="ctr">
+                      <a:solidFill>
+                        <a:srgbClr val="E2E8F0"/>
+                      </a:solidFill>
+                      <a:prstDash val="solid"/>
+                      <a:round/>
+                      <a:headEnd type="none" w="med" len="med"/>
+                      <a:tailEnd type="none" w="med" len="med"/>
+                    </a:lnL>
+                    <a:lnR w="9525" cap="flat" cmpd="sng" algn="ctr">
+                      <a:solidFill>
+                        <a:srgbClr val="E2E8F0"/>
+                      </a:solidFill>
+                      <a:prstDash val="solid"/>
+                      <a:round/>
+                      <a:headEnd type="none" w="med" len="med"/>
+                      <a:tailEnd type="none" w="med" len="med"/>
+                    </a:lnR>
+                    <a:lnT w="9525" cap="flat" cmpd="sng" algn="ctr">
+                      <a:solidFill>
+                        <a:srgbClr val="E2E8F0"/>
+                      </a:solidFill>
+                      <a:prstDash val="solid"/>
+                      <a:round/>
+                      <a:headEnd type="none" w="med" len="med"/>
+                      <a:tailEnd type="none" w="med" len="med"/>
+                    </a:lnT>
+                    <a:lnB w="9525" cap="flat" cmpd="sng" algn="ctr">
+                      <a:solidFill>
+                        <a:srgbClr val="E2E8F0"/>
+                      </a:solidFill>
+                      <a:prstDash val="solid"/>
+                      <a:round/>
+                      <a:headEnd type="none" w="med" len="med"/>
+                      <a:tailEnd type="none" w="med" len="med"/>
+                    </a:lnB>
+                    <a:solidFill>
+                      <a:srgbClr val="F8FAFC"/>
+                    </a:solidFill>
+                  </a:tcPr>
+                </a:tc>
+                <a:tc>
+                  <a:txBody>
+                    <a:bodyPr/>
+                    <a:lstStyle/>
+                    <a:p>
+                      <a:pPr algn="ctr" indent="0" marL="0">
+                        <a:buNone/>
+                      </a:pPr>
+                      <a:r>
+                        <a:rPr lang="en-US" sz="1000" dirty="0">
+                          <a:solidFill>
+                            <a:srgbClr val="334155"/>
+                          </a:solidFill>
+                        </a:rPr>
+                        <a:t>NT$868,000</a:t>
+                      </a:r>
+                      <a:endParaRPr lang="en-US" sz="1000" dirty="0"/>
+                    </a:p>
+                  </a:txBody>
+                  <a:tcPr marL="73152" marR="73152" marT="54864" marB="54864" anchor="ctr">
+                    <a:lnL w="9525" cap="flat" cmpd="sng" algn="ctr">
+                      <a:solidFill>
+                        <a:srgbClr val="E2E8F0"/>
+                      </a:solidFill>
+                      <a:prstDash val="solid"/>
+                      <a:round/>
+                      <a:headEnd type="none" w="med" len="med"/>
+                      <a:tailEnd type="none" w="med" len="med"/>
+                    </a:lnL>
+                    <a:lnR w="9525" cap="flat" cmpd="sng" algn="ctr">
+                      <a:solidFill>
+                        <a:srgbClr val="E2E8F0"/>
+                      </a:solidFill>
+                      <a:prstDash val="solid"/>
+                      <a:round/>
+                      <a:headEnd type="none" w="med" len="med"/>
+                      <a:tailEnd type="none" w="med" len="med"/>
+                    </a:lnR>
+                    <a:lnT w="9525" cap="flat" cmpd="sng" algn="ctr">
+                      <a:solidFill>
+                        <a:srgbClr val="E2E8F0"/>
+                      </a:solidFill>
+                      <a:prstDash val="solid"/>
+                      <a:round/>
+                      <a:headEnd type="none" w="med" len="med"/>
+                      <a:tailEnd type="none" w="med" len="med"/>
+                    </a:lnT>
+                    <a:lnB w="9525" cap="flat" cmpd="sng" algn="ctr">
+                      <a:solidFill>
+                        <a:srgbClr val="E2E8F0"/>
+                      </a:solidFill>
+                      <a:prstDash val="solid"/>
+                      <a:round/>
+                      <a:headEnd type="none" w="med" len="med"/>
+                      <a:tailEnd type="none" w="med" len="med"/>
+                    </a:lnB>
+                    <a:solidFill>
+                      <a:srgbClr val="F8FAFC"/>
+                    </a:solidFill>
+                  </a:tcPr>
+                </a:tc>
+              </a:tr>
+              <a:tr h="548640">
+                <a:tc>
+                  <a:txBody>
+                    <a:bodyPr/>
+                    <a:lstStyle/>
+                    <a:p>
+                      <a:pPr algn="ctr" indent="0" marL="0">
+                        <a:buNone/>
+                      </a:pPr>
+                      <a:r>
+                        <a:rPr lang="en-US" sz="1000" dirty="0">
+                          <a:solidFill>
+                            <a:srgbClr val="334155"/>
+                          </a:solidFill>
+                        </a:rPr>
+                        <a:t>C 積極型</a:t>
+                      </a:r>
+                      <a:endParaRPr lang="en-US" sz="1000" dirty="0"/>
+                    </a:p>
+                  </a:txBody>
+                  <a:tcPr marL="73152" marR="73152" marT="54864" marB="54864" anchor="ctr">
+                    <a:lnL w="9525" cap="flat" cmpd="sng" algn="ctr">
+                      <a:solidFill>
+                        <a:srgbClr val="E2E8F0"/>
+                      </a:solidFill>
+                      <a:prstDash val="solid"/>
+                      <a:round/>
+                      <a:headEnd type="none" w="med" len="med"/>
+                      <a:tailEnd type="none" w="med" len="med"/>
+                    </a:lnL>
+                    <a:lnR w="9525" cap="flat" cmpd="sng" algn="ctr">
+                      <a:solidFill>
+                        <a:srgbClr val="E2E8F0"/>
+                      </a:solidFill>
+                      <a:prstDash val="solid"/>
+                      <a:round/>
+                      <a:headEnd type="none" w="med" len="med"/>
+                      <a:tailEnd type="none" w="med" len="med"/>
+                    </a:lnR>
+                    <a:lnT w="9525" cap="flat" cmpd="sng" algn="ctr">
+                      <a:solidFill>
+                        <a:srgbClr val="E2E8F0"/>
+                      </a:solidFill>
+                      <a:prstDash val="solid"/>
+                      <a:round/>
+                      <a:headEnd type="none" w="med" len="med"/>
+                      <a:tailEnd type="none" w="med" len="med"/>
+                    </a:lnT>
+                    <a:lnB w="9525" cap="flat" cmpd="sng" algn="ctr">
+                      <a:solidFill>
+                        <a:srgbClr val="E2E8F0"/>
+                      </a:solidFill>
+                      <a:prstDash val="solid"/>
+                      <a:round/>
+                      <a:headEnd type="none" w="med" len="med"/>
+                      <a:tailEnd type="none" w="med" len="med"/>
+                    </a:lnB>
+                    <a:solidFill>
+                      <a:srgbClr val="FFFFFF"/>
+                    </a:solidFill>
+                  </a:tcPr>
+                </a:tc>
+                <a:tc>
+                  <a:txBody>
+                    <a:bodyPr/>
+                    <a:lstStyle/>
+                    <a:p>
+                      <a:pPr algn="ctr" indent="0" marL="0">
+                        <a:buNone/>
+                      </a:pPr>
+                      <a:r>
+                        <a:rPr lang="en-US" sz="1000" dirty="0">
+                          <a:solidFill>
+                            <a:srgbClr val="334155"/>
+                          </a:solidFill>
+                        </a:rPr>
+                        <a:t>40%</a:t>
+                      </a:r>
+                      <a:endParaRPr lang="en-US" sz="1000" dirty="0"/>
+                    </a:p>
+                  </a:txBody>
+                  <a:tcPr marL="73152" marR="73152" marT="54864" marB="54864" anchor="ctr">
+                    <a:lnL w="9525" cap="flat" cmpd="sng" algn="ctr">
+                      <a:solidFill>
+                        <a:srgbClr val="E2E8F0"/>
+                      </a:solidFill>
+                      <a:prstDash val="solid"/>
+                      <a:round/>
+                      <a:headEnd type="none" w="med" len="med"/>
+                      <a:tailEnd type="none" w="med" len="med"/>
+                    </a:lnL>
+                    <a:lnR w="9525" cap="flat" cmpd="sng" algn="ctr">
+                      <a:solidFill>
+                        <a:srgbClr val="E2E8F0"/>
+                      </a:solidFill>
+                      <a:prstDash val="solid"/>
+                      <a:round/>
+                      <a:headEnd type="none" w="med" len="med"/>
+                      <a:tailEnd type="none" w="med" len="med"/>
+                    </a:lnR>
+                    <a:lnT w="9525" cap="flat" cmpd="sng" algn="ctr">
+                      <a:solidFill>
+                        <a:srgbClr val="E2E8F0"/>
+                      </a:solidFill>
+                      <a:prstDash val="solid"/>
+                      <a:round/>
+                      <a:headEnd type="none" w="med" len="med"/>
+                      <a:tailEnd type="none" w="med" len="med"/>
+                    </a:lnT>
+                    <a:lnB w="9525" cap="flat" cmpd="sng" algn="ctr">
+                      <a:solidFill>
+                        <a:srgbClr val="E2E8F0"/>
+                      </a:solidFill>
+                      <a:prstDash val="solid"/>
+                      <a:round/>
+                      <a:headEnd type="none" w="med" len="med"/>
+                      <a:tailEnd type="none" w="med" len="med"/>
+                    </a:lnB>
+                    <a:solidFill>
+                      <a:srgbClr val="FFFFFF"/>
+                    </a:solidFill>
+                  </a:tcPr>
+                </a:tc>
+                <a:tc>
+                  <a:txBody>
+                    <a:bodyPr/>
+                    <a:lstStyle/>
+                    <a:p>
+                      <a:pPr algn="ctr" indent="0" marL="0">
+                        <a:buNone/>
+                      </a:pPr>
+                      <a:r>
+                        <a:rPr lang="en-US" sz="1000" dirty="0">
+                          <a:solidFill>
+                            <a:srgbClr val="334155"/>
+                          </a:solidFill>
+                        </a:rPr>
+                        <a:t>20%</a:t>
+                      </a:r>
+                      <a:endParaRPr lang="en-US" sz="1000" dirty="0"/>
+                    </a:p>
+                  </a:txBody>
+                  <a:tcPr marL="73152" marR="73152" marT="54864" marB="54864" anchor="ctr">
+                    <a:lnL w="9525" cap="flat" cmpd="sng" algn="ctr">
+                      <a:solidFill>
+                        <a:srgbClr val="E2E8F0"/>
+                      </a:solidFill>
+                      <a:prstDash val="solid"/>
+                      <a:round/>
+                      <a:headEnd type="none" w="med" len="med"/>
+                      <a:tailEnd type="none" w="med" len="med"/>
+                    </a:lnL>
+                    <a:lnR w="9525" cap="flat" cmpd="sng" algn="ctr">
+                      <a:solidFill>
+                        <a:srgbClr val="E2E8F0"/>
+                      </a:solidFill>
+                      <a:prstDash val="solid"/>
+                      <a:round/>
+                      <a:headEnd type="none" w="med" len="med"/>
+                      <a:tailEnd type="none" w="med" len="med"/>
+                    </a:lnR>
+                    <a:lnT w="9525" cap="flat" cmpd="sng" algn="ctr">
+                      <a:solidFill>
+                        <a:srgbClr val="E2E8F0"/>
+                      </a:solidFill>
+                      <a:prstDash val="solid"/>
+                      <a:round/>
+                      <a:headEnd type="none" w="med" len="med"/>
+                      <a:tailEnd type="none" w="med" len="med"/>
+                    </a:lnT>
+                    <a:lnB w="9525" cap="flat" cmpd="sng" algn="ctr">
+                      <a:solidFill>
+                        <a:srgbClr val="E2E8F0"/>
+                      </a:solidFill>
+                      <a:prstDash val="solid"/>
+                      <a:round/>
+                      <a:headEnd type="none" w="med" len="med"/>
+                      <a:tailEnd type="none" w="med" len="med"/>
+                    </a:lnB>
+                    <a:solidFill>
+                      <a:srgbClr val="FFFFFF"/>
+                    </a:solidFill>
+                  </a:tcPr>
+                </a:tc>
+                <a:tc>
+                  <a:txBody>
+                    <a:bodyPr/>
+                    <a:lstStyle/>
+                    <a:p>
+                      <a:pPr algn="ctr" indent="0" marL="0">
+                        <a:buNone/>
+                      </a:pPr>
+                      <a:r>
+                        <a:rPr lang="en-US" sz="1000" dirty="0">
+                          <a:solidFill>
+                            <a:srgbClr val="334155"/>
+                          </a:solidFill>
+                        </a:rPr>
+                        <a:t>40%</a:t>
+                      </a:r>
+                      <a:endParaRPr lang="en-US" sz="1000" dirty="0"/>
+                    </a:p>
+                  </a:txBody>
+                  <a:tcPr marL="73152" marR="73152" marT="54864" marB="54864" anchor="ctr">
+                    <a:lnL w="9525" cap="flat" cmpd="sng" algn="ctr">
+                      <a:solidFill>
+                        <a:srgbClr val="E2E8F0"/>
+                      </a:solidFill>
+                      <a:prstDash val="solid"/>
+                      <a:round/>
+                      <a:headEnd type="none" w="med" len="med"/>
+                      <a:tailEnd type="none" w="med" len="med"/>
+                    </a:lnL>
+                    <a:lnR w="9525" cap="flat" cmpd="sng" algn="ctr">
+                      <a:solidFill>
+                        <a:srgbClr val="E2E8F0"/>
+                      </a:solidFill>
+                      <a:prstDash val="solid"/>
+                      <a:round/>
+                      <a:headEnd type="none" w="med" len="med"/>
+                      <a:tailEnd type="none" w="med" len="med"/>
+                    </a:lnR>
+                    <a:lnT w="9525" cap="flat" cmpd="sng" algn="ctr">
+                      <a:solidFill>
+                        <a:srgbClr val="E2E8F0"/>
+                      </a:solidFill>
+                      <a:prstDash val="solid"/>
+                      <a:round/>
+                      <a:headEnd type="none" w="med" len="med"/>
+                      <a:tailEnd type="none" w="med" len="med"/>
+                    </a:lnT>
+                    <a:lnB w="9525" cap="flat" cmpd="sng" algn="ctr">
+                      <a:solidFill>
+                        <a:srgbClr val="E2E8F0"/>
+                      </a:solidFill>
+                      <a:prstDash val="solid"/>
+                      <a:round/>
+                      <a:headEnd type="none" w="med" len="med"/>
+                      <a:tailEnd type="none" w="med" len="med"/>
+                    </a:lnB>
+                    <a:solidFill>
+                      <a:srgbClr val="FFFFFF"/>
+                    </a:solidFill>
+                  </a:tcPr>
+                </a:tc>
+                <a:tc>
+                  <a:txBody>
+                    <a:bodyPr/>
+                    <a:lstStyle/>
+                    <a:p>
+                      <a:pPr algn="ctr" indent="0" marL="0">
+                        <a:buNone/>
+                      </a:pPr>
+                      <a:r>
+                        <a:rPr lang="en-US" sz="1000" dirty="0">
+                          <a:solidFill>
+                            <a:srgbClr val="334155"/>
+                          </a:solidFill>
+                        </a:rPr>
+                        <a:t>NT$1,128,000</a:t>
+                      </a:r>
+                      <a:endParaRPr lang="en-US" sz="1000" dirty="0"/>
+                    </a:p>
+                  </a:txBody>
+                  <a:tcPr marL="73152" marR="73152" marT="54864" marB="54864" anchor="ctr">
+                    <a:lnL w="9525" cap="flat" cmpd="sng" algn="ctr">
+                      <a:solidFill>
+                        <a:srgbClr val="E2E8F0"/>
+                      </a:solidFill>
+                      <a:prstDash val="solid"/>
+                      <a:round/>
+                      <a:headEnd type="none" w="med" len="med"/>
+                      <a:tailEnd type="none" w="med" len="med"/>
+                    </a:lnL>
+                    <a:lnR w="9525" cap="flat" cmpd="sng" algn="ctr">
+                      <a:solidFill>
+                        <a:srgbClr val="E2E8F0"/>
+                      </a:solidFill>
+                      <a:prstDash val="solid"/>
+                      <a:round/>
+                      <a:headEnd type="none" w="med" len="med"/>
+                      <a:tailEnd type="none" w="med" len="med"/>
+                    </a:lnR>
+                    <a:lnT w="9525" cap="flat" cmpd="sng" algn="ctr">
+                      <a:solidFill>
+                        <a:srgbClr val="E2E8F0"/>
+                      </a:solidFill>
+                      <a:prstDash val="solid"/>
+                      <a:round/>
+                      <a:headEnd type="none" w="med" len="med"/>
+                      <a:tailEnd type="none" w="med" len="med"/>
+                    </a:lnT>
+                    <a:lnB w="9525" cap="flat" cmpd="sng" algn="ctr">
+                      <a:solidFill>
+                        <a:srgbClr val="E2E8F0"/>
+                      </a:solidFill>
+                      <a:prstDash val="solid"/>
+                      <a:round/>
+                      <a:headEnd type="none" w="med" len="med"/>
+                      <a:tailEnd type="none" w="med" len="med"/>
+                    </a:lnB>
+                    <a:solidFill>
+                      <a:srgbClr val="FFFFFF"/>
+                    </a:solidFill>
+                  </a:tcPr>
+                </a:tc>
+              </a:tr>
+            </a:tbl>
+          </a:graphicData>
+        </a:graphic>
+      </p:graphicFrame>
+      <p:sp>
+        <p:nvSpPr>
+          <p:cNvPr id="6" name="Shape 2"/>
           <p:cNvSpPr/>
           <p:nvPr/>
         </p:nvSpPr>
         <p:spPr>
           <a:xfrm>
-            <a:off x="548640" y="1600200"/>
-            <a:ext cx="457200" cy="457200"/>
-          </a:xfrm>
-          <a:prstGeom prst="ellipse">
-            <a:avLst/>
+            <a:off x="6172200" y="3566160"/>
+            <a:ext cx="5468112" cy="914400"/>
+          </a:xfrm>
+          <a:prstGeom prst="roundRect">
+            <a:avLst>
+              <a:gd name="adj" fmla="val 8000"/>
+            </a:avLst>
           </a:prstGeom>
           <a:solidFill>
             <a:srgbClr val="EFF6FF"/>
           </a:solidFill>
-          <a:ln/>
-        </p:spPr>
-      </p:sp>
-      <p:sp>
-        <p:nvSpPr>
-          <p:cNvPr id="5" name="Text 3"/>
+          <a:ln w="9525">
+            <a:solidFill>
+              <a:srgbClr val="E2E8F0"/>
+            </a:solidFill>
+            <a:prstDash val="solid"/>
+          </a:ln>
+          <a:effectLst>
+            <a:outerShdw sx="100000" sy="100000" kx="0" ky="0" algn="bl" rotWithShape="0" blurRad="76200" dist="25400" dir="5400000">
+              <a:srgbClr val="1E293B">
+                <a:alpha val="8000"/>
+              </a:srgbClr>
+            </a:outerShdw>
+          </a:effectLst>
+        </p:spPr>
+      </p:sp>
+      <p:sp>
+        <p:nvSpPr>
+          <p:cNvPr id="7" name="Text 3"/>
           <p:cNvSpPr txBox="1"/>
           <p:nvPr/>
         </p:nvSpPr>
         <p:spPr>
           <a:xfrm>
-            <a:off x="548640" y="1600200"/>
-            <a:ext cx="457200" cy="457200"/>
+            <a:off x="6373368" y="3712464"/>
+            <a:ext cx="5065776" cy="621792"/>
           </a:xfrm>
           <a:prstGeom prst="rect">
             <a:avLst/>
@@ -3037,37 +4417,74 @@
           <a:ln/>
         </p:spPr>
         <p:txBody>
-          <a:bodyPr wrap="square" lIns="0" tIns="0" rIns="0" bIns="0" rtlCol="0" anchor="ctr"/>
-          <a:lstStyle/>
-          <a:p>
-            <a:pPr algn="ctr" indent="0" marL="0">
+          <a:bodyPr wrap="square" lIns="0" tIns="0" rIns="0" bIns="0" rtlCol="0" anchor="t"/>
+          <a:lstStyle/>
+          <a:p>
+            <a:pPr algn="l" indent="0" marL="0">
+              <a:lnSpc>
+                <a:spcPct val="125000"/>
+              </a:lnSpc>
               <a:buNone/>
             </a:pPr>
             <a:r>
-              <a:rPr lang="en-US" sz="2000" b="1" dirty="0">
-                <a:solidFill>
-                  <a:srgbClr val="2563EB"/>
+              <a:rPr lang="en-US" sz="1100" dirty="0">
+                <a:solidFill>
+                  <a:srgbClr val="334155"/>
                 </a:solidFill>
                 <a:latin typeface="Microsoft JhengHei" pitchFamily="34" charset="0"/>
                 <a:ea typeface="Microsoft JhengHei" pitchFamily="34" charset="-122"/>
                 <a:cs typeface="Microsoft JhengHei" pitchFamily="34" charset="-120"/>
               </a:rPr>
-              <a:t>•</a:t>
-            </a:r>
-            <a:endParaRPr lang="en-US" sz="2000" dirty="0"/>
-          </a:p>
-        </p:txBody>
-      </p:sp>
-      <p:sp>
-        <p:nvSpPr>
-          <p:cNvPr id="6" name="Text 4"/>
+              <a:t>「④⑤雙幣」比重越高，帳面預估獲利越好看，但也代表本金因為賭錯而變少的機會越大。</a:t>
+            </a:r>
+            <a:endParaRPr lang="en-US" sz="1100" dirty="0"/>
+          </a:p>
+        </p:txBody>
+      </p:sp>
+      <p:sp>
+        <p:nvSpPr>
+          <p:cNvPr id="8" name="Shape 4"/>
+          <p:cNvSpPr/>
+          <p:nvPr/>
+        </p:nvSpPr>
+        <p:spPr>
+          <a:xfrm>
+            <a:off x="548640" y="4663440"/>
+            <a:ext cx="11094415" cy="1463040"/>
+          </a:xfrm>
+          <a:prstGeom prst="roundRect">
+            <a:avLst>
+              <a:gd name="adj" fmla="val 5000"/>
+            </a:avLst>
+          </a:prstGeom>
+          <a:solidFill>
+            <a:srgbClr val="F8FAFC"/>
+          </a:solidFill>
+          <a:ln w="9525">
+            <a:solidFill>
+              <a:srgbClr val="E2E8F0"/>
+            </a:solidFill>
+            <a:prstDash val="solid"/>
+          </a:ln>
+          <a:effectLst>
+            <a:outerShdw sx="100000" sy="100000" kx="0" ky="0" algn="bl" rotWithShape="0" blurRad="76200" dist="25400" dir="5400000">
+              <a:srgbClr val="1E293B">
+                <a:alpha val="8000"/>
+              </a:srgbClr>
+            </a:outerShdw>
+          </a:effectLst>
+        </p:spPr>
+      </p:sp>
+      <p:sp>
+        <p:nvSpPr>
+          <p:cNvPr id="9" name="Text 5"/>
           <p:cNvSpPr txBox="1"/>
           <p:nvPr/>
         </p:nvSpPr>
         <p:spPr>
           <a:xfrm>
-            <a:off x="1234440" y="1581912"/>
-            <a:ext cx="2377440" cy="822960"/>
+            <a:off x="749808" y="4809744"/>
+            <a:ext cx="10692079" cy="365760"/>
           </a:xfrm>
           <a:prstGeom prst="rect">
             <a:avLst/>
@@ -3079,11 +4496,11 @@
           <a:bodyPr wrap="square" lIns="0" tIns="0" rIns="0" bIns="0" rtlCol="0" anchor="ctr"/>
           <a:lstStyle/>
           <a:p>
-            <a:pPr indent="0" marL="0">
+            <a:pPr algn="l" indent="0" marL="0">
               <a:buNone/>
             </a:pPr>
             <a:r>
-              <a:rPr lang="en-US" sz="1300" b="1" dirty="0">
+              <a:rPr lang="en-US" sz="1350" b="1" dirty="0">
                 <a:solidFill>
                   <a:srgbClr val="0F172A"/>
                 </a:solidFill>
@@ -3091,22 +4508,22 @@
                 <a:ea typeface="Microsoft JhengHei" pitchFamily="34" charset="-122"/>
                 <a:cs typeface="Microsoft JhengHei" pitchFamily="34" charset="-120"/>
               </a:rPr>
-              <a:t>換匯風險</a:t>
-            </a:r>
-            <a:endParaRPr lang="en-US" sz="1300" dirty="0"/>
-          </a:p>
-        </p:txBody>
-      </p:sp>
-      <p:sp>
-        <p:nvSpPr>
-          <p:cNvPr id="7" name="Text 5"/>
+              <a:t>怎麼選？</a:t>
+            </a:r>
+            <a:endParaRPr lang="en-US" sz="1350" dirty="0"/>
+          </a:p>
+        </p:txBody>
+      </p:sp>
+      <p:sp>
+        <p:nvSpPr>
+          <p:cNvPr id="10" name="Text 6"/>
           <p:cNvSpPr txBox="1"/>
           <p:nvPr/>
         </p:nvSpPr>
         <p:spPr>
           <a:xfrm>
-            <a:off x="3794760" y="1581912"/>
-            <a:ext cx="7818120" cy="822960"/>
+            <a:off x="749808" y="5193792"/>
+            <a:ext cx="10692079" cy="768096"/>
           </a:xfrm>
           <a:prstGeom prst="rect">
             <a:avLst/>
@@ -3115,17 +4532,17 @@
           <a:ln/>
         </p:spPr>
         <p:txBody>
-          <a:bodyPr wrap="square" lIns="0" tIns="0" rIns="0" bIns="0" rtlCol="0" anchor="ctr"/>
-          <a:lstStyle/>
-          <a:p>
-            <a:pPr indent="0" marL="0">
+          <a:bodyPr wrap="square" lIns="0" tIns="0" rIns="0" bIns="0" rtlCol="0" anchor="t"/>
+          <a:lstStyle/>
+          <a:p>
+            <a:pPr algn="l" indent="0" marL="0">
               <a:lnSpc>
-                <a:spcPct val="120000"/>
+                <a:spcPct val="125000"/>
               </a:lnSpc>
               <a:buNone/>
             </a:pPr>
             <a:r>
-              <a:rPr lang="en-US" sz="1150" dirty="0">
+              <a:rPr lang="en-US" sz="1200" dirty="0">
                 <a:solidFill>
                   <a:srgbClr val="334155"/>
                 </a:solidFill>
@@ -3133,435 +4550,15 @@
                 <a:ea typeface="Microsoft JhengHei" pitchFamily="34" charset="-122"/>
                 <a:cs typeface="Microsoft JhengHei" pitchFamily="34" charset="-120"/>
               </a:rPr>
-              <a:t>NT$500萬要先換成美元／美元穩定幣才能投入這些平台，等到要換回台幣時，如果匯率有變動，換回來的台幣金額可能比預期多或少。</a:t>
-            </a:r>
-            <a:endParaRPr lang="en-US" sz="1150" dirty="0"/>
-          </a:p>
-        </p:txBody>
-      </p:sp>
-      <p:sp>
-        <p:nvSpPr>
-          <p:cNvPr id="8" name="Shape 6"/>
-          <p:cNvSpPr/>
-          <p:nvPr/>
-        </p:nvSpPr>
-        <p:spPr>
-          <a:xfrm>
-            <a:off x="548640" y="2560320"/>
-            <a:ext cx="457200" cy="457200"/>
-          </a:xfrm>
-          <a:prstGeom prst="ellipse">
-            <a:avLst/>
-          </a:prstGeom>
-          <a:solidFill>
-            <a:srgbClr val="EFF6FF"/>
-          </a:solidFill>
-          <a:ln/>
-        </p:spPr>
-      </p:sp>
-      <p:sp>
-        <p:nvSpPr>
-          <p:cNvPr id="9" name="Text 7"/>
-          <p:cNvSpPr txBox="1"/>
-          <p:nvPr/>
-        </p:nvSpPr>
-        <p:spPr>
-          <a:xfrm>
-            <a:off x="548640" y="2560320"/>
-            <a:ext cx="457200" cy="457200"/>
-          </a:xfrm>
-          <a:prstGeom prst="rect">
-            <a:avLst/>
-          </a:prstGeom>
-          <a:noFill/>
-          <a:ln/>
-        </p:spPr>
-        <p:txBody>
-          <a:bodyPr wrap="square" lIns="0" tIns="0" rIns="0" bIns="0" rtlCol="0" anchor="ctr"/>
-          <a:lstStyle/>
-          <a:p>
-            <a:pPr algn="ctr" indent="0" marL="0">
-              <a:buNone/>
-            </a:pPr>
-            <a:r>
-              <a:rPr lang="en-US" sz="2000" b="1" dirty="0">
-                <a:solidFill>
-                  <a:srgbClr val="2563EB"/>
-                </a:solidFill>
-                <a:latin typeface="Microsoft JhengHei" pitchFamily="34" charset="0"/>
-                <a:ea typeface="Microsoft JhengHei" pitchFamily="34" charset="-122"/>
-                <a:cs typeface="Microsoft JhengHei" pitchFamily="34" charset="-120"/>
-              </a:rPr>
-              <a:t>•</a:t>
-            </a:r>
-            <a:endParaRPr lang="en-US" sz="2000" dirty="0"/>
-          </a:p>
-        </p:txBody>
-      </p:sp>
-      <p:sp>
-        <p:nvSpPr>
-          <p:cNvPr id="10" name="Text 8"/>
-          <p:cNvSpPr txBox="1"/>
-          <p:nvPr/>
-        </p:nvSpPr>
-        <p:spPr>
-          <a:xfrm>
-            <a:off x="1234440" y="2542032"/>
-            <a:ext cx="2377440" cy="822960"/>
-          </a:xfrm>
-          <a:prstGeom prst="rect">
-            <a:avLst/>
-          </a:prstGeom>
-          <a:noFill/>
-          <a:ln/>
-        </p:spPr>
-        <p:txBody>
-          <a:bodyPr wrap="square" lIns="0" tIns="0" rIns="0" bIns="0" rtlCol="0" anchor="ctr"/>
-          <a:lstStyle/>
-          <a:p>
-            <a:pPr indent="0" marL="0">
-              <a:buNone/>
-            </a:pPr>
-            <a:r>
-              <a:rPr lang="en-US" sz="1300" b="1" dirty="0">
-                <a:solidFill>
-                  <a:srgbClr val="0F172A"/>
-                </a:solidFill>
-                <a:latin typeface="Microsoft JhengHei" pitchFamily="34" charset="0"/>
-                <a:ea typeface="Microsoft JhengHei" pitchFamily="34" charset="-122"/>
-                <a:cs typeface="Microsoft JhengHei" pitchFamily="34" charset="-120"/>
-              </a:rPr>
-              <a:t>平台本身的風險</a:t>
-            </a:r>
-            <a:endParaRPr lang="en-US" sz="1300" dirty="0"/>
-          </a:p>
-        </p:txBody>
-      </p:sp>
-      <p:sp>
-        <p:nvSpPr>
-          <p:cNvPr id="11" name="Text 9"/>
-          <p:cNvSpPr txBox="1"/>
-          <p:nvPr/>
-        </p:nvSpPr>
-        <p:spPr>
-          <a:xfrm>
-            <a:off x="3794760" y="2542032"/>
-            <a:ext cx="7818120" cy="822960"/>
-          </a:xfrm>
-          <a:prstGeom prst="rect">
-            <a:avLst/>
-          </a:prstGeom>
-          <a:noFill/>
-          <a:ln/>
-        </p:spPr>
-        <p:txBody>
-          <a:bodyPr wrap="square" lIns="0" tIns="0" rIns="0" bIns="0" rtlCol="0" anchor="ctr"/>
-          <a:lstStyle/>
-          <a:p>
-            <a:pPr indent="0" marL="0">
-              <a:lnSpc>
-                <a:spcPct val="120000"/>
-              </a:lnSpc>
-              <a:buNone/>
-            </a:pPr>
-            <a:r>
-              <a:rPr lang="en-US" sz="1150" dirty="0">
-                <a:solidFill>
-                  <a:srgbClr val="334155"/>
-                </a:solidFill>
-                <a:latin typeface="Microsoft JhengHei" pitchFamily="34" charset="0"/>
-                <a:ea typeface="Microsoft JhengHei" pitchFamily="34" charset="-122"/>
-                <a:cs typeface="Microsoft JhengHei" pitchFamily="34" charset="-120"/>
-              </a:rPr>
-              <a:t>錢是放在 Bitfinex／OKX／Binance 這些交易所上，如果平台發生資安事件或經營出問題，仍有本金拿不回來的可能——這是所有方法都共同存在的風險，因此不會把所有錢都放在同一家平台。</a:t>
-            </a:r>
-            <a:endParaRPr lang="en-US" sz="1150" dirty="0"/>
-          </a:p>
-        </p:txBody>
-      </p:sp>
-      <p:sp>
-        <p:nvSpPr>
-          <p:cNvPr id="12" name="Shape 10"/>
-          <p:cNvSpPr/>
-          <p:nvPr/>
-        </p:nvSpPr>
-        <p:spPr>
-          <a:xfrm>
-            <a:off x="548640" y="3520440"/>
-            <a:ext cx="457200" cy="457200"/>
-          </a:xfrm>
-          <a:prstGeom prst="ellipse">
-            <a:avLst/>
-          </a:prstGeom>
-          <a:solidFill>
-            <a:srgbClr val="EFF6FF"/>
-          </a:solidFill>
-          <a:ln/>
-        </p:spPr>
-      </p:sp>
-      <p:sp>
-        <p:nvSpPr>
-          <p:cNvPr id="13" name="Text 11"/>
-          <p:cNvSpPr txBox="1"/>
-          <p:nvPr/>
-        </p:nvSpPr>
-        <p:spPr>
-          <a:xfrm>
-            <a:off x="548640" y="3520440"/>
-            <a:ext cx="457200" cy="457200"/>
-          </a:xfrm>
-          <a:prstGeom prst="rect">
-            <a:avLst/>
-          </a:prstGeom>
-          <a:noFill/>
-          <a:ln/>
-        </p:spPr>
-        <p:txBody>
-          <a:bodyPr wrap="square" lIns="0" tIns="0" rIns="0" bIns="0" rtlCol="0" anchor="ctr"/>
-          <a:lstStyle/>
-          <a:p>
-            <a:pPr algn="ctr" indent="0" marL="0">
-              <a:buNone/>
-            </a:pPr>
-            <a:r>
-              <a:rPr lang="en-US" sz="2000" b="1" dirty="0">
-                <a:solidFill>
-                  <a:srgbClr val="2563EB"/>
-                </a:solidFill>
-                <a:latin typeface="Microsoft JhengHei" pitchFamily="34" charset="0"/>
-                <a:ea typeface="Microsoft JhengHei" pitchFamily="34" charset="-122"/>
-                <a:cs typeface="Microsoft JhengHei" pitchFamily="34" charset="-120"/>
-              </a:rPr>
-              <a:t>•</a:t>
-            </a:r>
-            <a:endParaRPr lang="en-US" sz="2000" dirty="0"/>
-          </a:p>
-        </p:txBody>
-      </p:sp>
-      <p:sp>
-        <p:nvSpPr>
-          <p:cNvPr id="14" name="Text 12"/>
-          <p:cNvSpPr txBox="1"/>
-          <p:nvPr/>
-        </p:nvSpPr>
-        <p:spPr>
-          <a:xfrm>
-            <a:off x="1234440" y="3502152"/>
-            <a:ext cx="2377440" cy="822960"/>
-          </a:xfrm>
-          <a:prstGeom prst="rect">
-            <a:avLst/>
-          </a:prstGeom>
-          <a:noFill/>
-          <a:ln/>
-        </p:spPr>
-        <p:txBody>
-          <a:bodyPr wrap="square" lIns="0" tIns="0" rIns="0" bIns="0" rtlCol="0" anchor="ctr"/>
-          <a:lstStyle/>
-          <a:p>
-            <a:pPr indent="0" marL="0">
-              <a:buNone/>
-            </a:pPr>
-            <a:r>
-              <a:rPr lang="en-US" sz="1300" b="1" dirty="0">
-                <a:solidFill>
-                  <a:srgbClr val="0F172A"/>
-                </a:solidFill>
-                <a:latin typeface="Microsoft JhengHei" pitchFamily="34" charset="0"/>
-                <a:ea typeface="Microsoft JhengHei" pitchFamily="34" charset="-122"/>
-                <a:cs typeface="Microsoft JhengHei" pitchFamily="34" charset="-120"/>
-              </a:rPr>
-              <a:t>帳號安全機制</a:t>
-            </a:r>
-            <a:endParaRPr lang="en-US" sz="1300" dirty="0"/>
-          </a:p>
-        </p:txBody>
-      </p:sp>
-      <p:sp>
-        <p:nvSpPr>
-          <p:cNvPr id="15" name="Text 13"/>
-          <p:cNvSpPr txBox="1"/>
-          <p:nvPr/>
-        </p:nvSpPr>
-        <p:spPr>
-          <a:xfrm>
-            <a:off x="3794760" y="3502152"/>
-            <a:ext cx="7818120" cy="822960"/>
-          </a:xfrm>
-          <a:prstGeom prst="rect">
-            <a:avLst/>
-          </a:prstGeom>
-          <a:noFill/>
-          <a:ln/>
-        </p:spPr>
-        <p:txBody>
-          <a:bodyPr wrap="square" lIns="0" tIns="0" rIns="0" bIns="0" rtlCol="0" anchor="ctr"/>
-          <a:lstStyle/>
-          <a:p>
-            <a:pPr indent="0" marL="0">
-              <a:lnSpc>
-                <a:spcPct val="120000"/>
-              </a:lnSpc>
-              <a:buNone/>
-            </a:pPr>
-            <a:r>
-              <a:rPr lang="en-US" sz="1150" dirty="0">
-                <a:solidFill>
-                  <a:srgbClr val="334155"/>
-                </a:solidFill>
-                <a:latin typeface="Microsoft JhengHei" pitchFamily="34" charset="0"/>
-                <a:ea typeface="Microsoft JhengHei" pitchFamily="34" charset="-122"/>
-                <a:cs typeface="Microsoft JhengHei" pitchFamily="34" charset="-120"/>
-              </a:rPr>
-              <a:t>只開放「借出、申購」的權限，把「提領、轉帳」的功能直接關閉，就算帳號密碼外洩，錢也無法被轉走。</a:t>
-            </a:r>
-            <a:endParaRPr lang="en-US" sz="1150" dirty="0"/>
-          </a:p>
-        </p:txBody>
-      </p:sp>
-      <p:sp>
-        <p:nvSpPr>
-          <p:cNvPr id="16" name="Shape 14"/>
-          <p:cNvSpPr/>
-          <p:nvPr/>
-        </p:nvSpPr>
-        <p:spPr>
-          <a:xfrm>
-            <a:off x="548640" y="4480560"/>
-            <a:ext cx="457200" cy="457200"/>
-          </a:xfrm>
-          <a:prstGeom prst="ellipse">
-            <a:avLst/>
-          </a:prstGeom>
-          <a:solidFill>
-            <a:srgbClr val="EFF6FF"/>
-          </a:solidFill>
-          <a:ln/>
-        </p:spPr>
-      </p:sp>
-      <p:sp>
-        <p:nvSpPr>
-          <p:cNvPr id="17" name="Text 15"/>
-          <p:cNvSpPr txBox="1"/>
-          <p:nvPr/>
-        </p:nvSpPr>
-        <p:spPr>
-          <a:xfrm>
-            <a:off x="548640" y="4480560"/>
-            <a:ext cx="457200" cy="457200"/>
-          </a:xfrm>
-          <a:prstGeom prst="rect">
-            <a:avLst/>
-          </a:prstGeom>
-          <a:noFill/>
-          <a:ln/>
-        </p:spPr>
-        <p:txBody>
-          <a:bodyPr wrap="square" lIns="0" tIns="0" rIns="0" bIns="0" rtlCol="0" anchor="ctr"/>
-          <a:lstStyle/>
-          <a:p>
-            <a:pPr algn="ctr" indent="0" marL="0">
-              <a:buNone/>
-            </a:pPr>
-            <a:r>
-              <a:rPr lang="en-US" sz="2000" b="1" dirty="0">
-                <a:solidFill>
-                  <a:srgbClr val="2563EB"/>
-                </a:solidFill>
-                <a:latin typeface="Microsoft JhengHei" pitchFamily="34" charset="0"/>
-                <a:ea typeface="Microsoft JhengHei" pitchFamily="34" charset="-122"/>
-                <a:cs typeface="Microsoft JhengHei" pitchFamily="34" charset="-120"/>
-              </a:rPr>
-              <a:t>•</a:t>
-            </a:r>
-            <a:endParaRPr lang="en-US" sz="2000" dirty="0"/>
-          </a:p>
-        </p:txBody>
-      </p:sp>
-      <p:sp>
-        <p:nvSpPr>
-          <p:cNvPr id="18" name="Text 16"/>
-          <p:cNvSpPr txBox="1"/>
-          <p:nvPr/>
-        </p:nvSpPr>
-        <p:spPr>
-          <a:xfrm>
-            <a:off x="1234440" y="4462272"/>
-            <a:ext cx="2377440" cy="822960"/>
-          </a:xfrm>
-          <a:prstGeom prst="rect">
-            <a:avLst/>
-          </a:prstGeom>
-          <a:noFill/>
-          <a:ln/>
-        </p:spPr>
-        <p:txBody>
-          <a:bodyPr wrap="square" lIns="0" tIns="0" rIns="0" bIns="0" rtlCol="0" anchor="ctr"/>
-          <a:lstStyle/>
-          <a:p>
-            <a:pPr indent="0" marL="0">
-              <a:buNone/>
-            </a:pPr>
-            <a:r>
-              <a:rPr lang="en-US" sz="1300" b="1" dirty="0">
-                <a:solidFill>
-                  <a:srgbClr val="0F172A"/>
-                </a:solidFill>
-                <a:latin typeface="Microsoft JhengHei" pitchFamily="34" charset="0"/>
-                <a:ea typeface="Microsoft JhengHei" pitchFamily="34" charset="-122"/>
-                <a:cs typeface="Microsoft JhengHei" pitchFamily="34" charset="-120"/>
-              </a:rPr>
-              <a:t>先小額試做，再放大金額</a:t>
-            </a:r>
-            <a:endParaRPr lang="en-US" sz="1300" dirty="0"/>
-          </a:p>
-        </p:txBody>
-      </p:sp>
-      <p:sp>
-        <p:nvSpPr>
-          <p:cNvPr id="19" name="Text 17"/>
-          <p:cNvSpPr txBox="1"/>
-          <p:nvPr/>
-        </p:nvSpPr>
-        <p:spPr>
-          <a:xfrm>
-            <a:off x="3794760" y="4462272"/>
-            <a:ext cx="7818120" cy="822960"/>
-          </a:xfrm>
-          <a:prstGeom prst="rect">
-            <a:avLst/>
-          </a:prstGeom>
-          <a:noFill/>
-          <a:ln/>
-        </p:spPr>
-        <p:txBody>
-          <a:bodyPr wrap="square" lIns="0" tIns="0" rIns="0" bIns="0" rtlCol="0" anchor="ctr"/>
-          <a:lstStyle/>
-          <a:p>
-            <a:pPr indent="0" marL="0">
-              <a:lnSpc>
-                <a:spcPct val="120000"/>
-              </a:lnSpc>
-              <a:buNone/>
-            </a:pPr>
-            <a:r>
-              <a:rPr lang="en-US" sz="1150" dirty="0">
-                <a:solidFill>
-                  <a:srgbClr val="334155"/>
-                </a:solidFill>
-                <a:latin typeface="Microsoft JhengHei" pitchFamily="34" charset="0"/>
-                <a:ea typeface="Microsoft JhengHei" pitchFamily="34" charset="-122"/>
-                <a:cs typeface="Microsoft JhengHei" pitchFamily="34" charset="-120"/>
-              </a:rPr>
-              <a:t>建議先用一小部分金額實際操作 2–3 個月，確認一切運作順利、數字對得起來，再考慮是否放大到完整的 NT$500 萬。</a:t>
-            </a:r>
-            <a:endParaRPr lang="en-US" sz="1150" dirty="0"/>
-          </a:p>
-        </p:txBody>
-      </p:sp>
-      <p:sp>
-        <p:nvSpPr>
-          <p:cNvPr id="20" name="Text 18"/>
+              <a:t>如果這筆錢是「不能有本金損失」的閒錢，建議從方案A開始；如果可以承受「部分金額因賭錯而暫時變少」，再考慮拉高④⑤的比重。三個方案僅為示範權重，實際比重應由財務部與風控委員會依風險承受度共同核定。</a:t>
+            </a:r>
+            <a:endParaRPr lang="en-US" sz="1200" dirty="0"/>
+          </a:p>
+        </p:txBody>
+      </p:sp>
+      <p:sp>
+        <p:nvSpPr>
+          <p:cNvPr id="11" name="Text 7"/>
           <p:cNvSpPr txBox="1"/>
           <p:nvPr/>
         </p:nvSpPr>
@@ -3600,7 +4597,7 @@
       </p:sp>
       <p:sp>
         <p:nvSpPr>
-          <p:cNvPr id="21" name="Text 19"/>
+          <p:cNvPr id="12" name="Text 8"/>
           <p:cNvSpPr txBox="1"/>
           <p:nvPr/>
         </p:nvSpPr>
@@ -3631,7 +4628,7 @@
                 <a:ea typeface="Microsoft JhengHei" pitchFamily="34" charset="-122"/>
                 <a:cs typeface="Microsoft JhengHei" pitchFamily="34" charset="-120"/>
               </a:rPr>
-              <a:t>10 / 11</a:t>
+              <a:t>10 / 12</a:t>
             </a:r>
             <a:endParaRPr lang="en-US" sz="900" dirty="0"/>
           </a:p>
@@ -3702,6 +4699,757 @@
                 <a:ea typeface="Microsoft JhengHei" pitchFamily="34" charset="-122"/>
                 <a:cs typeface="Microsoft JhengHei" pitchFamily="34" charset="-120"/>
               </a:rPr>
+              <a:t>幾個重要提醒</a:t>
+            </a:r>
+            <a:endParaRPr lang="en-US" sz="2700" dirty="0"/>
+          </a:p>
+        </p:txBody>
+      </p:sp>
+      <p:sp>
+        <p:nvSpPr>
+          <p:cNvPr id="3" name="Text 1"/>
+          <p:cNvSpPr txBox="1"/>
+          <p:nvPr/>
+        </p:nvSpPr>
+        <p:spPr>
+          <a:xfrm>
+            <a:off x="548640" y="960120"/>
+            <a:ext cx="11094415" cy="502920"/>
+          </a:xfrm>
+          <a:prstGeom prst="rect">
+            <a:avLst/>
+          </a:prstGeom>
+          <a:noFill/>
+          <a:ln/>
+        </p:spPr>
+        <p:txBody>
+          <a:bodyPr wrap="square" lIns="0" tIns="0" rIns="0" bIns="0" rtlCol="0" anchor="ctr"/>
+          <a:lstStyle/>
+          <a:p>
+            <a:pPr algn="l" indent="0" marL="0">
+              <a:lnSpc>
+                <a:spcPct val="115000"/>
+              </a:lnSpc>
+              <a:buNone/>
+            </a:pPr>
+            <a:r>
+              <a:rPr lang="en-US" sz="1350" dirty="0">
+                <a:solidFill>
+                  <a:srgbClr val="64748B"/>
+                </a:solidFill>
+                <a:latin typeface="Microsoft JhengHei" pitchFamily="34" charset="0"/>
+                <a:ea typeface="Microsoft JhengHei" pitchFamily="34" charset="-122"/>
+                <a:cs typeface="Microsoft JhengHei" pitchFamily="34" charset="-120"/>
+              </a:rPr>
+              <a:t>白話版風險與安全措施說明</a:t>
+            </a:r>
+            <a:endParaRPr lang="en-US" sz="1350" dirty="0"/>
+          </a:p>
+        </p:txBody>
+      </p:sp>
+      <p:sp>
+        <p:nvSpPr>
+          <p:cNvPr id="4" name="Shape 2"/>
+          <p:cNvSpPr/>
+          <p:nvPr/>
+        </p:nvSpPr>
+        <p:spPr>
+          <a:xfrm>
+            <a:off x="548640" y="1600200"/>
+            <a:ext cx="457200" cy="457200"/>
+          </a:xfrm>
+          <a:prstGeom prst="ellipse">
+            <a:avLst/>
+          </a:prstGeom>
+          <a:solidFill>
+            <a:srgbClr val="EFF6FF"/>
+          </a:solidFill>
+          <a:ln/>
+        </p:spPr>
+      </p:sp>
+      <p:sp>
+        <p:nvSpPr>
+          <p:cNvPr id="5" name="Text 3"/>
+          <p:cNvSpPr txBox="1"/>
+          <p:nvPr/>
+        </p:nvSpPr>
+        <p:spPr>
+          <a:xfrm>
+            <a:off x="548640" y="1600200"/>
+            <a:ext cx="457200" cy="457200"/>
+          </a:xfrm>
+          <a:prstGeom prst="rect">
+            <a:avLst/>
+          </a:prstGeom>
+          <a:noFill/>
+          <a:ln/>
+        </p:spPr>
+        <p:txBody>
+          <a:bodyPr wrap="square" lIns="0" tIns="0" rIns="0" bIns="0" rtlCol="0" anchor="ctr"/>
+          <a:lstStyle/>
+          <a:p>
+            <a:pPr algn="ctr" indent="0" marL="0">
+              <a:buNone/>
+            </a:pPr>
+            <a:r>
+              <a:rPr lang="en-US" sz="2000" b="1" dirty="0">
+                <a:solidFill>
+                  <a:srgbClr val="2563EB"/>
+                </a:solidFill>
+                <a:latin typeface="Microsoft JhengHei" pitchFamily="34" charset="0"/>
+                <a:ea typeface="Microsoft JhengHei" pitchFamily="34" charset="-122"/>
+                <a:cs typeface="Microsoft JhengHei" pitchFamily="34" charset="-120"/>
+              </a:rPr>
+              <a:t>•</a:t>
+            </a:r>
+            <a:endParaRPr lang="en-US" sz="2000" dirty="0"/>
+          </a:p>
+        </p:txBody>
+      </p:sp>
+      <p:sp>
+        <p:nvSpPr>
+          <p:cNvPr id="6" name="Text 4"/>
+          <p:cNvSpPr txBox="1"/>
+          <p:nvPr/>
+        </p:nvSpPr>
+        <p:spPr>
+          <a:xfrm>
+            <a:off x="1234440" y="1581912"/>
+            <a:ext cx="2377440" cy="822960"/>
+          </a:xfrm>
+          <a:prstGeom prst="rect">
+            <a:avLst/>
+          </a:prstGeom>
+          <a:noFill/>
+          <a:ln/>
+        </p:spPr>
+        <p:txBody>
+          <a:bodyPr wrap="square" lIns="0" tIns="0" rIns="0" bIns="0" rtlCol="0" anchor="ctr"/>
+          <a:lstStyle/>
+          <a:p>
+            <a:pPr indent="0" marL="0">
+              <a:buNone/>
+            </a:pPr>
+            <a:r>
+              <a:rPr lang="en-US" sz="1300" b="1" dirty="0">
+                <a:solidFill>
+                  <a:srgbClr val="0F172A"/>
+                </a:solidFill>
+                <a:latin typeface="Microsoft JhengHei" pitchFamily="34" charset="0"/>
+                <a:ea typeface="Microsoft JhengHei" pitchFamily="34" charset="-122"/>
+                <a:cs typeface="Microsoft JhengHei" pitchFamily="34" charset="-120"/>
+              </a:rPr>
+              <a:t>換匯風險</a:t>
+            </a:r>
+            <a:endParaRPr lang="en-US" sz="1300" dirty="0"/>
+          </a:p>
+        </p:txBody>
+      </p:sp>
+      <p:sp>
+        <p:nvSpPr>
+          <p:cNvPr id="7" name="Text 5"/>
+          <p:cNvSpPr txBox="1"/>
+          <p:nvPr/>
+        </p:nvSpPr>
+        <p:spPr>
+          <a:xfrm>
+            <a:off x="3794760" y="1581912"/>
+            <a:ext cx="7818120" cy="822960"/>
+          </a:xfrm>
+          <a:prstGeom prst="rect">
+            <a:avLst/>
+          </a:prstGeom>
+          <a:noFill/>
+          <a:ln/>
+        </p:spPr>
+        <p:txBody>
+          <a:bodyPr wrap="square" lIns="0" tIns="0" rIns="0" bIns="0" rtlCol="0" anchor="ctr"/>
+          <a:lstStyle/>
+          <a:p>
+            <a:pPr indent="0" marL="0">
+              <a:lnSpc>
+                <a:spcPct val="120000"/>
+              </a:lnSpc>
+              <a:buNone/>
+            </a:pPr>
+            <a:r>
+              <a:rPr lang="en-US" sz="1150" dirty="0">
+                <a:solidFill>
+                  <a:srgbClr val="334155"/>
+                </a:solidFill>
+                <a:latin typeface="Microsoft JhengHei" pitchFamily="34" charset="0"/>
+                <a:ea typeface="Microsoft JhengHei" pitchFamily="34" charset="-122"/>
+                <a:cs typeface="Microsoft JhengHei" pitchFamily="34" charset="-120"/>
+              </a:rPr>
+              <a:t>NT$500萬要先換成美元／美元穩定幣才能投入這些平台，等到要換回台幣時，如果匯率有變動，換回來的台幣金額可能比預期多或少。</a:t>
+            </a:r>
+            <a:endParaRPr lang="en-US" sz="1150" dirty="0"/>
+          </a:p>
+        </p:txBody>
+      </p:sp>
+      <p:sp>
+        <p:nvSpPr>
+          <p:cNvPr id="8" name="Shape 6"/>
+          <p:cNvSpPr/>
+          <p:nvPr/>
+        </p:nvSpPr>
+        <p:spPr>
+          <a:xfrm>
+            <a:off x="548640" y="2560320"/>
+            <a:ext cx="457200" cy="457200"/>
+          </a:xfrm>
+          <a:prstGeom prst="ellipse">
+            <a:avLst/>
+          </a:prstGeom>
+          <a:solidFill>
+            <a:srgbClr val="EFF6FF"/>
+          </a:solidFill>
+          <a:ln/>
+        </p:spPr>
+      </p:sp>
+      <p:sp>
+        <p:nvSpPr>
+          <p:cNvPr id="9" name="Text 7"/>
+          <p:cNvSpPr txBox="1"/>
+          <p:nvPr/>
+        </p:nvSpPr>
+        <p:spPr>
+          <a:xfrm>
+            <a:off x="548640" y="2560320"/>
+            <a:ext cx="457200" cy="457200"/>
+          </a:xfrm>
+          <a:prstGeom prst="rect">
+            <a:avLst/>
+          </a:prstGeom>
+          <a:noFill/>
+          <a:ln/>
+        </p:spPr>
+        <p:txBody>
+          <a:bodyPr wrap="square" lIns="0" tIns="0" rIns="0" bIns="0" rtlCol="0" anchor="ctr"/>
+          <a:lstStyle/>
+          <a:p>
+            <a:pPr algn="ctr" indent="0" marL="0">
+              <a:buNone/>
+            </a:pPr>
+            <a:r>
+              <a:rPr lang="en-US" sz="2000" b="1" dirty="0">
+                <a:solidFill>
+                  <a:srgbClr val="2563EB"/>
+                </a:solidFill>
+                <a:latin typeface="Microsoft JhengHei" pitchFamily="34" charset="0"/>
+                <a:ea typeface="Microsoft JhengHei" pitchFamily="34" charset="-122"/>
+                <a:cs typeface="Microsoft JhengHei" pitchFamily="34" charset="-120"/>
+              </a:rPr>
+              <a:t>•</a:t>
+            </a:r>
+            <a:endParaRPr lang="en-US" sz="2000" dirty="0"/>
+          </a:p>
+        </p:txBody>
+      </p:sp>
+      <p:sp>
+        <p:nvSpPr>
+          <p:cNvPr id="10" name="Text 8"/>
+          <p:cNvSpPr txBox="1"/>
+          <p:nvPr/>
+        </p:nvSpPr>
+        <p:spPr>
+          <a:xfrm>
+            <a:off x="1234440" y="2542032"/>
+            <a:ext cx="2377440" cy="822960"/>
+          </a:xfrm>
+          <a:prstGeom prst="rect">
+            <a:avLst/>
+          </a:prstGeom>
+          <a:noFill/>
+          <a:ln/>
+        </p:spPr>
+        <p:txBody>
+          <a:bodyPr wrap="square" lIns="0" tIns="0" rIns="0" bIns="0" rtlCol="0" anchor="ctr"/>
+          <a:lstStyle/>
+          <a:p>
+            <a:pPr indent="0" marL="0">
+              <a:buNone/>
+            </a:pPr>
+            <a:r>
+              <a:rPr lang="en-US" sz="1300" b="1" dirty="0">
+                <a:solidFill>
+                  <a:srgbClr val="0F172A"/>
+                </a:solidFill>
+                <a:latin typeface="Microsoft JhengHei" pitchFamily="34" charset="0"/>
+                <a:ea typeface="Microsoft JhengHei" pitchFamily="34" charset="-122"/>
+                <a:cs typeface="Microsoft JhengHei" pitchFamily="34" charset="-120"/>
+              </a:rPr>
+              <a:t>平台本身的風險</a:t>
+            </a:r>
+            <a:endParaRPr lang="en-US" sz="1300" dirty="0"/>
+          </a:p>
+        </p:txBody>
+      </p:sp>
+      <p:sp>
+        <p:nvSpPr>
+          <p:cNvPr id="11" name="Text 9"/>
+          <p:cNvSpPr txBox="1"/>
+          <p:nvPr/>
+        </p:nvSpPr>
+        <p:spPr>
+          <a:xfrm>
+            <a:off x="3794760" y="2542032"/>
+            <a:ext cx="7818120" cy="822960"/>
+          </a:xfrm>
+          <a:prstGeom prst="rect">
+            <a:avLst/>
+          </a:prstGeom>
+          <a:noFill/>
+          <a:ln/>
+        </p:spPr>
+        <p:txBody>
+          <a:bodyPr wrap="square" lIns="0" tIns="0" rIns="0" bIns="0" rtlCol="0" anchor="ctr"/>
+          <a:lstStyle/>
+          <a:p>
+            <a:pPr indent="0" marL="0">
+              <a:lnSpc>
+                <a:spcPct val="120000"/>
+              </a:lnSpc>
+              <a:buNone/>
+            </a:pPr>
+            <a:r>
+              <a:rPr lang="en-US" sz="1150" dirty="0">
+                <a:solidFill>
+                  <a:srgbClr val="334155"/>
+                </a:solidFill>
+                <a:latin typeface="Microsoft JhengHei" pitchFamily="34" charset="0"/>
+                <a:ea typeface="Microsoft JhengHei" pitchFamily="34" charset="-122"/>
+                <a:cs typeface="Microsoft JhengHei" pitchFamily="34" charset="-120"/>
+              </a:rPr>
+              <a:t>錢是放在 Bitfinex／OKX／Binance 這些交易所上，如果平台發生資安事件或經營出問題，仍有本金拿不回來的可能——這是所有方法都共同存在的風險，因此不會把所有錢都放在同一家平台。</a:t>
+            </a:r>
+            <a:endParaRPr lang="en-US" sz="1150" dirty="0"/>
+          </a:p>
+        </p:txBody>
+      </p:sp>
+      <p:sp>
+        <p:nvSpPr>
+          <p:cNvPr id="12" name="Shape 10"/>
+          <p:cNvSpPr/>
+          <p:nvPr/>
+        </p:nvSpPr>
+        <p:spPr>
+          <a:xfrm>
+            <a:off x="548640" y="3520440"/>
+            <a:ext cx="457200" cy="457200"/>
+          </a:xfrm>
+          <a:prstGeom prst="ellipse">
+            <a:avLst/>
+          </a:prstGeom>
+          <a:solidFill>
+            <a:srgbClr val="EFF6FF"/>
+          </a:solidFill>
+          <a:ln/>
+        </p:spPr>
+      </p:sp>
+      <p:sp>
+        <p:nvSpPr>
+          <p:cNvPr id="13" name="Text 11"/>
+          <p:cNvSpPr txBox="1"/>
+          <p:nvPr/>
+        </p:nvSpPr>
+        <p:spPr>
+          <a:xfrm>
+            <a:off x="548640" y="3520440"/>
+            <a:ext cx="457200" cy="457200"/>
+          </a:xfrm>
+          <a:prstGeom prst="rect">
+            <a:avLst/>
+          </a:prstGeom>
+          <a:noFill/>
+          <a:ln/>
+        </p:spPr>
+        <p:txBody>
+          <a:bodyPr wrap="square" lIns="0" tIns="0" rIns="0" bIns="0" rtlCol="0" anchor="ctr"/>
+          <a:lstStyle/>
+          <a:p>
+            <a:pPr algn="ctr" indent="0" marL="0">
+              <a:buNone/>
+            </a:pPr>
+            <a:r>
+              <a:rPr lang="en-US" sz="2000" b="1" dirty="0">
+                <a:solidFill>
+                  <a:srgbClr val="2563EB"/>
+                </a:solidFill>
+                <a:latin typeface="Microsoft JhengHei" pitchFamily="34" charset="0"/>
+                <a:ea typeface="Microsoft JhengHei" pitchFamily="34" charset="-122"/>
+                <a:cs typeface="Microsoft JhengHei" pitchFamily="34" charset="-120"/>
+              </a:rPr>
+              <a:t>•</a:t>
+            </a:r>
+            <a:endParaRPr lang="en-US" sz="2000" dirty="0"/>
+          </a:p>
+        </p:txBody>
+      </p:sp>
+      <p:sp>
+        <p:nvSpPr>
+          <p:cNvPr id="14" name="Text 12"/>
+          <p:cNvSpPr txBox="1"/>
+          <p:nvPr/>
+        </p:nvSpPr>
+        <p:spPr>
+          <a:xfrm>
+            <a:off x="1234440" y="3502152"/>
+            <a:ext cx="2377440" cy="822960"/>
+          </a:xfrm>
+          <a:prstGeom prst="rect">
+            <a:avLst/>
+          </a:prstGeom>
+          <a:noFill/>
+          <a:ln/>
+        </p:spPr>
+        <p:txBody>
+          <a:bodyPr wrap="square" lIns="0" tIns="0" rIns="0" bIns="0" rtlCol="0" anchor="ctr"/>
+          <a:lstStyle/>
+          <a:p>
+            <a:pPr indent="0" marL="0">
+              <a:buNone/>
+            </a:pPr>
+            <a:r>
+              <a:rPr lang="en-US" sz="1300" b="1" dirty="0">
+                <a:solidFill>
+                  <a:srgbClr val="0F172A"/>
+                </a:solidFill>
+                <a:latin typeface="Microsoft JhengHei" pitchFamily="34" charset="0"/>
+                <a:ea typeface="Microsoft JhengHei" pitchFamily="34" charset="-122"/>
+                <a:cs typeface="Microsoft JhengHei" pitchFamily="34" charset="-120"/>
+              </a:rPr>
+              <a:t>帳號安全機制</a:t>
+            </a:r>
+            <a:endParaRPr lang="en-US" sz="1300" dirty="0"/>
+          </a:p>
+        </p:txBody>
+      </p:sp>
+      <p:sp>
+        <p:nvSpPr>
+          <p:cNvPr id="15" name="Text 13"/>
+          <p:cNvSpPr txBox="1"/>
+          <p:nvPr/>
+        </p:nvSpPr>
+        <p:spPr>
+          <a:xfrm>
+            <a:off x="3794760" y="3502152"/>
+            <a:ext cx="7818120" cy="822960"/>
+          </a:xfrm>
+          <a:prstGeom prst="rect">
+            <a:avLst/>
+          </a:prstGeom>
+          <a:noFill/>
+          <a:ln/>
+        </p:spPr>
+        <p:txBody>
+          <a:bodyPr wrap="square" lIns="0" tIns="0" rIns="0" bIns="0" rtlCol="0" anchor="ctr"/>
+          <a:lstStyle/>
+          <a:p>
+            <a:pPr indent="0" marL="0">
+              <a:lnSpc>
+                <a:spcPct val="120000"/>
+              </a:lnSpc>
+              <a:buNone/>
+            </a:pPr>
+            <a:r>
+              <a:rPr lang="en-US" sz="1150" dirty="0">
+                <a:solidFill>
+                  <a:srgbClr val="334155"/>
+                </a:solidFill>
+                <a:latin typeface="Microsoft JhengHei" pitchFamily="34" charset="0"/>
+                <a:ea typeface="Microsoft JhengHei" pitchFamily="34" charset="-122"/>
+                <a:cs typeface="Microsoft JhengHei" pitchFamily="34" charset="-120"/>
+              </a:rPr>
+              <a:t>只開放「借出、申購」的權限，把「提領、轉帳」的功能直接關閉，就算帳號密碼外洩，錢也無法被轉走。</a:t>
+            </a:r>
+            <a:endParaRPr lang="en-US" sz="1150" dirty="0"/>
+          </a:p>
+        </p:txBody>
+      </p:sp>
+      <p:sp>
+        <p:nvSpPr>
+          <p:cNvPr id="16" name="Shape 14"/>
+          <p:cNvSpPr/>
+          <p:nvPr/>
+        </p:nvSpPr>
+        <p:spPr>
+          <a:xfrm>
+            <a:off x="548640" y="4480560"/>
+            <a:ext cx="457200" cy="457200"/>
+          </a:xfrm>
+          <a:prstGeom prst="ellipse">
+            <a:avLst/>
+          </a:prstGeom>
+          <a:solidFill>
+            <a:srgbClr val="EFF6FF"/>
+          </a:solidFill>
+          <a:ln/>
+        </p:spPr>
+      </p:sp>
+      <p:sp>
+        <p:nvSpPr>
+          <p:cNvPr id="17" name="Text 15"/>
+          <p:cNvSpPr txBox="1"/>
+          <p:nvPr/>
+        </p:nvSpPr>
+        <p:spPr>
+          <a:xfrm>
+            <a:off x="548640" y="4480560"/>
+            <a:ext cx="457200" cy="457200"/>
+          </a:xfrm>
+          <a:prstGeom prst="rect">
+            <a:avLst/>
+          </a:prstGeom>
+          <a:noFill/>
+          <a:ln/>
+        </p:spPr>
+        <p:txBody>
+          <a:bodyPr wrap="square" lIns="0" tIns="0" rIns="0" bIns="0" rtlCol="0" anchor="ctr"/>
+          <a:lstStyle/>
+          <a:p>
+            <a:pPr algn="ctr" indent="0" marL="0">
+              <a:buNone/>
+            </a:pPr>
+            <a:r>
+              <a:rPr lang="en-US" sz="2000" b="1" dirty="0">
+                <a:solidFill>
+                  <a:srgbClr val="2563EB"/>
+                </a:solidFill>
+                <a:latin typeface="Microsoft JhengHei" pitchFamily="34" charset="0"/>
+                <a:ea typeface="Microsoft JhengHei" pitchFamily="34" charset="-122"/>
+                <a:cs typeface="Microsoft JhengHei" pitchFamily="34" charset="-120"/>
+              </a:rPr>
+              <a:t>•</a:t>
+            </a:r>
+            <a:endParaRPr lang="en-US" sz="2000" dirty="0"/>
+          </a:p>
+        </p:txBody>
+      </p:sp>
+      <p:sp>
+        <p:nvSpPr>
+          <p:cNvPr id="18" name="Text 16"/>
+          <p:cNvSpPr txBox="1"/>
+          <p:nvPr/>
+        </p:nvSpPr>
+        <p:spPr>
+          <a:xfrm>
+            <a:off x="1234440" y="4462272"/>
+            <a:ext cx="2377440" cy="822960"/>
+          </a:xfrm>
+          <a:prstGeom prst="rect">
+            <a:avLst/>
+          </a:prstGeom>
+          <a:noFill/>
+          <a:ln/>
+        </p:spPr>
+        <p:txBody>
+          <a:bodyPr wrap="square" lIns="0" tIns="0" rIns="0" bIns="0" rtlCol="0" anchor="ctr"/>
+          <a:lstStyle/>
+          <a:p>
+            <a:pPr indent="0" marL="0">
+              <a:buNone/>
+            </a:pPr>
+            <a:r>
+              <a:rPr lang="en-US" sz="1300" b="1" dirty="0">
+                <a:solidFill>
+                  <a:srgbClr val="0F172A"/>
+                </a:solidFill>
+                <a:latin typeface="Microsoft JhengHei" pitchFamily="34" charset="0"/>
+                <a:ea typeface="Microsoft JhengHei" pitchFamily="34" charset="-122"/>
+                <a:cs typeface="Microsoft JhengHei" pitchFamily="34" charset="-120"/>
+              </a:rPr>
+              <a:t>先小額試做，再放大金額</a:t>
+            </a:r>
+            <a:endParaRPr lang="en-US" sz="1300" dirty="0"/>
+          </a:p>
+        </p:txBody>
+      </p:sp>
+      <p:sp>
+        <p:nvSpPr>
+          <p:cNvPr id="19" name="Text 17"/>
+          <p:cNvSpPr txBox="1"/>
+          <p:nvPr/>
+        </p:nvSpPr>
+        <p:spPr>
+          <a:xfrm>
+            <a:off x="3794760" y="4462272"/>
+            <a:ext cx="7818120" cy="822960"/>
+          </a:xfrm>
+          <a:prstGeom prst="rect">
+            <a:avLst/>
+          </a:prstGeom>
+          <a:noFill/>
+          <a:ln/>
+        </p:spPr>
+        <p:txBody>
+          <a:bodyPr wrap="square" lIns="0" tIns="0" rIns="0" bIns="0" rtlCol="0" anchor="ctr"/>
+          <a:lstStyle/>
+          <a:p>
+            <a:pPr indent="0" marL="0">
+              <a:lnSpc>
+                <a:spcPct val="120000"/>
+              </a:lnSpc>
+              <a:buNone/>
+            </a:pPr>
+            <a:r>
+              <a:rPr lang="en-US" sz="1150" dirty="0">
+                <a:solidFill>
+                  <a:srgbClr val="334155"/>
+                </a:solidFill>
+                <a:latin typeface="Microsoft JhengHei" pitchFamily="34" charset="0"/>
+                <a:ea typeface="Microsoft JhengHei" pitchFamily="34" charset="-122"/>
+                <a:cs typeface="Microsoft JhengHei" pitchFamily="34" charset="-120"/>
+              </a:rPr>
+              <a:t>建議先用一小部分金額實際操作 2–3 個月，確認一切運作順利、數字對得起來，再考慮是否放大到完整的 NT$500 萬。</a:t>
+            </a:r>
+            <a:endParaRPr lang="en-US" sz="1150" dirty="0"/>
+          </a:p>
+        </p:txBody>
+      </p:sp>
+      <p:sp>
+        <p:nvSpPr>
+          <p:cNvPr id="20" name="Text 18"/>
+          <p:cNvSpPr txBox="1"/>
+          <p:nvPr/>
+        </p:nvSpPr>
+        <p:spPr>
+          <a:xfrm>
+            <a:off x="457200" y="6492240"/>
+            <a:ext cx="5486400" cy="274320"/>
+          </a:xfrm>
+          <a:prstGeom prst="rect">
+            <a:avLst/>
+          </a:prstGeom>
+          <a:noFill/>
+          <a:ln/>
+        </p:spPr>
+        <p:txBody>
+          <a:bodyPr wrap="square" lIns="0" tIns="0" rIns="0" bIns="0" rtlCol="0" anchor="ctr"/>
+          <a:lstStyle/>
+          <a:p>
+            <a:pPr indent="0" marL="0">
+              <a:buNone/>
+            </a:pPr>
+            <a:r>
+              <a:rPr lang="en-US" sz="900" dirty="0">
+                <a:solidFill>
+                  <a:srgbClr val="64748B"/>
+                </a:solidFill>
+                <a:latin typeface="Microsoft JhengHei" pitchFamily="34" charset="0"/>
+                <a:ea typeface="Microsoft JhengHei" pitchFamily="34" charset="-122"/>
+                <a:cs typeface="Microsoft JhengHei" pitchFamily="34" charset="-120"/>
+              </a:rPr>
+              <a:t>TSGEX 資產管理部｜內部機密｜簡明版</a:t>
+            </a:r>
+            <a:endParaRPr lang="en-US" sz="900" dirty="0"/>
+          </a:p>
+        </p:txBody>
+      </p:sp>
+      <p:sp>
+        <p:nvSpPr>
+          <p:cNvPr id="21" name="Text 19"/>
+          <p:cNvSpPr txBox="1"/>
+          <p:nvPr/>
+        </p:nvSpPr>
+        <p:spPr>
+          <a:xfrm>
+            <a:off x="9905695" y="6492240"/>
+            <a:ext cx="1828800" cy="274320"/>
+          </a:xfrm>
+          <a:prstGeom prst="rect">
+            <a:avLst/>
+          </a:prstGeom>
+          <a:noFill/>
+          <a:ln/>
+        </p:spPr>
+        <p:txBody>
+          <a:bodyPr wrap="square" lIns="0" tIns="0" rIns="0" bIns="0" rtlCol="0" anchor="ctr"/>
+          <a:lstStyle/>
+          <a:p>
+            <a:pPr algn="r" indent="0" marL="0">
+              <a:buNone/>
+            </a:pPr>
+            <a:r>
+              <a:rPr lang="en-US" sz="900" dirty="0">
+                <a:solidFill>
+                  <a:srgbClr val="64748B"/>
+                </a:solidFill>
+                <a:latin typeface="Microsoft JhengHei" pitchFamily="34" charset="0"/>
+                <a:ea typeface="Microsoft JhengHei" pitchFamily="34" charset="-122"/>
+                <a:cs typeface="Microsoft JhengHei" pitchFamily="34" charset="-120"/>
+              </a:rPr>
+              <a:t>11 / 12</a:t>
+            </a:r>
+            <a:endParaRPr lang="en-US" sz="900" dirty="0"/>
+          </a:p>
+        </p:txBody>
+      </p:sp>
+    </p:spTree>
+  </p:cSld>
+  <p:clrMapOvr>
+    <a:masterClrMapping/>
+  </p:clrMapOvr>
+</p:sld>
+</file>
+
+<file path=ppt/slides/slide12.xml><?xml version="1.0" encoding="utf-8"?>
+<p:sld xmlns:a="http://schemas.openxmlformats.org/drawingml/2006/main" xmlns:r="http://schemas.openxmlformats.org/officeDocument/2006/relationships" xmlns:p="http://schemas.openxmlformats.org/presentationml/2006/main">
+  <p:cSld name="Slide 12">
+    <p:bg>
+      <p:bgPr>
+        <a:solidFill>
+          <a:srgbClr val="FFFFFF"/>
+        </a:solidFill>
+      </p:bgPr>
+    </p:bg>
+    <p:spTree>
+      <p:nvGrpSpPr>
+        <p:cNvPr id="1" name=""/>
+        <p:cNvGrpSpPr/>
+        <p:nvPr/>
+      </p:nvGrpSpPr>
+      <p:grpSpPr>
+        <a:xfrm>
+          <a:off x="0" y="0"/>
+          <a:ext cx="0" cy="0"/>
+          <a:chOff x="0" y="0"/>
+          <a:chExt cx="0" cy="0"/>
+        </a:xfrm>
+      </p:grpSpPr>
+      <p:sp>
+        <p:nvSpPr>
+          <p:cNvPr id="2" name="Text 0"/>
+          <p:cNvSpPr txBox="1"/>
+          <p:nvPr/>
+        </p:nvSpPr>
+        <p:spPr>
+          <a:xfrm>
+            <a:off x="548640" y="365760"/>
+            <a:ext cx="11094415" cy="640080"/>
+          </a:xfrm>
+          <a:prstGeom prst="rect">
+            <a:avLst/>
+          </a:prstGeom>
+          <a:noFill/>
+          <a:ln/>
+        </p:spPr>
+        <p:txBody>
+          <a:bodyPr wrap="square" lIns="0" tIns="0" rIns="0" bIns="0" rtlCol="0" anchor="ctr"/>
+          <a:lstStyle/>
+          <a:p>
+            <a:pPr algn="l" indent="0" marL="0">
+              <a:buNone/>
+            </a:pPr>
+            <a:r>
+              <a:rPr lang="en-US" sz="2700" b="1" dirty="0">
+                <a:solidFill>
+                  <a:srgbClr val="0F172A"/>
+                </a:solidFill>
+                <a:latin typeface="Microsoft JhengHei" pitchFamily="34" charset="0"/>
+                <a:ea typeface="Microsoft JhengHei" pitchFamily="34" charset="-122"/>
+                <a:cs typeface="Microsoft JhengHei" pitchFamily="34" charset="-120"/>
+              </a:rPr>
               <a:t>下一步</a:t>
             </a:r>
             <a:endParaRPr lang="en-US" sz="2700" dirty="0"/>
@@ -4622,7 +6370,7 @@
                 <a:ea typeface="Microsoft JhengHei" pitchFamily="34" charset="-122"/>
                 <a:cs typeface="Microsoft JhengHei" pitchFamily="34" charset="-120"/>
               </a:rPr>
-              <a:t>11 / 11</a:t>
+              <a:t>12 / 12</a:t>
             </a:r>
             <a:endParaRPr lang="en-US" sz="900" dirty="0"/>
           </a:p>
@@ -5199,7 +6947,7 @@
                 <a:ea typeface="Microsoft JhengHei" pitchFamily="34" charset="-122"/>
                 <a:cs typeface="Microsoft JhengHei" pitchFamily="34" charset="-120"/>
               </a:rPr>
-              <a:t>2 / 11</a:t>
+              <a:t>2 / 12</a:t>
             </a:r>
             <a:endParaRPr lang="en-US" sz="900" dirty="0"/>
           </a:p>
@@ -6330,7 +8078,7 @@
                 <a:ea typeface="Microsoft JhengHei" pitchFamily="34" charset="-122"/>
                 <a:cs typeface="Microsoft JhengHei" pitchFamily="34" charset="-120"/>
               </a:rPr>
-              <a:t>跟平台「賭」一個價格，</a:t>
+              <a:t>跟平台約定一個價格賺利息，</a:t>
             </a:r>
             <a:endParaRPr lang="en-US" sz="1100" dirty="0"/>
           </a:p>
@@ -6350,7 +8098,7 @@
                 <a:ea typeface="Microsoft JhengHei" pitchFamily="34" charset="-122"/>
                 <a:cs typeface="Microsoft JhengHei" pitchFamily="34" charset="-120"/>
               </a:rPr>
-              <a:t>賭錯要被迫換成別的資產</a:t>
+              <a:t>搭配對的操作方式風險可控</a:t>
             </a:r>
             <a:endParaRPr lang="en-US" sz="1100" dirty="0"/>
           </a:p>
@@ -6416,7 +8164,7 @@
                 <a:ea typeface="Microsoft JhengHei" pitchFamily="34" charset="-122"/>
                 <a:cs typeface="Microsoft JhengHei" pitchFamily="34" charset="-120"/>
               </a:rPr>
-              <a:t>風險：較高</a:t>
+              <a:t>風險：中等</a:t>
             </a:r>
             <a:endParaRPr lang="en-US" sz="1150" dirty="0"/>
           </a:p>
@@ -6692,7 +8440,7 @@
                 <a:ea typeface="Microsoft JhengHei" pitchFamily="34" charset="-122"/>
                 <a:cs typeface="Microsoft JhengHei" pitchFamily="34" charset="-120"/>
               </a:rPr>
-              <a:t>風險：較高</a:t>
+              <a:t>風險：中等</a:t>
             </a:r>
             <a:endParaRPr lang="en-US" sz="1150" dirty="0"/>
           </a:p>
@@ -6809,7 +8557,7 @@
                 <a:ea typeface="Microsoft JhengHei" pitchFamily="34" charset="-122"/>
                 <a:cs typeface="Microsoft JhengHei" pitchFamily="34" charset="-120"/>
               </a:rPr>
-              <a:t>3 / 11</a:t>
+              <a:t>3 / 12</a:t>
             </a:r>
             <a:endParaRPr lang="en-US" sz="900" dirty="0"/>
           </a:p>
@@ -8132,7 +9880,7 @@
                 <a:ea typeface="Microsoft JhengHei" pitchFamily="34" charset="-122"/>
                 <a:cs typeface="Microsoft JhengHei" pitchFamily="34" charset="-120"/>
               </a:rPr>
-              <a:t>4 / 11</a:t>
+              <a:t>4 / 12</a:t>
             </a:r>
             <a:endParaRPr lang="en-US" sz="900" dirty="0"/>
           </a:p>
@@ -9426,7 +11174,7 @@
                 <a:ea typeface="Microsoft JhengHei" pitchFamily="34" charset="-122"/>
                 <a:cs typeface="Microsoft JhengHei" pitchFamily="34" charset="-120"/>
               </a:rPr>
-              <a:t>5 / 11</a:t>
+              <a:t>5 / 12</a:t>
             </a:r>
             <a:endParaRPr lang="en-US" sz="900" dirty="0"/>
           </a:p>
@@ -9539,7 +11287,7 @@
                 <a:ea typeface="Microsoft JhengHei" pitchFamily="34" charset="-122"/>
                 <a:cs typeface="Microsoft JhengHei" pitchFamily="34" charset="-120"/>
               </a:rPr>
-              <a:t>白話說明：本質是「跟平台對賭一個價格」，不是單純的利息</a:t>
+              <a:t>白話說明：跟平台約定一個價格賺利息，五種方法中年化最高，但要搭配正確做法</a:t>
             </a:r>
             <a:endParaRPr lang="en-US" sz="1350" dirty="0"/>
           </a:p>
@@ -9642,7 +11390,7 @@
                 <a:ea typeface="Microsoft JhengHei" pitchFamily="34" charset="-122"/>
                 <a:cs typeface="Microsoft JhengHei" pitchFamily="34" charset="-120"/>
               </a:rPr>
-              <a:t>你先約定一個「目標價格」，平台付你一筆錢（類似保險公司收的保費，這裡反過來是你收錢）。如果到期時價格沒有跌破（或漲破）目標價，你連本金帶「利息」全部拿回；但如果價格跌破（或漲破）目標價，你的本金會被「強制」換成當時已經比較不划算的另一種資產——等於你被迫低價買進或高價賣出。</a:t>
+              <a:t>你先約定一個「目標價格」，平台付你一筆錢（類似保險公司收的保費，這裡反過來是你收錢）。如果到期時價格沒有跌破（或漲破）目標價，你連本金帶「利息」全部拿回；但如果價格跌破（或漲破）目標價，你的本金會被「強制」換成當時已經比較不划算的另一種資產——等於你被迫低價買進或高價賣出。這時候不用急著認賠，換個方式繼續操作即可（下一頁說明）。</a:t>
             </a:r>
             <a:endParaRPr lang="en-US" sz="1050" dirty="0"/>
           </a:p>
@@ -10528,7 +12276,7 @@
                 <a:ea typeface="Microsoft JhengHei" pitchFamily="34" charset="-122"/>
                 <a:cs typeface="Microsoft JhengHei" pitchFamily="34" charset="-120"/>
               </a:rPr>
-              <a:t>廣告上看到的「年化 45%」，其實是「賭對了」才有的報酬；一旦賭錯，本金可能一週內就虧損 20% 以上——這是五種方法中，唯一「本金會因為市場漲跌而實際變少」的方法。</a:t>
+              <a:t>廣告上看到的「年化 45%」，是「猜對方向」才有的報酬；猜錯的那一週帳面會變少，但不是永久的損失——只要不急著認賠賣掉，換個方式繼續操作，通常可以把本金拿回來，詳見下一頁。</a:t>
             </a:r>
             <a:endParaRPr lang="en-US" sz="1250" dirty="0"/>
           </a:p>
@@ -10606,7 +12354,7 @@
                 <a:ea typeface="Microsoft JhengHei" pitchFamily="34" charset="-122"/>
                 <a:cs typeface="Microsoft JhengHei" pitchFamily="34" charset="-120"/>
               </a:rPr>
-              <a:t>6 / 11</a:t>
+              <a:t>6 / 12</a:t>
             </a:r>
             <a:endParaRPr lang="en-US" sz="900" dirty="0"/>
           </a:p>
@@ -10677,7 +12425,7 @@
                 <a:ea typeface="Microsoft JhengHei" pitchFamily="34" charset="-122"/>
                 <a:cs typeface="Microsoft JhengHei" pitchFamily="34" charset="-120"/>
               </a:rPr>
-              <a:t>一張表看懂五種方法的差異</a:t>
+              <a:t>雙幣理財怎麼玩比較安全？一個簡單的紀律</a:t>
             </a:r>
             <a:endParaRPr lang="en-US" sz="2700" dirty="0"/>
           </a:p>
@@ -10719,15 +12467,1058 @@
                 <a:ea typeface="Microsoft JhengHei" pitchFamily="34" charset="-122"/>
                 <a:cs typeface="Microsoft JhengHei" pitchFamily="34" charset="-120"/>
               </a:rPr>
-              <a:t>簡化對比，更多細節在完整版報告</a:t>
+              <a:t>測試了整整一年、兩萬種可能的走勢，找到一個關鍵做法</a:t>
             </a:r>
             <a:endParaRPr lang="en-US" sz="1350" dirty="0"/>
+          </a:p>
+        </p:txBody>
+      </p:sp>
+      <p:sp>
+        <p:nvSpPr>
+          <p:cNvPr id="4" name="Shape 2"/>
+          <p:cNvSpPr/>
+          <p:nvPr/>
+        </p:nvSpPr>
+        <p:spPr>
+          <a:xfrm>
+            <a:off x="548640" y="1508760"/>
+            <a:ext cx="11094415" cy="1463040"/>
+          </a:xfrm>
+          <a:prstGeom prst="roundRect">
+            <a:avLst>
+              <a:gd name="adj" fmla="val 4375"/>
+            </a:avLst>
+          </a:prstGeom>
+          <a:solidFill>
+            <a:srgbClr val="EFF6FF"/>
+          </a:solidFill>
+          <a:ln/>
+        </p:spPr>
+      </p:sp>
+      <p:sp>
+        <p:nvSpPr>
+          <p:cNvPr id="5" name="Text 3"/>
+          <p:cNvSpPr txBox="1"/>
+          <p:nvPr/>
+        </p:nvSpPr>
+        <p:spPr>
+          <a:xfrm>
+            <a:off x="713232" y="1600200"/>
+            <a:ext cx="10765231" cy="292608"/>
+          </a:xfrm>
+          <a:prstGeom prst="rect">
+            <a:avLst/>
+          </a:prstGeom>
+          <a:noFill/>
+          <a:ln/>
+        </p:spPr>
+        <p:txBody>
+          <a:bodyPr wrap="square" lIns="0" tIns="0" rIns="0" bIns="0" rtlCol="0" anchor="ctr"/>
+          <a:lstStyle/>
+          <a:p>
+            <a:pPr indent="0" marL="0">
+              <a:buNone/>
+            </a:pPr>
+            <a:r>
+              <a:rPr lang="en-US" sz="1150" b="1" dirty="0">
+                <a:solidFill>
+                  <a:srgbClr val="2563EB"/>
+                </a:solidFill>
+                <a:latin typeface="Microsoft JhengHei" pitchFamily="34" charset="0"/>
+                <a:ea typeface="Microsoft JhengHei" pitchFamily="34" charset="-122"/>
+                <a:cs typeface="Microsoft JhengHei" pitchFamily="34" charset="-120"/>
+              </a:rPr>
+              <a:t>如果猜錯方向，錢被換成別的資產，接下來怎麼辦？</a:t>
+            </a:r>
+            <a:endParaRPr lang="en-US" sz="1150" dirty="0"/>
+          </a:p>
+        </p:txBody>
+      </p:sp>
+      <p:sp>
+        <p:nvSpPr>
+          <p:cNvPr id="6" name="Text 4"/>
+          <p:cNvSpPr txBox="1"/>
+          <p:nvPr/>
+        </p:nvSpPr>
+        <p:spPr>
+          <a:xfrm>
+            <a:off x="713232" y="1892808"/>
+            <a:ext cx="10765231" cy="960120"/>
+          </a:xfrm>
+          <a:prstGeom prst="rect">
+            <a:avLst/>
+          </a:prstGeom>
+          <a:noFill/>
+          <a:ln/>
+        </p:spPr>
+        <p:txBody>
+          <a:bodyPr wrap="square" lIns="0" tIns="0" rIns="0" bIns="0" rtlCol="0" anchor="ctr"/>
+          <a:lstStyle/>
+          <a:p>
+            <a:pPr indent="0" marL="0">
+              <a:lnSpc>
+                <a:spcPct val="120000"/>
+              </a:lnSpc>
+              <a:buNone/>
+            </a:pPr>
+            <a:r>
+              <a:rPr lang="en-US" sz="1050" dirty="0">
+                <a:solidFill>
+                  <a:srgbClr val="334155"/>
+                </a:solidFill>
+                <a:latin typeface="Microsoft JhengHei" pitchFamily="34" charset="0"/>
+                <a:ea typeface="Microsoft JhengHei" pitchFamily="34" charset="-122"/>
+                <a:cs typeface="Microsoft JhengHei" pitchFamily="34" charset="-120"/>
+              </a:rPr>
+              <a:t>不要急著認賠賣掉。改用手上這批資產，重新約定「原本那個價格」繼續賺利息——只要之後價格漲回原本那個價格，就能把錢全部換回來，而且中間收的利息全部歸你，本金完全不會少。這個做法我們稱為「滾動操作」。</a:t>
+            </a:r>
+            <a:endParaRPr lang="en-US" sz="1050" dirty="0"/>
           </a:p>
         </p:txBody>
       </p:sp>
       <p:graphicFrame>
         <p:nvGraphicFramePr>
           <p:cNvPr id="8" name="Table 0"/>
+          <p:cNvGraphicFramePr>
+            <a:graphicFrameLocks noGrp="1"/>
+          </p:cNvGraphicFramePr>
+          <p:nvPr>
+            <p:extLst>
+              <p:ext uri="{D42A27DB-BD31-4B8C-83A1-F6EECF244321}">
+                <p14:modId xmlns:p14="http://schemas.microsoft.com/office/powerpoint/2010/main" val="1579011935"/>
+              </p:ext>
+            </p:extLst>
+          </p:nvPr>
+        </p:nvGraphicFramePr>
+        <p:xfrm>
+          <a:off x="548640" y="3246120"/>
+          <a:ext cx="11094415" cy="914400"/>
+        </p:xfrm>
+        <a:graphic>
+          <a:graphicData uri="http://schemas.openxmlformats.org/drawingml/2006/table">
+            <a:tbl>
+              <a:tblPr/>
+              <a:tblGrid>
+                <a:gridCol w="5943600"/>
+                <a:gridCol w="5605272"/>
+              </a:tblGrid>
+              <a:tr h="685800">
+                <a:tc>
+                  <a:txBody>
+                    <a:bodyPr/>
+                    <a:lstStyle/>
+                    <a:p>
+                      <a:pPr algn="ctr" indent="0" marL="0">
+                        <a:buNone/>
+                      </a:pPr>
+                      <a:r>
+                        <a:rPr lang="en-US" sz="1200" b="1" dirty="0">
+                          <a:solidFill>
+                            <a:srgbClr val="FFFFFF"/>
+                          </a:solidFill>
+                        </a:rPr>
+                        <a:t>做法</a:t>
+                      </a:r>
+                      <a:endParaRPr lang="en-US" sz="1200" dirty="0"/>
+                    </a:p>
+                  </a:txBody>
+                  <a:tcPr marL="73152" marR="73152" marT="54864" marB="54864" anchor="ctr">
+                    <a:lnL w="9525" cap="flat" cmpd="sng" algn="ctr">
+                      <a:solidFill>
+                        <a:srgbClr val="E2E8F0"/>
+                      </a:solidFill>
+                      <a:prstDash val="solid"/>
+                      <a:round/>
+                      <a:headEnd type="none" w="med" len="med"/>
+                      <a:tailEnd type="none" w="med" len="med"/>
+                    </a:lnL>
+                    <a:lnR w="9525" cap="flat" cmpd="sng" algn="ctr">
+                      <a:solidFill>
+                        <a:srgbClr val="E2E8F0"/>
+                      </a:solidFill>
+                      <a:prstDash val="solid"/>
+                      <a:round/>
+                      <a:headEnd type="none" w="med" len="med"/>
+                      <a:tailEnd type="none" w="med" len="med"/>
+                    </a:lnR>
+                    <a:lnT w="9525" cap="flat" cmpd="sng" algn="ctr">
+                      <a:solidFill>
+                        <a:srgbClr val="E2E8F0"/>
+                      </a:solidFill>
+                      <a:prstDash val="solid"/>
+                      <a:round/>
+                      <a:headEnd type="none" w="med" len="med"/>
+                      <a:tailEnd type="none" w="med" len="med"/>
+                    </a:lnT>
+                    <a:lnB w="9525" cap="flat" cmpd="sng" algn="ctr">
+                      <a:solidFill>
+                        <a:srgbClr val="E2E8F0"/>
+                      </a:solidFill>
+                      <a:prstDash val="solid"/>
+                      <a:round/>
+                      <a:headEnd type="none" w="med" len="med"/>
+                      <a:tailEnd type="none" w="med" len="med"/>
+                    </a:lnB>
+                    <a:solidFill>
+                      <a:srgbClr val="0F172A"/>
+                    </a:solidFill>
+                  </a:tcPr>
+                </a:tc>
+                <a:tc>
+                  <a:txBody>
+                    <a:bodyPr/>
+                    <a:lstStyle/>
+                    <a:p>
+                      <a:pPr algn="ctr" indent="0" marL="0">
+                        <a:buNone/>
+                      </a:pPr>
+                      <a:r>
+                        <a:rPr lang="en-US" sz="1200" b="1" dirty="0">
+                          <a:solidFill>
+                            <a:srgbClr val="FFFFFF"/>
+                          </a:solidFill>
+                        </a:rPr>
+                        <a:t>一整年下來，錢變少的機率</a:t>
+                      </a:r>
+                      <a:endParaRPr lang="en-US" sz="1200" dirty="0"/>
+                    </a:p>
+                  </a:txBody>
+                  <a:tcPr marL="73152" marR="73152" marT="54864" marB="54864" anchor="ctr">
+                    <a:lnL w="9525" cap="flat" cmpd="sng" algn="ctr">
+                      <a:solidFill>
+                        <a:srgbClr val="E2E8F0"/>
+                      </a:solidFill>
+                      <a:prstDash val="solid"/>
+                      <a:round/>
+                      <a:headEnd type="none" w="med" len="med"/>
+                      <a:tailEnd type="none" w="med" len="med"/>
+                    </a:lnL>
+                    <a:lnR w="9525" cap="flat" cmpd="sng" algn="ctr">
+                      <a:solidFill>
+                        <a:srgbClr val="E2E8F0"/>
+                      </a:solidFill>
+                      <a:prstDash val="solid"/>
+                      <a:round/>
+                      <a:headEnd type="none" w="med" len="med"/>
+                      <a:tailEnd type="none" w="med" len="med"/>
+                    </a:lnR>
+                    <a:lnT w="9525" cap="flat" cmpd="sng" algn="ctr">
+                      <a:solidFill>
+                        <a:srgbClr val="E2E8F0"/>
+                      </a:solidFill>
+                      <a:prstDash val="solid"/>
+                      <a:round/>
+                      <a:headEnd type="none" w="med" len="med"/>
+                      <a:tailEnd type="none" w="med" len="med"/>
+                    </a:lnT>
+                    <a:lnB w="9525" cap="flat" cmpd="sng" algn="ctr">
+                      <a:solidFill>
+                        <a:srgbClr val="E2E8F0"/>
+                      </a:solidFill>
+                      <a:prstDash val="solid"/>
+                      <a:round/>
+                      <a:headEnd type="none" w="med" len="med"/>
+                      <a:tailEnd type="none" w="med" len="med"/>
+                    </a:lnB>
+                    <a:solidFill>
+                      <a:srgbClr val="0F172A"/>
+                    </a:solidFill>
+                  </a:tcPr>
+                </a:tc>
+              </a:tr>
+              <a:tr h="685800">
+                <a:tc>
+                  <a:txBody>
+                    <a:bodyPr/>
+                    <a:lstStyle/>
+                    <a:p>
+                      <a:pPr algn="ctr" indent="0" marL="0">
+                        <a:buNone/>
+                      </a:pPr>
+                      <a:r>
+                        <a:rPr lang="en-US" sz="1200" dirty="0">
+                          <a:solidFill>
+                            <a:srgbClr val="334155"/>
+                          </a:solidFill>
+                        </a:rPr>
+                        <a:t>猜錯了就一直用最新價格重新開始（不建議）</a:t>
+                      </a:r>
+                      <a:endParaRPr lang="en-US" sz="1200" dirty="0"/>
+                    </a:p>
+                  </a:txBody>
+                  <a:tcPr marL="73152" marR="73152" marT="54864" marB="54864" anchor="ctr">
+                    <a:lnL w="9525" cap="flat" cmpd="sng" algn="ctr">
+                      <a:solidFill>
+                        <a:srgbClr val="E2E8F0"/>
+                      </a:solidFill>
+                      <a:prstDash val="solid"/>
+                      <a:round/>
+                      <a:headEnd type="none" w="med" len="med"/>
+                      <a:tailEnd type="none" w="med" len="med"/>
+                    </a:lnL>
+                    <a:lnR w="9525" cap="flat" cmpd="sng" algn="ctr">
+                      <a:solidFill>
+                        <a:srgbClr val="E2E8F0"/>
+                      </a:solidFill>
+                      <a:prstDash val="solid"/>
+                      <a:round/>
+                      <a:headEnd type="none" w="med" len="med"/>
+                      <a:tailEnd type="none" w="med" len="med"/>
+                    </a:lnR>
+                    <a:lnT w="9525" cap="flat" cmpd="sng" algn="ctr">
+                      <a:solidFill>
+                        <a:srgbClr val="E2E8F0"/>
+                      </a:solidFill>
+                      <a:prstDash val="solid"/>
+                      <a:round/>
+                      <a:headEnd type="none" w="med" len="med"/>
+                      <a:tailEnd type="none" w="med" len="med"/>
+                    </a:lnT>
+                    <a:lnB w="9525" cap="flat" cmpd="sng" algn="ctr">
+                      <a:solidFill>
+                        <a:srgbClr val="E2E8F0"/>
+                      </a:solidFill>
+                      <a:prstDash val="solid"/>
+                      <a:round/>
+                      <a:headEnd type="none" w="med" len="med"/>
+                      <a:tailEnd type="none" w="med" len="med"/>
+                    </a:lnB>
+                    <a:solidFill>
+                      <a:srgbClr val="FFFFFF"/>
+                    </a:solidFill>
+                  </a:tcPr>
+                </a:tc>
+                <a:tc>
+                  <a:txBody>
+                    <a:bodyPr/>
+                    <a:lstStyle/>
+                    <a:p>
+                      <a:pPr algn="ctr" indent="0" marL="0">
+                        <a:buNone/>
+                      </a:pPr>
+                      <a:r>
+                        <a:rPr lang="en-US" sz="1200" dirty="0">
+                          <a:solidFill>
+                            <a:srgbClr val="334155"/>
+                          </a:solidFill>
+                        </a:rPr>
+                        <a:t>74.5% ～ 85.1%</a:t>
+                      </a:r>
+                      <a:endParaRPr lang="en-US" sz="1200" dirty="0"/>
+                    </a:p>
+                  </a:txBody>
+                  <a:tcPr marL="73152" marR="73152" marT="54864" marB="54864" anchor="ctr">
+                    <a:lnL w="9525" cap="flat" cmpd="sng" algn="ctr">
+                      <a:solidFill>
+                        <a:srgbClr val="E2E8F0"/>
+                      </a:solidFill>
+                      <a:prstDash val="solid"/>
+                      <a:round/>
+                      <a:headEnd type="none" w="med" len="med"/>
+                      <a:tailEnd type="none" w="med" len="med"/>
+                    </a:lnL>
+                    <a:lnR w="9525" cap="flat" cmpd="sng" algn="ctr">
+                      <a:solidFill>
+                        <a:srgbClr val="E2E8F0"/>
+                      </a:solidFill>
+                      <a:prstDash val="solid"/>
+                      <a:round/>
+                      <a:headEnd type="none" w="med" len="med"/>
+                      <a:tailEnd type="none" w="med" len="med"/>
+                    </a:lnR>
+                    <a:lnT w="9525" cap="flat" cmpd="sng" algn="ctr">
+                      <a:solidFill>
+                        <a:srgbClr val="E2E8F0"/>
+                      </a:solidFill>
+                      <a:prstDash val="solid"/>
+                      <a:round/>
+                      <a:headEnd type="none" w="med" len="med"/>
+                      <a:tailEnd type="none" w="med" len="med"/>
+                    </a:lnT>
+                    <a:lnB w="9525" cap="flat" cmpd="sng" algn="ctr">
+                      <a:solidFill>
+                        <a:srgbClr val="E2E8F0"/>
+                      </a:solidFill>
+                      <a:prstDash val="solid"/>
+                      <a:round/>
+                      <a:headEnd type="none" w="med" len="med"/>
+                      <a:tailEnd type="none" w="med" len="med"/>
+                    </a:lnB>
+                    <a:solidFill>
+                      <a:srgbClr val="FFFFFF"/>
+                    </a:solidFill>
+                  </a:tcPr>
+                </a:tc>
+              </a:tr>
+              <a:tr h="685800">
+                <a:tc>
+                  <a:txBody>
+                    <a:bodyPr/>
+                    <a:lstStyle/>
+                    <a:p>
+                      <a:pPr algn="ctr" indent="0" marL="0">
+                        <a:buNone/>
+                      </a:pPr>
+                      <a:r>
+                        <a:rPr lang="en-US" sz="1200" dirty="0">
+                          <a:solidFill>
+                            <a:srgbClr val="334155"/>
+                          </a:solidFill>
+                        </a:rPr>
+                        <a:t>猜錯了先滾動操作，等本金拿回來就先收手、不馬上再下注</a:t>
+                      </a:r>
+                      <a:endParaRPr lang="en-US" sz="1200" dirty="0"/>
+                    </a:p>
+                  </a:txBody>
+                  <a:tcPr marL="73152" marR="73152" marT="54864" marB="54864" anchor="ctr">
+                    <a:lnL w="9525" cap="flat" cmpd="sng" algn="ctr">
+                      <a:solidFill>
+                        <a:srgbClr val="E2E8F0"/>
+                      </a:solidFill>
+                      <a:prstDash val="solid"/>
+                      <a:round/>
+                      <a:headEnd type="none" w="med" len="med"/>
+                      <a:tailEnd type="none" w="med" len="med"/>
+                    </a:lnL>
+                    <a:lnR w="9525" cap="flat" cmpd="sng" algn="ctr">
+                      <a:solidFill>
+                        <a:srgbClr val="E2E8F0"/>
+                      </a:solidFill>
+                      <a:prstDash val="solid"/>
+                      <a:round/>
+                      <a:headEnd type="none" w="med" len="med"/>
+                      <a:tailEnd type="none" w="med" len="med"/>
+                    </a:lnR>
+                    <a:lnT w="9525" cap="flat" cmpd="sng" algn="ctr">
+                      <a:solidFill>
+                        <a:srgbClr val="E2E8F0"/>
+                      </a:solidFill>
+                      <a:prstDash val="solid"/>
+                      <a:round/>
+                      <a:headEnd type="none" w="med" len="med"/>
+                      <a:tailEnd type="none" w="med" len="med"/>
+                    </a:lnT>
+                    <a:lnB w="9525" cap="flat" cmpd="sng" algn="ctr">
+                      <a:solidFill>
+                        <a:srgbClr val="E2E8F0"/>
+                      </a:solidFill>
+                      <a:prstDash val="solid"/>
+                      <a:round/>
+                      <a:headEnd type="none" w="med" len="med"/>
+                      <a:tailEnd type="none" w="med" len="med"/>
+                    </a:lnB>
+                    <a:solidFill>
+                      <a:srgbClr val="F8FAFC"/>
+                    </a:solidFill>
+                  </a:tcPr>
+                </a:tc>
+                <a:tc>
+                  <a:txBody>
+                    <a:bodyPr/>
+                    <a:lstStyle/>
+                    <a:p>
+                      <a:pPr algn="ctr" indent="0" marL="0">
+                        <a:buNone/>
+                      </a:pPr>
+                      <a:r>
+                        <a:rPr lang="en-US" sz="1200" dirty="0">
+                          <a:solidFill>
+                            <a:srgbClr val="334155"/>
+                          </a:solidFill>
+                        </a:rPr>
+                        <a:t>18.9% ～ 20.4%</a:t>
+                      </a:r>
+                      <a:endParaRPr lang="en-US" sz="1200" dirty="0"/>
+                    </a:p>
+                  </a:txBody>
+                  <a:tcPr marL="73152" marR="73152" marT="54864" marB="54864" anchor="ctr">
+                    <a:lnL w="9525" cap="flat" cmpd="sng" algn="ctr">
+                      <a:solidFill>
+                        <a:srgbClr val="E2E8F0"/>
+                      </a:solidFill>
+                      <a:prstDash val="solid"/>
+                      <a:round/>
+                      <a:headEnd type="none" w="med" len="med"/>
+                      <a:tailEnd type="none" w="med" len="med"/>
+                    </a:lnL>
+                    <a:lnR w="9525" cap="flat" cmpd="sng" algn="ctr">
+                      <a:solidFill>
+                        <a:srgbClr val="E2E8F0"/>
+                      </a:solidFill>
+                      <a:prstDash val="solid"/>
+                      <a:round/>
+                      <a:headEnd type="none" w="med" len="med"/>
+                      <a:tailEnd type="none" w="med" len="med"/>
+                    </a:lnR>
+                    <a:lnT w="9525" cap="flat" cmpd="sng" algn="ctr">
+                      <a:solidFill>
+                        <a:srgbClr val="E2E8F0"/>
+                      </a:solidFill>
+                      <a:prstDash val="solid"/>
+                      <a:round/>
+                      <a:headEnd type="none" w="med" len="med"/>
+                      <a:tailEnd type="none" w="med" len="med"/>
+                    </a:lnT>
+                    <a:lnB w="9525" cap="flat" cmpd="sng" algn="ctr">
+                      <a:solidFill>
+                        <a:srgbClr val="E2E8F0"/>
+                      </a:solidFill>
+                      <a:prstDash val="solid"/>
+                      <a:round/>
+                      <a:headEnd type="none" w="med" len="med"/>
+                      <a:tailEnd type="none" w="med" len="med"/>
+                    </a:lnB>
+                    <a:solidFill>
+                      <a:srgbClr val="F8FAFC"/>
+                    </a:solidFill>
+                  </a:tcPr>
+                </a:tc>
+              </a:tr>
+            </a:tbl>
+          </a:graphicData>
+        </a:graphic>
+      </p:graphicFrame>
+      <p:sp>
+        <p:nvSpPr>
+          <p:cNvPr id="8" name="Shape 5"/>
+          <p:cNvSpPr/>
+          <p:nvPr/>
+        </p:nvSpPr>
+        <p:spPr>
+          <a:xfrm>
+            <a:off x="548640" y="4709160"/>
+            <a:ext cx="3566160" cy="1463040"/>
+          </a:xfrm>
+          <a:prstGeom prst="roundRect">
+            <a:avLst>
+              <a:gd name="adj" fmla="val 5000"/>
+            </a:avLst>
+          </a:prstGeom>
+          <a:solidFill>
+            <a:srgbClr val="EFF6FF"/>
+          </a:solidFill>
+          <a:ln/>
+        </p:spPr>
+      </p:sp>
+      <p:sp>
+        <p:nvSpPr>
+          <p:cNvPr id="9" name="Text 6"/>
+          <p:cNvSpPr txBox="1"/>
+          <p:nvPr/>
+        </p:nvSpPr>
+        <p:spPr>
+          <a:xfrm>
+            <a:off x="685800" y="4818888"/>
+            <a:ext cx="3291840" cy="960120"/>
+          </a:xfrm>
+          <a:prstGeom prst="rect">
+            <a:avLst/>
+          </a:prstGeom>
+          <a:noFill/>
+          <a:ln/>
+        </p:spPr>
+        <p:txBody>
+          <a:bodyPr wrap="square" lIns="0" tIns="0" rIns="0" bIns="0" rtlCol="0" anchor="b"/>
+          <a:lstStyle/>
+          <a:p>
+            <a:pPr algn="ctr" indent="0" marL="0">
+              <a:buNone/>
+            </a:pPr>
+            <a:r>
+              <a:rPr lang="en-US" sz="1800" b="1" dirty="0">
+                <a:solidFill>
+                  <a:srgbClr val="16A34A"/>
+                </a:solidFill>
+                <a:latin typeface="Microsoft JhengHei" pitchFamily="34" charset="0"/>
+                <a:ea typeface="Microsoft JhengHei" pitchFamily="34" charset="-122"/>
+                <a:cs typeface="Microsoft JhengHei" pitchFamily="34" charset="-120"/>
+              </a:rPr>
+              <a:t>只多做一件事</a:t>
+            </a:r>
+            <a:endParaRPr lang="en-US" sz="1800" dirty="0"/>
+          </a:p>
+        </p:txBody>
+      </p:sp>
+      <p:sp>
+        <p:nvSpPr>
+          <p:cNvPr id="10" name="Text 7"/>
+          <p:cNvSpPr txBox="1"/>
+          <p:nvPr/>
+        </p:nvSpPr>
+        <p:spPr>
+          <a:xfrm>
+            <a:off x="640080" y="5788152"/>
+            <a:ext cx="3383280" cy="320040"/>
+          </a:xfrm>
+          <a:prstGeom prst="rect">
+            <a:avLst/>
+          </a:prstGeom>
+          <a:noFill/>
+          <a:ln/>
+        </p:spPr>
+        <p:txBody>
+          <a:bodyPr wrap="square" lIns="0" tIns="0" rIns="0" bIns="0" rtlCol="0" anchor="t"/>
+          <a:lstStyle/>
+          <a:p>
+            <a:pPr algn="ctr" indent="0" marL="0">
+              <a:buNone/>
+            </a:pPr>
+            <a:r>
+              <a:rPr lang="en-US" sz="1050" dirty="0">
+                <a:solidFill>
+                  <a:srgbClr val="334155"/>
+                </a:solidFill>
+                <a:latin typeface="Microsoft JhengHei" pitchFamily="34" charset="0"/>
+                <a:ea typeface="Microsoft JhengHei" pitchFamily="34" charset="-122"/>
+                <a:cs typeface="Microsoft JhengHei" pitchFamily="34" charset="-120"/>
+              </a:rPr>
+              <a:t>把「錢變少的機率」從7～8成</a:t>
+            </a:r>
+            <a:endParaRPr lang="en-US" sz="1050" dirty="0"/>
+          </a:p>
+          <a:p>
+            <a:pPr algn="ctr" indent="0" marL="0">
+              <a:buNone/>
+            </a:pPr>
+            <a:r>
+              <a:rPr lang="en-US" sz="1050" dirty="0">
+                <a:solidFill>
+                  <a:srgbClr val="334155"/>
+                </a:solidFill>
+                <a:latin typeface="Microsoft JhengHei" pitchFamily="34" charset="0"/>
+                <a:ea typeface="Microsoft JhengHei" pitchFamily="34" charset="-122"/>
+                <a:cs typeface="Microsoft JhengHei" pitchFamily="34" charset="-120"/>
+              </a:rPr>
+              <a:t>降到約2成</a:t>
+            </a:r>
+            <a:endParaRPr lang="en-US" sz="1050" dirty="0"/>
+          </a:p>
+        </p:txBody>
+      </p:sp>
+      <p:sp>
+        <p:nvSpPr>
+          <p:cNvPr id="11" name="Shape 8"/>
+          <p:cNvSpPr/>
+          <p:nvPr/>
+        </p:nvSpPr>
+        <p:spPr>
+          <a:xfrm>
+            <a:off x="4297680" y="4709160"/>
+            <a:ext cx="3566160" cy="1463040"/>
+          </a:xfrm>
+          <a:prstGeom prst="roundRect">
+            <a:avLst>
+              <a:gd name="adj" fmla="val 5000"/>
+            </a:avLst>
+          </a:prstGeom>
+          <a:solidFill>
+            <a:srgbClr val="EFF6FF"/>
+          </a:solidFill>
+          <a:ln w="9525">
+            <a:solidFill>
+              <a:srgbClr val="E2E8F0"/>
+            </a:solidFill>
+            <a:prstDash val="solid"/>
+          </a:ln>
+          <a:effectLst>
+            <a:outerShdw sx="100000" sy="100000" kx="0" ky="0" algn="bl" rotWithShape="0" blurRad="76200" dist="25400" dir="5400000">
+              <a:srgbClr val="1E293B">
+                <a:alpha val="8000"/>
+              </a:srgbClr>
+            </a:outerShdw>
+          </a:effectLst>
+        </p:spPr>
+      </p:sp>
+      <p:sp>
+        <p:nvSpPr>
+          <p:cNvPr id="12" name="Text 9"/>
+          <p:cNvSpPr txBox="1"/>
+          <p:nvPr/>
+        </p:nvSpPr>
+        <p:spPr>
+          <a:xfrm>
+            <a:off x="4498848" y="4855464"/>
+            <a:ext cx="3163824" cy="365760"/>
+          </a:xfrm>
+          <a:prstGeom prst="rect">
+            <a:avLst/>
+          </a:prstGeom>
+          <a:noFill/>
+          <a:ln/>
+        </p:spPr>
+        <p:txBody>
+          <a:bodyPr wrap="square" lIns="0" tIns="0" rIns="0" bIns="0" rtlCol="0" anchor="ctr"/>
+          <a:lstStyle/>
+          <a:p>
+            <a:pPr algn="l" indent="0" marL="0">
+              <a:buNone/>
+            </a:pPr>
+            <a:r>
+              <a:rPr lang="en-US" sz="1350" b="1" dirty="0">
+                <a:solidFill>
+                  <a:srgbClr val="0F172A"/>
+                </a:solidFill>
+                <a:latin typeface="Microsoft JhengHei" pitchFamily="34" charset="0"/>
+                <a:ea typeface="Microsoft JhengHei" pitchFamily="34" charset="-122"/>
+                <a:cs typeface="Microsoft JhengHei" pitchFamily="34" charset="-120"/>
+              </a:rPr>
+              <a:t>這一件事是什麼？</a:t>
+            </a:r>
+            <a:endParaRPr lang="en-US" sz="1350" dirty="0"/>
+          </a:p>
+        </p:txBody>
+      </p:sp>
+      <p:sp>
+        <p:nvSpPr>
+          <p:cNvPr id="13" name="Text 10"/>
+          <p:cNvSpPr txBox="1"/>
+          <p:nvPr/>
+        </p:nvSpPr>
+        <p:spPr>
+          <a:xfrm>
+            <a:off x="4498848" y="5239512"/>
+            <a:ext cx="3163824" cy="768096"/>
+          </a:xfrm>
+          <a:prstGeom prst="rect">
+            <a:avLst/>
+          </a:prstGeom>
+          <a:noFill/>
+          <a:ln/>
+        </p:spPr>
+        <p:txBody>
+          <a:bodyPr wrap="square" lIns="0" tIns="0" rIns="0" bIns="0" rtlCol="0" anchor="t"/>
+          <a:lstStyle/>
+          <a:p>
+            <a:pPr algn="l" indent="0" marL="0">
+              <a:lnSpc>
+                <a:spcPct val="125000"/>
+              </a:lnSpc>
+              <a:buNone/>
+            </a:pPr>
+            <a:r>
+              <a:rPr lang="en-US" sz="1150" dirty="0">
+                <a:solidFill>
+                  <a:srgbClr val="334155"/>
+                </a:solidFill>
+                <a:latin typeface="Microsoft JhengHei" pitchFamily="34" charset="0"/>
+                <a:ea typeface="Microsoft JhengHei" pitchFamily="34" charset="-122"/>
+                <a:cs typeface="Microsoft JhengHei" pitchFamily="34" charset="-120"/>
+              </a:rPr>
+              <a:t>本金拿回來以後，先把錢放著（賺其他方法的利息），不要立刻又下一注——這是唯一的差別。</a:t>
+            </a:r>
+            <a:endParaRPr lang="en-US" sz="1150" dirty="0"/>
+          </a:p>
+        </p:txBody>
+      </p:sp>
+      <p:sp>
+        <p:nvSpPr>
+          <p:cNvPr id="14" name="Shape 11"/>
+          <p:cNvSpPr/>
+          <p:nvPr/>
+        </p:nvSpPr>
+        <p:spPr>
+          <a:xfrm>
+            <a:off x="7955280" y="4709160"/>
+            <a:ext cx="3685032" cy="1463040"/>
+          </a:xfrm>
+          <a:prstGeom prst="roundRect">
+            <a:avLst>
+              <a:gd name="adj" fmla="val 5000"/>
+            </a:avLst>
+          </a:prstGeom>
+          <a:solidFill>
+            <a:srgbClr val="F8FAFC"/>
+          </a:solidFill>
+          <a:ln w="9525">
+            <a:solidFill>
+              <a:srgbClr val="E2E8F0"/>
+            </a:solidFill>
+            <a:prstDash val="solid"/>
+          </a:ln>
+          <a:effectLst>
+            <a:outerShdw sx="100000" sy="100000" kx="0" ky="0" algn="bl" rotWithShape="0" blurRad="76200" dist="25400" dir="5400000">
+              <a:srgbClr val="1E293B">
+                <a:alpha val="8000"/>
+              </a:srgbClr>
+            </a:outerShdw>
+          </a:effectLst>
+        </p:spPr>
+      </p:sp>
+      <p:sp>
+        <p:nvSpPr>
+          <p:cNvPr id="15" name="Text 12"/>
+          <p:cNvSpPr txBox="1"/>
+          <p:nvPr/>
+        </p:nvSpPr>
+        <p:spPr>
+          <a:xfrm>
+            <a:off x="8156448" y="4855464"/>
+            <a:ext cx="3282696" cy="365760"/>
+          </a:xfrm>
+          <a:prstGeom prst="rect">
+            <a:avLst/>
+          </a:prstGeom>
+          <a:noFill/>
+          <a:ln/>
+        </p:spPr>
+        <p:txBody>
+          <a:bodyPr wrap="square" lIns="0" tIns="0" rIns="0" bIns="0" rtlCol="0" anchor="ctr"/>
+          <a:lstStyle/>
+          <a:p>
+            <a:pPr algn="l" indent="0" marL="0">
+              <a:buNone/>
+            </a:pPr>
+            <a:r>
+              <a:rPr lang="en-US" sz="1350" b="1" dirty="0">
+                <a:solidFill>
+                  <a:srgbClr val="0F172A"/>
+                </a:solidFill>
+                <a:latin typeface="Microsoft JhengHei" pitchFamily="34" charset="0"/>
+                <a:ea typeface="Microsoft JhengHei" pitchFamily="34" charset="-122"/>
+                <a:cs typeface="Microsoft JhengHei" pitchFamily="34" charset="-120"/>
+              </a:rPr>
+              <a:t>白話結論</a:t>
+            </a:r>
+            <a:endParaRPr lang="en-US" sz="1350" dirty="0"/>
+          </a:p>
+        </p:txBody>
+      </p:sp>
+      <p:sp>
+        <p:nvSpPr>
+          <p:cNvPr id="16" name="Text 13"/>
+          <p:cNvSpPr txBox="1"/>
+          <p:nvPr/>
+        </p:nvSpPr>
+        <p:spPr>
+          <a:xfrm>
+            <a:off x="8156448" y="5239512"/>
+            <a:ext cx="3282696" cy="768096"/>
+          </a:xfrm>
+          <a:prstGeom prst="rect">
+            <a:avLst/>
+          </a:prstGeom>
+          <a:noFill/>
+          <a:ln/>
+        </p:spPr>
+        <p:txBody>
+          <a:bodyPr wrap="square" lIns="0" tIns="0" rIns="0" bIns="0" rtlCol="0" anchor="t"/>
+          <a:lstStyle/>
+          <a:p>
+            <a:pPr algn="l" indent="0" marL="0">
+              <a:lnSpc>
+                <a:spcPct val="125000"/>
+              </a:lnSpc>
+              <a:buNone/>
+            </a:pPr>
+            <a:r>
+              <a:rPr lang="en-US" sz="1100" dirty="0">
+                <a:solidFill>
+                  <a:srgbClr val="334155"/>
+                </a:solidFill>
+                <a:latin typeface="Microsoft JhengHei" pitchFamily="34" charset="0"/>
+                <a:ea typeface="Microsoft JhengHei" pitchFamily="34" charset="-122"/>
+                <a:cs typeface="Microsoft JhengHei" pitchFamily="34" charset="-120"/>
+              </a:rPr>
+              <a:t>雙幣理財不是不能碰，是不能「一直重複下注」；照這個紀律操作，用NT$500萬的一部分來做，是合理的選項。</a:t>
+            </a:r>
+            <a:endParaRPr lang="en-US" sz="1100" dirty="0"/>
+          </a:p>
+        </p:txBody>
+      </p:sp>
+      <p:sp>
+        <p:nvSpPr>
+          <p:cNvPr id="17" name="Text 14"/>
+          <p:cNvSpPr txBox="1"/>
+          <p:nvPr/>
+        </p:nvSpPr>
+        <p:spPr>
+          <a:xfrm>
+            <a:off x="457200" y="6492240"/>
+            <a:ext cx="5486400" cy="274320"/>
+          </a:xfrm>
+          <a:prstGeom prst="rect">
+            <a:avLst/>
+          </a:prstGeom>
+          <a:noFill/>
+          <a:ln/>
+        </p:spPr>
+        <p:txBody>
+          <a:bodyPr wrap="square" lIns="0" tIns="0" rIns="0" bIns="0" rtlCol="0" anchor="ctr"/>
+          <a:lstStyle/>
+          <a:p>
+            <a:pPr indent="0" marL="0">
+              <a:buNone/>
+            </a:pPr>
+            <a:r>
+              <a:rPr lang="en-US" sz="900" dirty="0">
+                <a:solidFill>
+                  <a:srgbClr val="64748B"/>
+                </a:solidFill>
+                <a:latin typeface="Microsoft JhengHei" pitchFamily="34" charset="0"/>
+                <a:ea typeface="Microsoft JhengHei" pitchFamily="34" charset="-122"/>
+                <a:cs typeface="Microsoft JhengHei" pitchFamily="34" charset="-120"/>
+              </a:rPr>
+              <a:t>TSGEX 資產管理部｜內部機密｜簡明版</a:t>
+            </a:r>
+            <a:endParaRPr lang="en-US" sz="900" dirty="0"/>
+          </a:p>
+        </p:txBody>
+      </p:sp>
+      <p:sp>
+        <p:nvSpPr>
+          <p:cNvPr id="18" name="Text 15"/>
+          <p:cNvSpPr txBox="1"/>
+          <p:nvPr/>
+        </p:nvSpPr>
+        <p:spPr>
+          <a:xfrm>
+            <a:off x="9905695" y="6492240"/>
+            <a:ext cx="1828800" cy="274320"/>
+          </a:xfrm>
+          <a:prstGeom prst="rect">
+            <a:avLst/>
+          </a:prstGeom>
+          <a:noFill/>
+          <a:ln/>
+        </p:spPr>
+        <p:txBody>
+          <a:bodyPr wrap="square" lIns="0" tIns="0" rIns="0" bIns="0" rtlCol="0" anchor="ctr"/>
+          <a:lstStyle/>
+          <a:p>
+            <a:pPr algn="r" indent="0" marL="0">
+              <a:buNone/>
+            </a:pPr>
+            <a:r>
+              <a:rPr lang="en-US" sz="900" dirty="0">
+                <a:solidFill>
+                  <a:srgbClr val="64748B"/>
+                </a:solidFill>
+                <a:latin typeface="Microsoft JhengHei" pitchFamily="34" charset="0"/>
+                <a:ea typeface="Microsoft JhengHei" pitchFamily="34" charset="-122"/>
+                <a:cs typeface="Microsoft JhengHei" pitchFamily="34" charset="-120"/>
+              </a:rPr>
+              <a:t>7 / 12</a:t>
+            </a:r>
+            <a:endParaRPr lang="en-US" sz="900" dirty="0"/>
+          </a:p>
+        </p:txBody>
+      </p:sp>
+    </p:spTree>
+  </p:cSld>
+  <p:clrMapOvr>
+    <a:masterClrMapping/>
+  </p:clrMapOvr>
+</p:sld>
+</file>
+
+<file path=ppt/slides/slide8.xml><?xml version="1.0" encoding="utf-8"?>
+<p:sld xmlns:a="http://schemas.openxmlformats.org/drawingml/2006/main" xmlns:r="http://schemas.openxmlformats.org/officeDocument/2006/relationships" xmlns:p="http://schemas.openxmlformats.org/presentationml/2006/main">
+  <p:cSld name="Slide 8">
+    <p:bg>
+      <p:bgPr>
+        <a:solidFill>
+          <a:srgbClr val="FFFFFF"/>
+        </a:solidFill>
+      </p:bgPr>
+    </p:bg>
+    <p:spTree>
+      <p:nvGrpSpPr>
+        <p:cNvPr id="1" name=""/>
+        <p:cNvGrpSpPr/>
+        <p:nvPr/>
+      </p:nvGrpSpPr>
+      <p:grpSpPr>
+        <a:xfrm>
+          <a:off x="0" y="0"/>
+          <a:ext cx="0" cy="0"/>
+          <a:chOff x="0" y="0"/>
+          <a:chExt cx="0" cy="0"/>
+        </a:xfrm>
+      </p:grpSpPr>
+      <p:sp>
+        <p:nvSpPr>
+          <p:cNvPr id="2" name="Text 0"/>
+          <p:cNvSpPr txBox="1"/>
+          <p:nvPr/>
+        </p:nvSpPr>
+        <p:spPr>
+          <a:xfrm>
+            <a:off x="548640" y="365760"/>
+            <a:ext cx="11094415" cy="640080"/>
+          </a:xfrm>
+          <a:prstGeom prst="rect">
+            <a:avLst/>
+          </a:prstGeom>
+          <a:noFill/>
+          <a:ln/>
+        </p:spPr>
+        <p:txBody>
+          <a:bodyPr wrap="square" lIns="0" tIns="0" rIns="0" bIns="0" rtlCol="0" anchor="ctr"/>
+          <a:lstStyle/>
+          <a:p>
+            <a:pPr algn="l" indent="0" marL="0">
+              <a:buNone/>
+            </a:pPr>
+            <a:r>
+              <a:rPr lang="en-US" sz="2700" b="1" dirty="0">
+                <a:solidFill>
+                  <a:srgbClr val="0F172A"/>
+                </a:solidFill>
+                <a:latin typeface="Microsoft JhengHei" pitchFamily="34" charset="0"/>
+                <a:ea typeface="Microsoft JhengHei" pitchFamily="34" charset="-122"/>
+                <a:cs typeface="Microsoft JhengHei" pitchFamily="34" charset="-120"/>
+              </a:rPr>
+              <a:t>一張表看懂五種方法的差異</a:t>
+            </a:r>
+            <a:endParaRPr lang="en-US" sz="2700" dirty="0"/>
+          </a:p>
+        </p:txBody>
+      </p:sp>
+      <p:sp>
+        <p:nvSpPr>
+          <p:cNvPr id="3" name="Text 1"/>
+          <p:cNvSpPr txBox="1"/>
+          <p:nvPr/>
+        </p:nvSpPr>
+        <p:spPr>
+          <a:xfrm>
+            <a:off x="548640" y="960120"/>
+            <a:ext cx="11094415" cy="502920"/>
+          </a:xfrm>
+          <a:prstGeom prst="rect">
+            <a:avLst/>
+          </a:prstGeom>
+          <a:noFill/>
+          <a:ln/>
+        </p:spPr>
+        <p:txBody>
+          <a:bodyPr wrap="square" lIns="0" tIns="0" rIns="0" bIns="0" rtlCol="0" anchor="ctr"/>
+          <a:lstStyle/>
+          <a:p>
+            <a:pPr algn="l" indent="0" marL="0">
+              <a:lnSpc>
+                <a:spcPct val="115000"/>
+              </a:lnSpc>
+              <a:buNone/>
+            </a:pPr>
+            <a:r>
+              <a:rPr lang="en-US" sz="1350" dirty="0">
+                <a:solidFill>
+                  <a:srgbClr val="64748B"/>
+                </a:solidFill>
+                <a:latin typeface="Microsoft JhengHei" pitchFamily="34" charset="0"/>
+                <a:ea typeface="Microsoft JhengHei" pitchFamily="34" charset="-122"/>
+                <a:cs typeface="Microsoft JhengHei" pitchFamily="34" charset="-120"/>
+              </a:rPr>
+              <a:t>簡化對比，更多細節在完整版報告</a:t>
+            </a:r>
+            <a:endParaRPr lang="en-US" sz="1350" dirty="0"/>
+          </a:p>
+        </p:txBody>
+      </p:sp>
+      <p:graphicFrame>
+        <p:nvGraphicFramePr>
+          <p:cNvPr id="9" name="Table 0"/>
           <p:cNvGraphicFramePr>
             <a:graphicFrameLocks noGrp="1"/>
           </p:cNvGraphicFramePr>
@@ -12058,7 +14849,7 @@
                             <a:srgbClr val="334155"/>
                           </a:solidFill>
                         </a:rPr>
-                        <a:t>賭價格的「保費」</a:t>
+                        <a:t>猜價格的「獎金」</a:t>
                       </a:r>
                       <a:endParaRPr lang="en-US" sz="1050" dirty="0"/>
                     </a:p>
@@ -12119,7 +14910,7 @@
                             <a:srgbClr val="334155"/>
                           </a:solidFill>
                         </a:rPr>
-                        <a:t>會，可能大跌</a:t>
+                        <a:t>會，猜錯先變少</a:t>
                       </a:r>
                       <a:endParaRPr lang="en-US" sz="1050" dirty="0"/>
                     </a:p>
@@ -12365,7 +15156,7 @@
                             <a:srgbClr val="334155"/>
                           </a:solidFill>
                         </a:rPr>
-                        <a:t>賭價格的「保費」</a:t>
+                        <a:t>猜價格的「獎金」</a:t>
                       </a:r>
                       <a:endParaRPr lang="en-US" sz="1050" dirty="0"/>
                     </a:p>
@@ -12426,7 +15217,7 @@
                             <a:srgbClr val="334155"/>
                           </a:solidFill>
                         </a:rPr>
-                        <a:t>會，可能大跌</a:t>
+                        <a:t>會，猜錯先變少</a:t>
                       </a:r>
                       <a:endParaRPr lang="en-US" sz="1050" dirty="0"/>
                     </a:p>
@@ -12670,7 +15461,7 @@
                 <a:ea typeface="Microsoft JhengHei" pitchFamily="34" charset="-122"/>
                 <a:cs typeface="Microsoft JhengHei" pitchFamily="34" charset="-120"/>
               </a:rPr>
-              <a:t>簡單說：①②③賺的是「利息」，本金不會因為比特幣漲跌而變少；④⑤賺的是「賭對價格的獎金」，本金可能因為賭錯而實際變少。</a:t>
+              <a:t>簡單說：①②③賺的是「利息」，本金不會因為比特幣漲跌而變少；④⑤賺的是「猜對價格的獎金」，猜錯本金會暫時變少，但只要照第7頁的紀律操作，一年下來變少的機率可以壓到約2成。</a:t>
             </a:r>
             <a:endParaRPr lang="en-US" sz="1200" dirty="0"/>
           </a:p>
@@ -12748,444 +15539,7 @@
                 <a:ea typeface="Microsoft JhengHei" pitchFamily="34" charset="-122"/>
                 <a:cs typeface="Microsoft JhengHei" pitchFamily="34" charset="-120"/>
               </a:rPr>
-              <a:t>7 / 11</a:t>
-            </a:r>
-            <a:endParaRPr lang="en-US" sz="900" dirty="0"/>
-          </a:p>
-        </p:txBody>
-      </p:sp>
-    </p:spTree>
-  </p:cSld>
-  <p:clrMapOvr>
-    <a:masterClrMapping/>
-  </p:clrMapOvr>
-</p:sld>
-</file>
-
-<file path=ppt/slides/slide8.xml><?xml version="1.0" encoding="utf-8"?>
-<p:sld xmlns:a="http://schemas.openxmlformats.org/drawingml/2006/main" xmlns:r="http://schemas.openxmlformats.org/officeDocument/2006/relationships" xmlns:p="http://schemas.openxmlformats.org/presentationml/2006/main">
-  <p:cSld name="Slide 8">
-    <p:bg>
-      <p:bgPr>
-        <a:solidFill>
-          <a:srgbClr val="FFFFFF"/>
-        </a:solidFill>
-      </p:bgPr>
-    </p:bg>
-    <p:spTree>
-      <p:nvGrpSpPr>
-        <p:cNvPr id="1" name=""/>
-        <p:cNvGrpSpPr/>
-        <p:nvPr/>
-      </p:nvGrpSpPr>
-      <p:grpSpPr>
-        <a:xfrm>
-          <a:off x="0" y="0"/>
-          <a:ext cx="0" cy="0"/>
-          <a:chOff x="0" y="0"/>
-          <a:chExt cx="0" cy="0"/>
-        </a:xfrm>
-      </p:grpSpPr>
-      <p:sp>
-        <p:nvSpPr>
-          <p:cNvPr id="2" name="Text 0"/>
-          <p:cNvSpPr txBox="1"/>
-          <p:nvPr/>
-        </p:nvSpPr>
-        <p:spPr>
-          <a:xfrm>
-            <a:off x="548640" y="365760"/>
-            <a:ext cx="11094415" cy="640080"/>
-          </a:xfrm>
-          <a:prstGeom prst="rect">
-            <a:avLst/>
-          </a:prstGeom>
-          <a:noFill/>
-          <a:ln/>
-        </p:spPr>
-        <p:txBody>
-          <a:bodyPr wrap="square" lIns="0" tIns="0" rIns="0" bIns="0" rtlCol="0" anchor="ctr"/>
-          <a:lstStyle/>
-          <a:p>
-            <a:pPr algn="l" indent="0" marL="0">
-              <a:buNone/>
-            </a:pPr>
-            <a:r>
-              <a:rPr lang="en-US" sz="2700" b="1" dirty="0">
-                <a:solidFill>
-                  <a:srgbClr val="0F172A"/>
-                </a:solidFill>
-                <a:latin typeface="Microsoft JhengHei" pitchFamily="34" charset="0"/>
-                <a:ea typeface="Microsoft JhengHei" pitchFamily="34" charset="-122"/>
-                <a:cs typeface="Microsoft JhengHei" pitchFamily="34" charset="-120"/>
-              </a:rPr>
-              <a:t>如果 NT$500 萬全部投入某一種方法，一年大概賺多少？</a:t>
-            </a:r>
-            <a:endParaRPr lang="en-US" sz="2700" dirty="0"/>
-          </a:p>
-        </p:txBody>
-      </p:sp>
-      <p:sp>
-        <p:nvSpPr>
-          <p:cNvPr id="3" name="Text 1"/>
-          <p:cNvSpPr txBox="1"/>
-          <p:nvPr/>
-        </p:nvSpPr>
-        <p:spPr>
-          <a:xfrm>
-            <a:off x="548640" y="960120"/>
-            <a:ext cx="11094415" cy="502920"/>
-          </a:xfrm>
-          <a:prstGeom prst="rect">
-            <a:avLst/>
-          </a:prstGeom>
-          <a:noFill/>
-          <a:ln/>
-        </p:spPr>
-        <p:txBody>
-          <a:bodyPr wrap="square" lIns="0" tIns="0" rIns="0" bIns="0" rtlCol="0" anchor="ctr"/>
-          <a:lstStyle/>
-          <a:p>
-            <a:pPr algn="l" indent="0" marL="0">
-              <a:lnSpc>
-                <a:spcPct val="115000"/>
-              </a:lnSpc>
-              <a:buNone/>
-            </a:pPr>
-            <a:r>
-              <a:rPr lang="en-US" sz="1350" dirty="0">
-                <a:solidFill>
-                  <a:srgbClr val="64748B"/>
-                </a:solidFill>
-                <a:latin typeface="Microsoft JhengHei" pitchFamily="34" charset="0"/>
-                <a:ea typeface="Microsoft JhengHei" pitchFamily="34" charset="-122"/>
-                <a:cs typeface="Microsoft JhengHei" pitchFamily="34" charset="-120"/>
-              </a:rPr>
-              <a:t>以「基準情境」試算，僅供比較用，非投資建議</a:t>
-            </a:r>
-            <a:endParaRPr lang="en-US" sz="1350" dirty="0"/>
-          </a:p>
-        </p:txBody>
-      </p:sp>
-      <p:graphicFrame>
-        <p:nvGraphicFramePr>
-          <p:cNvPr id="4" name="Chart 0" descr=""/>
-          <p:cNvGraphicFramePr/>
-          <p:nvPr/>
-        </p:nvGraphicFramePr>
-        <p:xfrm>
-          <a:off x="548640" y="1554480"/>
-          <a:ext cx="7498080" cy="3840480"/>
-        </p:xfrm>
-        <a:graphic xmlns:a="http://schemas.openxmlformats.org/drawingml/2006/main">
-          <a:graphicData uri="http://schemas.openxmlformats.org/drawingml/2006/chart">
-            <c:chart xmlns:c="http://schemas.openxmlformats.org/drawingml/2006/chart" r:id="rId1"/>
-          </a:graphicData>
-        </a:graphic>
-      </p:graphicFrame>
-      <p:sp>
-        <p:nvSpPr>
-          <p:cNvPr id="5" name="Shape 2"/>
-          <p:cNvSpPr/>
-          <p:nvPr/>
-        </p:nvSpPr>
-        <p:spPr>
-          <a:xfrm>
-            <a:off x="8229600" y="1554480"/>
-            <a:ext cx="3410712" cy="1828800"/>
-          </a:xfrm>
-          <a:prstGeom prst="roundRect">
-            <a:avLst>
-              <a:gd name="adj" fmla="val 4000"/>
-            </a:avLst>
-          </a:prstGeom>
-          <a:solidFill>
-            <a:srgbClr val="EFF6FF"/>
-          </a:solidFill>
-          <a:ln w="9525">
-            <a:solidFill>
-              <a:srgbClr val="E2E8F0"/>
-            </a:solidFill>
-            <a:prstDash val="solid"/>
-          </a:ln>
-          <a:effectLst>
-            <a:outerShdw sx="100000" sy="100000" kx="0" ky="0" algn="bl" rotWithShape="0" blurRad="76200" dist="25400" dir="5400000">
-              <a:srgbClr val="1E293B">
-                <a:alpha val="8000"/>
-              </a:srgbClr>
-            </a:outerShdw>
-          </a:effectLst>
-        </p:spPr>
-      </p:sp>
-      <p:sp>
-        <p:nvSpPr>
-          <p:cNvPr id="6" name="Text 3"/>
-          <p:cNvSpPr txBox="1"/>
-          <p:nvPr/>
-        </p:nvSpPr>
-        <p:spPr>
-          <a:xfrm>
-            <a:off x="8430768" y="1700784"/>
-            <a:ext cx="3008376" cy="365760"/>
-          </a:xfrm>
-          <a:prstGeom prst="rect">
-            <a:avLst/>
-          </a:prstGeom>
-          <a:noFill/>
-          <a:ln/>
-        </p:spPr>
-        <p:txBody>
-          <a:bodyPr wrap="square" lIns="0" tIns="0" rIns="0" bIns="0" rtlCol="0" anchor="ctr"/>
-          <a:lstStyle/>
-          <a:p>
-            <a:pPr algn="l" indent="0" marL="0">
-              <a:buNone/>
-            </a:pPr>
-            <a:r>
-              <a:rPr lang="en-US" sz="1350" b="1" dirty="0">
-                <a:solidFill>
-                  <a:srgbClr val="0F172A"/>
-                </a:solidFill>
-                <a:latin typeface="Microsoft JhengHei" pitchFamily="34" charset="0"/>
-                <a:ea typeface="Microsoft JhengHei" pitchFamily="34" charset="-122"/>
-                <a:cs typeface="Microsoft JhengHei" pitchFamily="34" charset="-120"/>
-              </a:rPr>
-              <a:t>為什麼④⑤特別高？</a:t>
-            </a:r>
-            <a:endParaRPr lang="en-US" sz="1350" dirty="0"/>
-          </a:p>
-        </p:txBody>
-      </p:sp>
-      <p:sp>
-        <p:nvSpPr>
-          <p:cNvPr id="7" name="Text 4"/>
-          <p:cNvSpPr txBox="1"/>
-          <p:nvPr/>
-        </p:nvSpPr>
-        <p:spPr>
-          <a:xfrm>
-            <a:off x="8430768" y="2084832"/>
-            <a:ext cx="3008376" cy="1133856"/>
-          </a:xfrm>
-          <a:prstGeom prst="rect">
-            <a:avLst/>
-          </a:prstGeom>
-          <a:noFill/>
-          <a:ln/>
-        </p:spPr>
-        <p:txBody>
-          <a:bodyPr wrap="square" lIns="0" tIns="0" rIns="0" bIns="0" rtlCol="0" anchor="t"/>
-          <a:lstStyle/>
-          <a:p>
-            <a:pPr algn="l" indent="0" marL="0">
-              <a:lnSpc>
-                <a:spcPct val="125000"/>
-              </a:lnSpc>
-              <a:buNone/>
-            </a:pPr>
-            <a:r>
-              <a:rPr lang="en-US" sz="1100" dirty="0">
-                <a:solidFill>
-                  <a:srgbClr val="334155"/>
-                </a:solidFill>
-                <a:latin typeface="Microsoft JhengHei" pitchFamily="34" charset="0"/>
-                <a:ea typeface="Microsoft JhengHei" pitchFamily="34" charset="-122"/>
-                <a:cs typeface="Microsoft JhengHei" pitchFamily="34" charset="-120"/>
-              </a:rPr>
-              <a:t>雙幣理財的「45%」是「沒有賭錯」的最佳情況，並未反映賭錯時可能虧損 20% 以上的情形——數字看起來漂亮，但風險也最高，不能只看這張圖的高度做決定。</a:t>
-            </a:r>
-            <a:endParaRPr lang="en-US" sz="1100" dirty="0"/>
-          </a:p>
-        </p:txBody>
-      </p:sp>
-      <p:sp>
-        <p:nvSpPr>
-          <p:cNvPr id="8" name="Shape 5"/>
-          <p:cNvSpPr/>
-          <p:nvPr/>
-        </p:nvSpPr>
-        <p:spPr>
-          <a:xfrm>
-            <a:off x="8229600" y="3520440"/>
-            <a:ext cx="3410712" cy="1874520"/>
-          </a:xfrm>
-          <a:prstGeom prst="roundRect">
-            <a:avLst>
-              <a:gd name="adj" fmla="val 3902"/>
-            </a:avLst>
-          </a:prstGeom>
-          <a:solidFill>
-            <a:srgbClr val="F8FAFC"/>
-          </a:solidFill>
-          <a:ln w="9525">
-            <a:solidFill>
-              <a:srgbClr val="E2E8F0"/>
-            </a:solidFill>
-            <a:prstDash val="solid"/>
-          </a:ln>
-          <a:effectLst>
-            <a:outerShdw sx="100000" sy="100000" kx="0" ky="0" algn="bl" rotWithShape="0" blurRad="76200" dist="25400" dir="5400000">
-              <a:srgbClr val="1E293B">
-                <a:alpha val="8000"/>
-              </a:srgbClr>
-            </a:outerShdw>
-          </a:effectLst>
-        </p:spPr>
-      </p:sp>
-      <p:sp>
-        <p:nvSpPr>
-          <p:cNvPr id="9" name="Text 6"/>
-          <p:cNvSpPr txBox="1"/>
-          <p:nvPr/>
-        </p:nvSpPr>
-        <p:spPr>
-          <a:xfrm>
-            <a:off x="8430768" y="3666744"/>
-            <a:ext cx="3008376" cy="365760"/>
-          </a:xfrm>
-          <a:prstGeom prst="rect">
-            <a:avLst/>
-          </a:prstGeom>
-          <a:noFill/>
-          <a:ln/>
-        </p:spPr>
-        <p:txBody>
-          <a:bodyPr wrap="square" lIns="0" tIns="0" rIns="0" bIns="0" rtlCol="0" anchor="ctr"/>
-          <a:lstStyle/>
-          <a:p>
-            <a:pPr algn="l" indent="0" marL="0">
-              <a:buNone/>
-            </a:pPr>
-            <a:r>
-              <a:rPr lang="en-US" sz="1350" b="1" dirty="0">
-                <a:solidFill>
-                  <a:srgbClr val="0F172A"/>
-                </a:solidFill>
-                <a:latin typeface="Microsoft JhengHei" pitchFamily="34" charset="0"/>
-                <a:ea typeface="Microsoft JhengHei" pitchFamily="34" charset="-122"/>
-                <a:cs typeface="Microsoft JhengHei" pitchFamily="34" charset="-120"/>
-              </a:rPr>
-              <a:t>務實的看法</a:t>
-            </a:r>
-            <a:endParaRPr lang="en-US" sz="1350" dirty="0"/>
-          </a:p>
-        </p:txBody>
-      </p:sp>
-      <p:sp>
-        <p:nvSpPr>
-          <p:cNvPr id="10" name="Text 7"/>
-          <p:cNvSpPr txBox="1"/>
-          <p:nvPr/>
-        </p:nvSpPr>
-        <p:spPr>
-          <a:xfrm>
-            <a:off x="8430768" y="4050792"/>
-            <a:ext cx="3008376" cy="1179576"/>
-          </a:xfrm>
-          <a:prstGeom prst="rect">
-            <a:avLst/>
-          </a:prstGeom>
-          <a:noFill/>
-          <a:ln/>
-        </p:spPr>
-        <p:txBody>
-          <a:bodyPr wrap="square" lIns="0" tIns="0" rIns="0" bIns="0" rtlCol="0" anchor="t"/>
-          <a:lstStyle/>
-          <a:p>
-            <a:pPr algn="l" indent="0" marL="0">
-              <a:lnSpc>
-                <a:spcPct val="125000"/>
-              </a:lnSpc>
-              <a:buNone/>
-            </a:pPr>
-            <a:r>
-              <a:rPr lang="en-US" sz="1150" dirty="0">
-                <a:solidFill>
-                  <a:srgbClr val="334155"/>
-                </a:solidFill>
-                <a:latin typeface="Microsoft JhengHei" pitchFamily="34" charset="0"/>
-                <a:ea typeface="Microsoft JhengHei" pitchFamily="34" charset="-122"/>
-                <a:cs typeface="Microsoft JhengHei" pitchFamily="34" charset="-120"/>
-              </a:rPr>
-              <a:t>①Bitfinex 出借在「不賭價格」的前提下，一年約 NT$51 萬，是五種方法中「報酬與安全」平衡最好的選項。</a:t>
-            </a:r>
-            <a:endParaRPr lang="en-US" sz="1150" dirty="0"/>
-          </a:p>
-        </p:txBody>
-      </p:sp>
-      <p:sp>
-        <p:nvSpPr>
-          <p:cNvPr id="11" name="Text 8"/>
-          <p:cNvSpPr txBox="1"/>
-          <p:nvPr/>
-        </p:nvSpPr>
-        <p:spPr>
-          <a:xfrm>
-            <a:off x="457200" y="6492240"/>
-            <a:ext cx="5486400" cy="274320"/>
-          </a:xfrm>
-          <a:prstGeom prst="rect">
-            <a:avLst/>
-          </a:prstGeom>
-          <a:noFill/>
-          <a:ln/>
-        </p:spPr>
-        <p:txBody>
-          <a:bodyPr wrap="square" lIns="0" tIns="0" rIns="0" bIns="0" rtlCol="0" anchor="ctr"/>
-          <a:lstStyle/>
-          <a:p>
-            <a:pPr indent="0" marL="0">
-              <a:buNone/>
-            </a:pPr>
-            <a:r>
-              <a:rPr lang="en-US" sz="900" dirty="0">
-                <a:solidFill>
-                  <a:srgbClr val="64748B"/>
-                </a:solidFill>
-                <a:latin typeface="Microsoft JhengHei" pitchFamily="34" charset="0"/>
-                <a:ea typeface="Microsoft JhengHei" pitchFamily="34" charset="-122"/>
-                <a:cs typeface="Microsoft JhengHei" pitchFamily="34" charset="-120"/>
-              </a:rPr>
-              <a:t>TSGEX 資產管理部｜內部機密｜簡明版</a:t>
-            </a:r>
-            <a:endParaRPr lang="en-US" sz="900" dirty="0"/>
-          </a:p>
-        </p:txBody>
-      </p:sp>
-      <p:sp>
-        <p:nvSpPr>
-          <p:cNvPr id="12" name="Text 9"/>
-          <p:cNvSpPr txBox="1"/>
-          <p:nvPr/>
-        </p:nvSpPr>
-        <p:spPr>
-          <a:xfrm>
-            <a:off x="9905695" y="6492240"/>
-            <a:ext cx="1828800" cy="274320"/>
-          </a:xfrm>
-          <a:prstGeom prst="rect">
-            <a:avLst/>
-          </a:prstGeom>
-          <a:noFill/>
-          <a:ln/>
-        </p:spPr>
-        <p:txBody>
-          <a:bodyPr wrap="square" lIns="0" tIns="0" rIns="0" bIns="0" rtlCol="0" anchor="ctr"/>
-          <a:lstStyle/>
-          <a:p>
-            <a:pPr algn="r" indent="0" marL="0">
-              <a:buNone/>
-            </a:pPr>
-            <a:r>
-              <a:rPr lang="en-US" sz="900" dirty="0">
-                <a:solidFill>
-                  <a:srgbClr val="64748B"/>
-                </a:solidFill>
-                <a:latin typeface="Microsoft JhengHei" pitchFamily="34" charset="0"/>
-                <a:ea typeface="Microsoft JhengHei" pitchFamily="34" charset="-122"/>
-                <a:cs typeface="Microsoft JhengHei" pitchFamily="34" charset="-120"/>
-              </a:rPr>
-              <a:t>8 / 11</a:t>
+              <a:t>8 / 12</a:t>
             </a:r>
             <a:endParaRPr lang="en-US" sz="900" dirty="0"/>
           </a:p>
@@ -13256,7 +15610,7 @@
                 <a:ea typeface="Microsoft JhengHei" pitchFamily="34" charset="-122"/>
                 <a:cs typeface="Microsoft JhengHei" pitchFamily="34" charset="-120"/>
               </a:rPr>
-              <a:t>建議怎麼分配？三種組合方案</a:t>
+              <a:t>如果 NT$500 萬全部投入某一種方法，一年大概賺多少？</a:t>
             </a:r>
             <a:endParaRPr lang="en-US" sz="2700" dirty="0"/>
           </a:p>
@@ -13298,7 +15652,7 @@
                 <a:ea typeface="Microsoft JhengHei" pitchFamily="34" charset="-122"/>
                 <a:cs typeface="Microsoft JhengHei" pitchFamily="34" charset="-120"/>
               </a:rPr>
-              <a:t>NT$500萬，依「求穩」到「求高報酬」排列</a:t>
+              <a:t>以「基準情境」試算，僅供比較用，非投資建議</a:t>
             </a:r>
             <a:endParaRPr lang="en-US" sz="1350" dirty="0"/>
           </a:p>
@@ -13311,8 +15665,8 @@
           <p:nvPr/>
         </p:nvGraphicFramePr>
         <p:xfrm>
-          <a:off x="548640" y="1508760"/>
-          <a:ext cx="5394960" cy="3017520"/>
+          <a:off x="548640" y="1554480"/>
+          <a:ext cx="7498080" cy="3840480"/>
         </p:xfrm>
         <a:graphic xmlns:a="http://schemas.openxmlformats.org/drawingml/2006/main">
           <a:graphicData uri="http://schemas.openxmlformats.org/drawingml/2006/chart">
@@ -13320,1281 +15674,20 @@
           </a:graphicData>
         </a:graphic>
       </p:graphicFrame>
-      <p:graphicFrame>
-        <p:nvGraphicFramePr>
-          <p:cNvPr id="10" name="Table 0"/>
-          <p:cNvGraphicFramePr>
-            <a:graphicFrameLocks noGrp="1"/>
-          </p:cNvGraphicFramePr>
-          <p:nvPr>
-            <p:extLst>
-              <p:ext uri="{D42A27DB-BD31-4B8C-83A1-F6EECF244321}">
-                <p14:modId xmlns:p14="http://schemas.microsoft.com/office/powerpoint/2010/main" val="1579011935"/>
-              </p:ext>
-            </p:extLst>
-          </p:nvPr>
-        </p:nvGraphicFramePr>
-        <p:xfrm>
-          <a:off x="6172200" y="1508760"/>
-          <a:ext cx="5468112" cy="914400"/>
-        </p:xfrm>
-        <a:graphic>
-          <a:graphicData uri="http://schemas.openxmlformats.org/drawingml/2006/table">
-            <a:tbl>
-              <a:tblPr/>
-              <a:tblGrid>
-                <a:gridCol w="1417320"/>
-                <a:gridCol w="1051560"/>
-                <a:gridCol w="1188720"/>
-                <a:gridCol w="1051560"/>
-                <a:gridCol w="758952"/>
-              </a:tblGrid>
-              <a:tr h="548640">
-                <a:tc>
-                  <a:txBody>
-                    <a:bodyPr/>
-                    <a:lstStyle/>
-                    <a:p>
-                      <a:pPr algn="ctr" indent="0" marL="0">
-                        <a:buNone/>
-                      </a:pPr>
-                      <a:r>
-                        <a:rPr lang="en-US" sz="1000" b="1" dirty="0">
-                          <a:solidFill>
-                            <a:srgbClr val="FFFFFF"/>
-                          </a:solidFill>
-                        </a:rPr>
-                        <a:t>方案</a:t>
-                      </a:r>
-                      <a:endParaRPr lang="en-US" sz="1000" dirty="0"/>
-                    </a:p>
-                  </a:txBody>
-                  <a:tcPr marL="73152" marR="73152" marT="54864" marB="54864" anchor="ctr">
-                    <a:lnL w="9525" cap="flat" cmpd="sng" algn="ctr">
-                      <a:solidFill>
-                        <a:srgbClr val="E2E8F0"/>
-                      </a:solidFill>
-                      <a:prstDash val="solid"/>
-                      <a:round/>
-                      <a:headEnd type="none" w="med" len="med"/>
-                      <a:tailEnd type="none" w="med" len="med"/>
-                    </a:lnL>
-                    <a:lnR w="9525" cap="flat" cmpd="sng" algn="ctr">
-                      <a:solidFill>
-                        <a:srgbClr val="E2E8F0"/>
-                      </a:solidFill>
-                      <a:prstDash val="solid"/>
-                      <a:round/>
-                      <a:headEnd type="none" w="med" len="med"/>
-                      <a:tailEnd type="none" w="med" len="med"/>
-                    </a:lnR>
-                    <a:lnT w="9525" cap="flat" cmpd="sng" algn="ctr">
-                      <a:solidFill>
-                        <a:srgbClr val="E2E8F0"/>
-                      </a:solidFill>
-                      <a:prstDash val="solid"/>
-                      <a:round/>
-                      <a:headEnd type="none" w="med" len="med"/>
-                      <a:tailEnd type="none" w="med" len="med"/>
-                    </a:lnT>
-                    <a:lnB w="9525" cap="flat" cmpd="sng" algn="ctr">
-                      <a:solidFill>
-                        <a:srgbClr val="E2E8F0"/>
-                      </a:solidFill>
-                      <a:prstDash val="solid"/>
-                      <a:round/>
-                      <a:headEnd type="none" w="med" len="med"/>
-                      <a:tailEnd type="none" w="med" len="med"/>
-                    </a:lnB>
-                    <a:solidFill>
-                      <a:srgbClr val="0F172A"/>
-                    </a:solidFill>
-                  </a:tcPr>
-                </a:tc>
-                <a:tc>
-                  <a:txBody>
-                    <a:bodyPr/>
-                    <a:lstStyle/>
-                    <a:p>
-                      <a:pPr algn="ctr" indent="0" marL="0">
-                        <a:buNone/>
-                      </a:pPr>
-                      <a:r>
-                        <a:rPr lang="en-US" sz="1000" b="1" dirty="0">
-                          <a:solidFill>
-                            <a:srgbClr val="FFFFFF"/>
-                          </a:solidFill>
-                        </a:rPr>
-                        <a:t>①出借</a:t>
-                      </a:r>
-                      <a:endParaRPr lang="en-US" sz="1000" dirty="0"/>
-                    </a:p>
-                  </a:txBody>
-                  <a:tcPr marL="73152" marR="73152" marT="54864" marB="54864" anchor="ctr">
-                    <a:lnL w="9525" cap="flat" cmpd="sng" algn="ctr">
-                      <a:solidFill>
-                        <a:srgbClr val="E2E8F0"/>
-                      </a:solidFill>
-                      <a:prstDash val="solid"/>
-                      <a:round/>
-                      <a:headEnd type="none" w="med" len="med"/>
-                      <a:tailEnd type="none" w="med" len="med"/>
-                    </a:lnL>
-                    <a:lnR w="9525" cap="flat" cmpd="sng" algn="ctr">
-                      <a:solidFill>
-                        <a:srgbClr val="E2E8F0"/>
-                      </a:solidFill>
-                      <a:prstDash val="solid"/>
-                      <a:round/>
-                      <a:headEnd type="none" w="med" len="med"/>
-                      <a:tailEnd type="none" w="med" len="med"/>
-                    </a:lnR>
-                    <a:lnT w="9525" cap="flat" cmpd="sng" algn="ctr">
-                      <a:solidFill>
-                        <a:srgbClr val="E2E8F0"/>
-                      </a:solidFill>
-                      <a:prstDash val="solid"/>
-                      <a:round/>
-                      <a:headEnd type="none" w="med" len="med"/>
-                      <a:tailEnd type="none" w="med" len="med"/>
-                    </a:lnT>
-                    <a:lnB w="9525" cap="flat" cmpd="sng" algn="ctr">
-                      <a:solidFill>
-                        <a:srgbClr val="E2E8F0"/>
-                      </a:solidFill>
-                      <a:prstDash val="solid"/>
-                      <a:round/>
-                      <a:headEnd type="none" w="med" len="med"/>
-                      <a:tailEnd type="none" w="med" len="med"/>
-                    </a:lnB>
-                    <a:solidFill>
-                      <a:srgbClr val="0F172A"/>
-                    </a:solidFill>
-                  </a:tcPr>
-                </a:tc>
-                <a:tc>
-                  <a:txBody>
-                    <a:bodyPr/>
-                    <a:lstStyle/>
-                    <a:p>
-                      <a:pPr algn="ctr" indent="0" marL="0">
-                        <a:buNone/>
-                      </a:pPr>
-                      <a:r>
-                        <a:rPr lang="en-US" sz="1000" b="1" dirty="0">
-                          <a:solidFill>
-                            <a:srgbClr val="FFFFFF"/>
-                          </a:solidFill>
-                        </a:rPr>
-                        <a:t>②③活期</a:t>
-                      </a:r>
-                      <a:endParaRPr lang="en-US" sz="1000" dirty="0"/>
-                    </a:p>
-                  </a:txBody>
-                  <a:tcPr marL="73152" marR="73152" marT="54864" marB="54864" anchor="ctr">
-                    <a:lnL w="9525" cap="flat" cmpd="sng" algn="ctr">
-                      <a:solidFill>
-                        <a:srgbClr val="E2E8F0"/>
-                      </a:solidFill>
-                      <a:prstDash val="solid"/>
-                      <a:round/>
-                      <a:headEnd type="none" w="med" len="med"/>
-                      <a:tailEnd type="none" w="med" len="med"/>
-                    </a:lnL>
-                    <a:lnR w="9525" cap="flat" cmpd="sng" algn="ctr">
-                      <a:solidFill>
-                        <a:srgbClr val="E2E8F0"/>
-                      </a:solidFill>
-                      <a:prstDash val="solid"/>
-                      <a:round/>
-                      <a:headEnd type="none" w="med" len="med"/>
-                      <a:tailEnd type="none" w="med" len="med"/>
-                    </a:lnR>
-                    <a:lnT w="9525" cap="flat" cmpd="sng" algn="ctr">
-                      <a:solidFill>
-                        <a:srgbClr val="E2E8F0"/>
-                      </a:solidFill>
-                      <a:prstDash val="solid"/>
-                      <a:round/>
-                      <a:headEnd type="none" w="med" len="med"/>
-                      <a:tailEnd type="none" w="med" len="med"/>
-                    </a:lnT>
-                    <a:lnB w="9525" cap="flat" cmpd="sng" algn="ctr">
-                      <a:solidFill>
-                        <a:srgbClr val="E2E8F0"/>
-                      </a:solidFill>
-                      <a:prstDash val="solid"/>
-                      <a:round/>
-                      <a:headEnd type="none" w="med" len="med"/>
-                      <a:tailEnd type="none" w="med" len="med"/>
-                    </a:lnB>
-                    <a:solidFill>
-                      <a:srgbClr val="0F172A"/>
-                    </a:solidFill>
-                  </a:tcPr>
-                </a:tc>
-                <a:tc>
-                  <a:txBody>
-                    <a:bodyPr/>
-                    <a:lstStyle/>
-                    <a:p>
-                      <a:pPr algn="ctr" indent="0" marL="0">
-                        <a:buNone/>
-                      </a:pPr>
-                      <a:r>
-                        <a:rPr lang="en-US" sz="1000" b="1" dirty="0">
-                          <a:solidFill>
-                            <a:srgbClr val="FFFFFF"/>
-                          </a:solidFill>
-                        </a:rPr>
-                        <a:t>④⑤雙幣</a:t>
-                      </a:r>
-                      <a:endParaRPr lang="en-US" sz="1000" dirty="0"/>
-                    </a:p>
-                  </a:txBody>
-                  <a:tcPr marL="73152" marR="73152" marT="54864" marB="54864" anchor="ctr">
-                    <a:lnL w="9525" cap="flat" cmpd="sng" algn="ctr">
-                      <a:solidFill>
-                        <a:srgbClr val="E2E8F0"/>
-                      </a:solidFill>
-                      <a:prstDash val="solid"/>
-                      <a:round/>
-                      <a:headEnd type="none" w="med" len="med"/>
-                      <a:tailEnd type="none" w="med" len="med"/>
-                    </a:lnL>
-                    <a:lnR w="9525" cap="flat" cmpd="sng" algn="ctr">
-                      <a:solidFill>
-                        <a:srgbClr val="E2E8F0"/>
-                      </a:solidFill>
-                      <a:prstDash val="solid"/>
-                      <a:round/>
-                      <a:headEnd type="none" w="med" len="med"/>
-                      <a:tailEnd type="none" w="med" len="med"/>
-                    </a:lnR>
-                    <a:lnT w="9525" cap="flat" cmpd="sng" algn="ctr">
-                      <a:solidFill>
-                        <a:srgbClr val="E2E8F0"/>
-                      </a:solidFill>
-                      <a:prstDash val="solid"/>
-                      <a:round/>
-                      <a:headEnd type="none" w="med" len="med"/>
-                      <a:tailEnd type="none" w="med" len="med"/>
-                    </a:lnT>
-                    <a:lnB w="9525" cap="flat" cmpd="sng" algn="ctr">
-                      <a:solidFill>
-                        <a:srgbClr val="E2E8F0"/>
-                      </a:solidFill>
-                      <a:prstDash val="solid"/>
-                      <a:round/>
-                      <a:headEnd type="none" w="med" len="med"/>
-                      <a:tailEnd type="none" w="med" len="med"/>
-                    </a:lnB>
-                    <a:solidFill>
-                      <a:srgbClr val="0F172A"/>
-                    </a:solidFill>
-                  </a:tcPr>
-                </a:tc>
-                <a:tc>
-                  <a:txBody>
-                    <a:bodyPr/>
-                    <a:lstStyle/>
-                    <a:p>
-                      <a:pPr algn="ctr" indent="0" marL="0">
-                        <a:buNone/>
-                      </a:pPr>
-                      <a:r>
-                        <a:rPr lang="en-US" sz="1000" b="1" dirty="0">
-                          <a:solidFill>
-                            <a:srgbClr val="FFFFFF"/>
-                          </a:solidFill>
-                        </a:rPr>
-                        <a:t>一年預估獲利</a:t>
-                      </a:r>
-                      <a:endParaRPr lang="en-US" sz="1000" dirty="0"/>
-                    </a:p>
-                  </a:txBody>
-                  <a:tcPr marL="73152" marR="73152" marT="54864" marB="54864" anchor="ctr">
-                    <a:lnL w="9525" cap="flat" cmpd="sng" algn="ctr">
-                      <a:solidFill>
-                        <a:srgbClr val="E2E8F0"/>
-                      </a:solidFill>
-                      <a:prstDash val="solid"/>
-                      <a:round/>
-                      <a:headEnd type="none" w="med" len="med"/>
-                      <a:tailEnd type="none" w="med" len="med"/>
-                    </a:lnL>
-                    <a:lnR w="9525" cap="flat" cmpd="sng" algn="ctr">
-                      <a:solidFill>
-                        <a:srgbClr val="E2E8F0"/>
-                      </a:solidFill>
-                      <a:prstDash val="solid"/>
-                      <a:round/>
-                      <a:headEnd type="none" w="med" len="med"/>
-                      <a:tailEnd type="none" w="med" len="med"/>
-                    </a:lnR>
-                    <a:lnT w="9525" cap="flat" cmpd="sng" algn="ctr">
-                      <a:solidFill>
-                        <a:srgbClr val="E2E8F0"/>
-                      </a:solidFill>
-                      <a:prstDash val="solid"/>
-                      <a:round/>
-                      <a:headEnd type="none" w="med" len="med"/>
-                      <a:tailEnd type="none" w="med" len="med"/>
-                    </a:lnT>
-                    <a:lnB w="9525" cap="flat" cmpd="sng" algn="ctr">
-                      <a:solidFill>
-                        <a:srgbClr val="E2E8F0"/>
-                      </a:solidFill>
-                      <a:prstDash val="solid"/>
-                      <a:round/>
-                      <a:headEnd type="none" w="med" len="med"/>
-                      <a:tailEnd type="none" w="med" len="med"/>
-                    </a:lnB>
-                    <a:solidFill>
-                      <a:srgbClr val="0F172A"/>
-                    </a:solidFill>
-                  </a:tcPr>
-                </a:tc>
-              </a:tr>
-              <a:tr h="548640">
-                <a:tc>
-                  <a:txBody>
-                    <a:bodyPr/>
-                    <a:lstStyle/>
-                    <a:p>
-                      <a:pPr algn="ctr" indent="0" marL="0">
-                        <a:buNone/>
-                      </a:pPr>
-                      <a:r>
-                        <a:rPr lang="en-US" sz="1000" dirty="0">
-                          <a:solidFill>
-                            <a:srgbClr val="334155"/>
-                          </a:solidFill>
-                        </a:rPr>
-                        <a:t>A 求穩為主</a:t>
-                      </a:r>
-                      <a:endParaRPr lang="en-US" sz="1000" dirty="0"/>
-                    </a:p>
-                  </a:txBody>
-                  <a:tcPr marL="73152" marR="73152" marT="54864" marB="54864" anchor="ctr">
-                    <a:lnL w="9525" cap="flat" cmpd="sng" algn="ctr">
-                      <a:solidFill>
-                        <a:srgbClr val="E2E8F0"/>
-                      </a:solidFill>
-                      <a:prstDash val="solid"/>
-                      <a:round/>
-                      <a:headEnd type="none" w="med" len="med"/>
-                      <a:tailEnd type="none" w="med" len="med"/>
-                    </a:lnL>
-                    <a:lnR w="9525" cap="flat" cmpd="sng" algn="ctr">
-                      <a:solidFill>
-                        <a:srgbClr val="E2E8F0"/>
-                      </a:solidFill>
-                      <a:prstDash val="solid"/>
-                      <a:round/>
-                      <a:headEnd type="none" w="med" len="med"/>
-                      <a:tailEnd type="none" w="med" len="med"/>
-                    </a:lnR>
-                    <a:lnT w="9525" cap="flat" cmpd="sng" algn="ctr">
-                      <a:solidFill>
-                        <a:srgbClr val="E2E8F0"/>
-                      </a:solidFill>
-                      <a:prstDash val="solid"/>
-                      <a:round/>
-                      <a:headEnd type="none" w="med" len="med"/>
-                      <a:tailEnd type="none" w="med" len="med"/>
-                    </a:lnT>
-                    <a:lnB w="9525" cap="flat" cmpd="sng" algn="ctr">
-                      <a:solidFill>
-                        <a:srgbClr val="E2E8F0"/>
-                      </a:solidFill>
-                      <a:prstDash val="solid"/>
-                      <a:round/>
-                      <a:headEnd type="none" w="med" len="med"/>
-                      <a:tailEnd type="none" w="med" len="med"/>
-                    </a:lnB>
-                    <a:solidFill>
-                      <a:srgbClr val="FFFFFF"/>
-                    </a:solidFill>
-                  </a:tcPr>
-                </a:tc>
-                <a:tc>
-                  <a:txBody>
-                    <a:bodyPr/>
-                    <a:lstStyle/>
-                    <a:p>
-                      <a:pPr algn="ctr" indent="0" marL="0">
-                        <a:buNone/>
-                      </a:pPr>
-                      <a:r>
-                        <a:rPr lang="en-US" sz="1000" dirty="0">
-                          <a:solidFill>
-                            <a:srgbClr val="334155"/>
-                          </a:solidFill>
-                        </a:rPr>
-                        <a:t>70%</a:t>
-                      </a:r>
-                      <a:endParaRPr lang="en-US" sz="1000" dirty="0"/>
-                    </a:p>
-                  </a:txBody>
-                  <a:tcPr marL="73152" marR="73152" marT="54864" marB="54864" anchor="ctr">
-                    <a:lnL w="9525" cap="flat" cmpd="sng" algn="ctr">
-                      <a:solidFill>
-                        <a:srgbClr val="E2E8F0"/>
-                      </a:solidFill>
-                      <a:prstDash val="solid"/>
-                      <a:round/>
-                      <a:headEnd type="none" w="med" len="med"/>
-                      <a:tailEnd type="none" w="med" len="med"/>
-                    </a:lnL>
-                    <a:lnR w="9525" cap="flat" cmpd="sng" algn="ctr">
-                      <a:solidFill>
-                        <a:srgbClr val="E2E8F0"/>
-                      </a:solidFill>
-                      <a:prstDash val="solid"/>
-                      <a:round/>
-                      <a:headEnd type="none" w="med" len="med"/>
-                      <a:tailEnd type="none" w="med" len="med"/>
-                    </a:lnR>
-                    <a:lnT w="9525" cap="flat" cmpd="sng" algn="ctr">
-                      <a:solidFill>
-                        <a:srgbClr val="E2E8F0"/>
-                      </a:solidFill>
-                      <a:prstDash val="solid"/>
-                      <a:round/>
-                      <a:headEnd type="none" w="med" len="med"/>
-                      <a:tailEnd type="none" w="med" len="med"/>
-                    </a:lnT>
-                    <a:lnB w="9525" cap="flat" cmpd="sng" algn="ctr">
-                      <a:solidFill>
-                        <a:srgbClr val="E2E8F0"/>
-                      </a:solidFill>
-                      <a:prstDash val="solid"/>
-                      <a:round/>
-                      <a:headEnd type="none" w="med" len="med"/>
-                      <a:tailEnd type="none" w="med" len="med"/>
-                    </a:lnB>
-                    <a:solidFill>
-                      <a:srgbClr val="FFFFFF"/>
-                    </a:solidFill>
-                  </a:tcPr>
-                </a:tc>
-                <a:tc>
-                  <a:txBody>
-                    <a:bodyPr/>
-                    <a:lstStyle/>
-                    <a:p>
-                      <a:pPr algn="ctr" indent="0" marL="0">
-                        <a:buNone/>
-                      </a:pPr>
-                      <a:r>
-                        <a:rPr lang="en-US" sz="1000" dirty="0">
-                          <a:solidFill>
-                            <a:srgbClr val="334155"/>
-                          </a:solidFill>
-                        </a:rPr>
-                        <a:t>20%</a:t>
-                      </a:r>
-                      <a:endParaRPr lang="en-US" sz="1000" dirty="0"/>
-                    </a:p>
-                  </a:txBody>
-                  <a:tcPr marL="73152" marR="73152" marT="54864" marB="54864" anchor="ctr">
-                    <a:lnL w="9525" cap="flat" cmpd="sng" algn="ctr">
-                      <a:solidFill>
-                        <a:srgbClr val="E2E8F0"/>
-                      </a:solidFill>
-                      <a:prstDash val="solid"/>
-                      <a:round/>
-                      <a:headEnd type="none" w="med" len="med"/>
-                      <a:tailEnd type="none" w="med" len="med"/>
-                    </a:lnL>
-                    <a:lnR w="9525" cap="flat" cmpd="sng" algn="ctr">
-                      <a:solidFill>
-                        <a:srgbClr val="E2E8F0"/>
-                      </a:solidFill>
-                      <a:prstDash val="solid"/>
-                      <a:round/>
-                      <a:headEnd type="none" w="med" len="med"/>
-                      <a:tailEnd type="none" w="med" len="med"/>
-                    </a:lnR>
-                    <a:lnT w="9525" cap="flat" cmpd="sng" algn="ctr">
-                      <a:solidFill>
-                        <a:srgbClr val="E2E8F0"/>
-                      </a:solidFill>
-                      <a:prstDash val="solid"/>
-                      <a:round/>
-                      <a:headEnd type="none" w="med" len="med"/>
-                      <a:tailEnd type="none" w="med" len="med"/>
-                    </a:lnT>
-                    <a:lnB w="9525" cap="flat" cmpd="sng" algn="ctr">
-                      <a:solidFill>
-                        <a:srgbClr val="E2E8F0"/>
-                      </a:solidFill>
-                      <a:prstDash val="solid"/>
-                      <a:round/>
-                      <a:headEnd type="none" w="med" len="med"/>
-                      <a:tailEnd type="none" w="med" len="med"/>
-                    </a:lnB>
-                    <a:solidFill>
-                      <a:srgbClr val="FFFFFF"/>
-                    </a:solidFill>
-                  </a:tcPr>
-                </a:tc>
-                <a:tc>
-                  <a:txBody>
-                    <a:bodyPr/>
-                    <a:lstStyle/>
-                    <a:p>
-                      <a:pPr algn="ctr" indent="0" marL="0">
-                        <a:buNone/>
-                      </a:pPr>
-                      <a:r>
-                        <a:rPr lang="en-US" sz="1000" dirty="0">
-                          <a:solidFill>
-                            <a:srgbClr val="334155"/>
-                          </a:solidFill>
-                        </a:rPr>
-                        <a:t>10%</a:t>
-                      </a:r>
-                      <a:endParaRPr lang="en-US" sz="1000" dirty="0"/>
-                    </a:p>
-                  </a:txBody>
-                  <a:tcPr marL="73152" marR="73152" marT="54864" marB="54864" anchor="ctr">
-                    <a:lnL w="9525" cap="flat" cmpd="sng" algn="ctr">
-                      <a:solidFill>
-                        <a:srgbClr val="E2E8F0"/>
-                      </a:solidFill>
-                      <a:prstDash val="solid"/>
-                      <a:round/>
-                      <a:headEnd type="none" w="med" len="med"/>
-                      <a:tailEnd type="none" w="med" len="med"/>
-                    </a:lnL>
-                    <a:lnR w="9525" cap="flat" cmpd="sng" algn="ctr">
-                      <a:solidFill>
-                        <a:srgbClr val="E2E8F0"/>
-                      </a:solidFill>
-                      <a:prstDash val="solid"/>
-                      <a:round/>
-                      <a:headEnd type="none" w="med" len="med"/>
-                      <a:tailEnd type="none" w="med" len="med"/>
-                    </a:lnR>
-                    <a:lnT w="9525" cap="flat" cmpd="sng" algn="ctr">
-                      <a:solidFill>
-                        <a:srgbClr val="E2E8F0"/>
-                      </a:solidFill>
-                      <a:prstDash val="solid"/>
-                      <a:round/>
-                      <a:headEnd type="none" w="med" len="med"/>
-                      <a:tailEnd type="none" w="med" len="med"/>
-                    </a:lnT>
-                    <a:lnB w="9525" cap="flat" cmpd="sng" algn="ctr">
-                      <a:solidFill>
-                        <a:srgbClr val="E2E8F0"/>
-                      </a:solidFill>
-                      <a:prstDash val="solid"/>
-                      <a:round/>
-                      <a:headEnd type="none" w="med" len="med"/>
-                      <a:tailEnd type="none" w="med" len="med"/>
-                    </a:lnB>
-                    <a:solidFill>
-                      <a:srgbClr val="FFFFFF"/>
-                    </a:solidFill>
-                  </a:tcPr>
-                </a:tc>
-                <a:tc>
-                  <a:txBody>
-                    <a:bodyPr/>
-                    <a:lstStyle/>
-                    <a:p>
-                      <a:pPr algn="ctr" indent="0" marL="0">
-                        <a:buNone/>
-                      </a:pPr>
-                      <a:r>
-                        <a:rPr lang="en-US" sz="1000" dirty="0">
-                          <a:solidFill>
-                            <a:srgbClr val="334155"/>
-                          </a:solidFill>
-                        </a:rPr>
-                        <a:t>NT$607,500</a:t>
-                      </a:r>
-                      <a:endParaRPr lang="en-US" sz="1000" dirty="0"/>
-                    </a:p>
-                  </a:txBody>
-                  <a:tcPr marL="73152" marR="73152" marT="54864" marB="54864" anchor="ctr">
-                    <a:lnL w="9525" cap="flat" cmpd="sng" algn="ctr">
-                      <a:solidFill>
-                        <a:srgbClr val="E2E8F0"/>
-                      </a:solidFill>
-                      <a:prstDash val="solid"/>
-                      <a:round/>
-                      <a:headEnd type="none" w="med" len="med"/>
-                      <a:tailEnd type="none" w="med" len="med"/>
-                    </a:lnL>
-                    <a:lnR w="9525" cap="flat" cmpd="sng" algn="ctr">
-                      <a:solidFill>
-                        <a:srgbClr val="E2E8F0"/>
-                      </a:solidFill>
-                      <a:prstDash val="solid"/>
-                      <a:round/>
-                      <a:headEnd type="none" w="med" len="med"/>
-                      <a:tailEnd type="none" w="med" len="med"/>
-                    </a:lnR>
-                    <a:lnT w="9525" cap="flat" cmpd="sng" algn="ctr">
-                      <a:solidFill>
-                        <a:srgbClr val="E2E8F0"/>
-                      </a:solidFill>
-                      <a:prstDash val="solid"/>
-                      <a:round/>
-                      <a:headEnd type="none" w="med" len="med"/>
-                      <a:tailEnd type="none" w="med" len="med"/>
-                    </a:lnT>
-                    <a:lnB w="9525" cap="flat" cmpd="sng" algn="ctr">
-                      <a:solidFill>
-                        <a:srgbClr val="E2E8F0"/>
-                      </a:solidFill>
-                      <a:prstDash val="solid"/>
-                      <a:round/>
-                      <a:headEnd type="none" w="med" len="med"/>
-                      <a:tailEnd type="none" w="med" len="med"/>
-                    </a:lnB>
-                    <a:solidFill>
-                      <a:srgbClr val="FFFFFF"/>
-                    </a:solidFill>
-                  </a:tcPr>
-                </a:tc>
-              </a:tr>
-              <a:tr h="548640">
-                <a:tc>
-                  <a:txBody>
-                    <a:bodyPr/>
-                    <a:lstStyle/>
-                    <a:p>
-                      <a:pPr algn="ctr" indent="0" marL="0">
-                        <a:buNone/>
-                      </a:pPr>
-                      <a:r>
-                        <a:rPr lang="en-US" sz="1000" dirty="0">
-                          <a:solidFill>
-                            <a:srgbClr val="334155"/>
-                          </a:solidFill>
-                        </a:rPr>
-                        <a:t>B 穩中求進</a:t>
-                      </a:r>
-                      <a:endParaRPr lang="en-US" sz="1000" dirty="0"/>
-                    </a:p>
-                  </a:txBody>
-                  <a:tcPr marL="73152" marR="73152" marT="54864" marB="54864" anchor="ctr">
-                    <a:lnL w="9525" cap="flat" cmpd="sng" algn="ctr">
-                      <a:solidFill>
-                        <a:srgbClr val="E2E8F0"/>
-                      </a:solidFill>
-                      <a:prstDash val="solid"/>
-                      <a:round/>
-                      <a:headEnd type="none" w="med" len="med"/>
-                      <a:tailEnd type="none" w="med" len="med"/>
-                    </a:lnL>
-                    <a:lnR w="9525" cap="flat" cmpd="sng" algn="ctr">
-                      <a:solidFill>
-                        <a:srgbClr val="E2E8F0"/>
-                      </a:solidFill>
-                      <a:prstDash val="solid"/>
-                      <a:round/>
-                      <a:headEnd type="none" w="med" len="med"/>
-                      <a:tailEnd type="none" w="med" len="med"/>
-                    </a:lnR>
-                    <a:lnT w="9525" cap="flat" cmpd="sng" algn="ctr">
-                      <a:solidFill>
-                        <a:srgbClr val="E2E8F0"/>
-                      </a:solidFill>
-                      <a:prstDash val="solid"/>
-                      <a:round/>
-                      <a:headEnd type="none" w="med" len="med"/>
-                      <a:tailEnd type="none" w="med" len="med"/>
-                    </a:lnT>
-                    <a:lnB w="9525" cap="flat" cmpd="sng" algn="ctr">
-                      <a:solidFill>
-                        <a:srgbClr val="E2E8F0"/>
-                      </a:solidFill>
-                      <a:prstDash val="solid"/>
-                      <a:round/>
-                      <a:headEnd type="none" w="med" len="med"/>
-                      <a:tailEnd type="none" w="med" len="med"/>
-                    </a:lnB>
-                    <a:solidFill>
-                      <a:srgbClr val="F8FAFC"/>
-                    </a:solidFill>
-                  </a:tcPr>
-                </a:tc>
-                <a:tc>
-                  <a:txBody>
-                    <a:bodyPr/>
-                    <a:lstStyle/>
-                    <a:p>
-                      <a:pPr algn="ctr" indent="0" marL="0">
-                        <a:buNone/>
-                      </a:pPr>
-                      <a:r>
-                        <a:rPr lang="en-US" sz="1000" dirty="0">
-                          <a:solidFill>
-                            <a:srgbClr val="334155"/>
-                          </a:solidFill>
-                        </a:rPr>
-                        <a:t>55%</a:t>
-                      </a:r>
-                      <a:endParaRPr lang="en-US" sz="1000" dirty="0"/>
-                    </a:p>
-                  </a:txBody>
-                  <a:tcPr marL="73152" marR="73152" marT="54864" marB="54864" anchor="ctr">
-                    <a:lnL w="9525" cap="flat" cmpd="sng" algn="ctr">
-                      <a:solidFill>
-                        <a:srgbClr val="E2E8F0"/>
-                      </a:solidFill>
-                      <a:prstDash val="solid"/>
-                      <a:round/>
-                      <a:headEnd type="none" w="med" len="med"/>
-                      <a:tailEnd type="none" w="med" len="med"/>
-                    </a:lnL>
-                    <a:lnR w="9525" cap="flat" cmpd="sng" algn="ctr">
-                      <a:solidFill>
-                        <a:srgbClr val="E2E8F0"/>
-                      </a:solidFill>
-                      <a:prstDash val="solid"/>
-                      <a:round/>
-                      <a:headEnd type="none" w="med" len="med"/>
-                      <a:tailEnd type="none" w="med" len="med"/>
-                    </a:lnR>
-                    <a:lnT w="9525" cap="flat" cmpd="sng" algn="ctr">
-                      <a:solidFill>
-                        <a:srgbClr val="E2E8F0"/>
-                      </a:solidFill>
-                      <a:prstDash val="solid"/>
-                      <a:round/>
-                      <a:headEnd type="none" w="med" len="med"/>
-                      <a:tailEnd type="none" w="med" len="med"/>
-                    </a:lnT>
-                    <a:lnB w="9525" cap="flat" cmpd="sng" algn="ctr">
-                      <a:solidFill>
-                        <a:srgbClr val="E2E8F0"/>
-                      </a:solidFill>
-                      <a:prstDash val="solid"/>
-                      <a:round/>
-                      <a:headEnd type="none" w="med" len="med"/>
-                      <a:tailEnd type="none" w="med" len="med"/>
-                    </a:lnB>
-                    <a:solidFill>
-                      <a:srgbClr val="F8FAFC"/>
-                    </a:solidFill>
-                  </a:tcPr>
-                </a:tc>
-                <a:tc>
-                  <a:txBody>
-                    <a:bodyPr/>
-                    <a:lstStyle/>
-                    <a:p>
-                      <a:pPr algn="ctr" indent="0" marL="0">
-                        <a:buNone/>
-                      </a:pPr>
-                      <a:r>
-                        <a:rPr lang="en-US" sz="1000" dirty="0">
-                          <a:solidFill>
-                            <a:srgbClr val="334155"/>
-                          </a:solidFill>
-                        </a:rPr>
-                        <a:t>20%</a:t>
-                      </a:r>
-                      <a:endParaRPr lang="en-US" sz="1000" dirty="0"/>
-                    </a:p>
-                  </a:txBody>
-                  <a:tcPr marL="73152" marR="73152" marT="54864" marB="54864" anchor="ctr">
-                    <a:lnL w="9525" cap="flat" cmpd="sng" algn="ctr">
-                      <a:solidFill>
-                        <a:srgbClr val="E2E8F0"/>
-                      </a:solidFill>
-                      <a:prstDash val="solid"/>
-                      <a:round/>
-                      <a:headEnd type="none" w="med" len="med"/>
-                      <a:tailEnd type="none" w="med" len="med"/>
-                    </a:lnL>
-                    <a:lnR w="9525" cap="flat" cmpd="sng" algn="ctr">
-                      <a:solidFill>
-                        <a:srgbClr val="E2E8F0"/>
-                      </a:solidFill>
-                      <a:prstDash val="solid"/>
-                      <a:round/>
-                      <a:headEnd type="none" w="med" len="med"/>
-                      <a:tailEnd type="none" w="med" len="med"/>
-                    </a:lnR>
-                    <a:lnT w="9525" cap="flat" cmpd="sng" algn="ctr">
-                      <a:solidFill>
-                        <a:srgbClr val="E2E8F0"/>
-                      </a:solidFill>
-                      <a:prstDash val="solid"/>
-                      <a:round/>
-                      <a:headEnd type="none" w="med" len="med"/>
-                      <a:tailEnd type="none" w="med" len="med"/>
-                    </a:lnT>
-                    <a:lnB w="9525" cap="flat" cmpd="sng" algn="ctr">
-                      <a:solidFill>
-                        <a:srgbClr val="E2E8F0"/>
-                      </a:solidFill>
-                      <a:prstDash val="solid"/>
-                      <a:round/>
-                      <a:headEnd type="none" w="med" len="med"/>
-                      <a:tailEnd type="none" w="med" len="med"/>
-                    </a:lnB>
-                    <a:solidFill>
-                      <a:srgbClr val="F8FAFC"/>
-                    </a:solidFill>
-                  </a:tcPr>
-                </a:tc>
-                <a:tc>
-                  <a:txBody>
-                    <a:bodyPr/>
-                    <a:lstStyle/>
-                    <a:p>
-                      <a:pPr algn="ctr" indent="0" marL="0">
-                        <a:buNone/>
-                      </a:pPr>
-                      <a:r>
-                        <a:rPr lang="en-US" sz="1000" dirty="0">
-                          <a:solidFill>
-                            <a:srgbClr val="334155"/>
-                          </a:solidFill>
-                        </a:rPr>
-                        <a:t>25%</a:t>
-                      </a:r>
-                      <a:endParaRPr lang="en-US" sz="1000" dirty="0"/>
-                    </a:p>
-                  </a:txBody>
-                  <a:tcPr marL="73152" marR="73152" marT="54864" marB="54864" anchor="ctr">
-                    <a:lnL w="9525" cap="flat" cmpd="sng" algn="ctr">
-                      <a:solidFill>
-                        <a:srgbClr val="E2E8F0"/>
-                      </a:solidFill>
-                      <a:prstDash val="solid"/>
-                      <a:round/>
-                      <a:headEnd type="none" w="med" len="med"/>
-                      <a:tailEnd type="none" w="med" len="med"/>
-                    </a:lnL>
-                    <a:lnR w="9525" cap="flat" cmpd="sng" algn="ctr">
-                      <a:solidFill>
-                        <a:srgbClr val="E2E8F0"/>
-                      </a:solidFill>
-                      <a:prstDash val="solid"/>
-                      <a:round/>
-                      <a:headEnd type="none" w="med" len="med"/>
-                      <a:tailEnd type="none" w="med" len="med"/>
-                    </a:lnR>
-                    <a:lnT w="9525" cap="flat" cmpd="sng" algn="ctr">
-                      <a:solidFill>
-                        <a:srgbClr val="E2E8F0"/>
-                      </a:solidFill>
-                      <a:prstDash val="solid"/>
-                      <a:round/>
-                      <a:headEnd type="none" w="med" len="med"/>
-                      <a:tailEnd type="none" w="med" len="med"/>
-                    </a:lnT>
-                    <a:lnB w="9525" cap="flat" cmpd="sng" algn="ctr">
-                      <a:solidFill>
-                        <a:srgbClr val="E2E8F0"/>
-                      </a:solidFill>
-                      <a:prstDash val="solid"/>
-                      <a:round/>
-                      <a:headEnd type="none" w="med" len="med"/>
-                      <a:tailEnd type="none" w="med" len="med"/>
-                    </a:lnB>
-                    <a:solidFill>
-                      <a:srgbClr val="F8FAFC"/>
-                    </a:solidFill>
-                  </a:tcPr>
-                </a:tc>
-                <a:tc>
-                  <a:txBody>
-                    <a:bodyPr/>
-                    <a:lstStyle/>
-                    <a:p>
-                      <a:pPr algn="ctr" indent="0" marL="0">
-                        <a:buNone/>
-                      </a:pPr>
-                      <a:r>
-                        <a:rPr lang="en-US" sz="1000" dirty="0">
-                          <a:solidFill>
-                            <a:srgbClr val="334155"/>
-                          </a:solidFill>
-                        </a:rPr>
-                        <a:t>NT$868,000</a:t>
-                      </a:r>
-                      <a:endParaRPr lang="en-US" sz="1000" dirty="0"/>
-                    </a:p>
-                  </a:txBody>
-                  <a:tcPr marL="73152" marR="73152" marT="54864" marB="54864" anchor="ctr">
-                    <a:lnL w="9525" cap="flat" cmpd="sng" algn="ctr">
-                      <a:solidFill>
-                        <a:srgbClr val="E2E8F0"/>
-                      </a:solidFill>
-                      <a:prstDash val="solid"/>
-                      <a:round/>
-                      <a:headEnd type="none" w="med" len="med"/>
-                      <a:tailEnd type="none" w="med" len="med"/>
-                    </a:lnL>
-                    <a:lnR w="9525" cap="flat" cmpd="sng" algn="ctr">
-                      <a:solidFill>
-                        <a:srgbClr val="E2E8F0"/>
-                      </a:solidFill>
-                      <a:prstDash val="solid"/>
-                      <a:round/>
-                      <a:headEnd type="none" w="med" len="med"/>
-                      <a:tailEnd type="none" w="med" len="med"/>
-                    </a:lnR>
-                    <a:lnT w="9525" cap="flat" cmpd="sng" algn="ctr">
-                      <a:solidFill>
-                        <a:srgbClr val="E2E8F0"/>
-                      </a:solidFill>
-                      <a:prstDash val="solid"/>
-                      <a:round/>
-                      <a:headEnd type="none" w="med" len="med"/>
-                      <a:tailEnd type="none" w="med" len="med"/>
-                    </a:lnT>
-                    <a:lnB w="9525" cap="flat" cmpd="sng" algn="ctr">
-                      <a:solidFill>
-                        <a:srgbClr val="E2E8F0"/>
-                      </a:solidFill>
-                      <a:prstDash val="solid"/>
-                      <a:round/>
-                      <a:headEnd type="none" w="med" len="med"/>
-                      <a:tailEnd type="none" w="med" len="med"/>
-                    </a:lnB>
-                    <a:solidFill>
-                      <a:srgbClr val="F8FAFC"/>
-                    </a:solidFill>
-                  </a:tcPr>
-                </a:tc>
-              </a:tr>
-              <a:tr h="548640">
-                <a:tc>
-                  <a:txBody>
-                    <a:bodyPr/>
-                    <a:lstStyle/>
-                    <a:p>
-                      <a:pPr algn="ctr" indent="0" marL="0">
-                        <a:buNone/>
-                      </a:pPr>
-                      <a:r>
-                        <a:rPr lang="en-US" sz="1000" dirty="0">
-                          <a:solidFill>
-                            <a:srgbClr val="334155"/>
-                          </a:solidFill>
-                        </a:rPr>
-                        <a:t>C 積極型</a:t>
-                      </a:r>
-                      <a:endParaRPr lang="en-US" sz="1000" dirty="0"/>
-                    </a:p>
-                  </a:txBody>
-                  <a:tcPr marL="73152" marR="73152" marT="54864" marB="54864" anchor="ctr">
-                    <a:lnL w="9525" cap="flat" cmpd="sng" algn="ctr">
-                      <a:solidFill>
-                        <a:srgbClr val="E2E8F0"/>
-                      </a:solidFill>
-                      <a:prstDash val="solid"/>
-                      <a:round/>
-                      <a:headEnd type="none" w="med" len="med"/>
-                      <a:tailEnd type="none" w="med" len="med"/>
-                    </a:lnL>
-                    <a:lnR w="9525" cap="flat" cmpd="sng" algn="ctr">
-                      <a:solidFill>
-                        <a:srgbClr val="E2E8F0"/>
-                      </a:solidFill>
-                      <a:prstDash val="solid"/>
-                      <a:round/>
-                      <a:headEnd type="none" w="med" len="med"/>
-                      <a:tailEnd type="none" w="med" len="med"/>
-                    </a:lnR>
-                    <a:lnT w="9525" cap="flat" cmpd="sng" algn="ctr">
-                      <a:solidFill>
-                        <a:srgbClr val="E2E8F0"/>
-                      </a:solidFill>
-                      <a:prstDash val="solid"/>
-                      <a:round/>
-                      <a:headEnd type="none" w="med" len="med"/>
-                      <a:tailEnd type="none" w="med" len="med"/>
-                    </a:lnT>
-                    <a:lnB w="9525" cap="flat" cmpd="sng" algn="ctr">
-                      <a:solidFill>
-                        <a:srgbClr val="E2E8F0"/>
-                      </a:solidFill>
-                      <a:prstDash val="solid"/>
-                      <a:round/>
-                      <a:headEnd type="none" w="med" len="med"/>
-                      <a:tailEnd type="none" w="med" len="med"/>
-                    </a:lnB>
-                    <a:solidFill>
-                      <a:srgbClr val="FFFFFF"/>
-                    </a:solidFill>
-                  </a:tcPr>
-                </a:tc>
-                <a:tc>
-                  <a:txBody>
-                    <a:bodyPr/>
-                    <a:lstStyle/>
-                    <a:p>
-                      <a:pPr algn="ctr" indent="0" marL="0">
-                        <a:buNone/>
-                      </a:pPr>
-                      <a:r>
-                        <a:rPr lang="en-US" sz="1000" dirty="0">
-                          <a:solidFill>
-                            <a:srgbClr val="334155"/>
-                          </a:solidFill>
-                        </a:rPr>
-                        <a:t>40%</a:t>
-                      </a:r>
-                      <a:endParaRPr lang="en-US" sz="1000" dirty="0"/>
-                    </a:p>
-                  </a:txBody>
-                  <a:tcPr marL="73152" marR="73152" marT="54864" marB="54864" anchor="ctr">
-                    <a:lnL w="9525" cap="flat" cmpd="sng" algn="ctr">
-                      <a:solidFill>
-                        <a:srgbClr val="E2E8F0"/>
-                      </a:solidFill>
-                      <a:prstDash val="solid"/>
-                      <a:round/>
-                      <a:headEnd type="none" w="med" len="med"/>
-                      <a:tailEnd type="none" w="med" len="med"/>
-                    </a:lnL>
-                    <a:lnR w="9525" cap="flat" cmpd="sng" algn="ctr">
-                      <a:solidFill>
-                        <a:srgbClr val="E2E8F0"/>
-                      </a:solidFill>
-                      <a:prstDash val="solid"/>
-                      <a:round/>
-                      <a:headEnd type="none" w="med" len="med"/>
-                      <a:tailEnd type="none" w="med" len="med"/>
-                    </a:lnR>
-                    <a:lnT w="9525" cap="flat" cmpd="sng" algn="ctr">
-                      <a:solidFill>
-                        <a:srgbClr val="E2E8F0"/>
-                      </a:solidFill>
-                      <a:prstDash val="solid"/>
-                      <a:round/>
-                      <a:headEnd type="none" w="med" len="med"/>
-                      <a:tailEnd type="none" w="med" len="med"/>
-                    </a:lnT>
-                    <a:lnB w="9525" cap="flat" cmpd="sng" algn="ctr">
-                      <a:solidFill>
-                        <a:srgbClr val="E2E8F0"/>
-                      </a:solidFill>
-                      <a:prstDash val="solid"/>
-                      <a:round/>
-                      <a:headEnd type="none" w="med" len="med"/>
-                      <a:tailEnd type="none" w="med" len="med"/>
-                    </a:lnB>
-                    <a:solidFill>
-                      <a:srgbClr val="FFFFFF"/>
-                    </a:solidFill>
-                  </a:tcPr>
-                </a:tc>
-                <a:tc>
-                  <a:txBody>
-                    <a:bodyPr/>
-                    <a:lstStyle/>
-                    <a:p>
-                      <a:pPr algn="ctr" indent="0" marL="0">
-                        <a:buNone/>
-                      </a:pPr>
-                      <a:r>
-                        <a:rPr lang="en-US" sz="1000" dirty="0">
-                          <a:solidFill>
-                            <a:srgbClr val="334155"/>
-                          </a:solidFill>
-                        </a:rPr>
-                        <a:t>20%</a:t>
-                      </a:r>
-                      <a:endParaRPr lang="en-US" sz="1000" dirty="0"/>
-                    </a:p>
-                  </a:txBody>
-                  <a:tcPr marL="73152" marR="73152" marT="54864" marB="54864" anchor="ctr">
-                    <a:lnL w="9525" cap="flat" cmpd="sng" algn="ctr">
-                      <a:solidFill>
-                        <a:srgbClr val="E2E8F0"/>
-                      </a:solidFill>
-                      <a:prstDash val="solid"/>
-                      <a:round/>
-                      <a:headEnd type="none" w="med" len="med"/>
-                      <a:tailEnd type="none" w="med" len="med"/>
-                    </a:lnL>
-                    <a:lnR w="9525" cap="flat" cmpd="sng" algn="ctr">
-                      <a:solidFill>
-                        <a:srgbClr val="E2E8F0"/>
-                      </a:solidFill>
-                      <a:prstDash val="solid"/>
-                      <a:round/>
-                      <a:headEnd type="none" w="med" len="med"/>
-                      <a:tailEnd type="none" w="med" len="med"/>
-                    </a:lnR>
-                    <a:lnT w="9525" cap="flat" cmpd="sng" algn="ctr">
-                      <a:solidFill>
-                        <a:srgbClr val="E2E8F0"/>
-                      </a:solidFill>
-                      <a:prstDash val="solid"/>
-                      <a:round/>
-                      <a:headEnd type="none" w="med" len="med"/>
-                      <a:tailEnd type="none" w="med" len="med"/>
-                    </a:lnT>
-                    <a:lnB w="9525" cap="flat" cmpd="sng" algn="ctr">
-                      <a:solidFill>
-                        <a:srgbClr val="E2E8F0"/>
-                      </a:solidFill>
-                      <a:prstDash val="solid"/>
-                      <a:round/>
-                      <a:headEnd type="none" w="med" len="med"/>
-                      <a:tailEnd type="none" w="med" len="med"/>
-                    </a:lnB>
-                    <a:solidFill>
-                      <a:srgbClr val="FFFFFF"/>
-                    </a:solidFill>
-                  </a:tcPr>
-                </a:tc>
-                <a:tc>
-                  <a:txBody>
-                    <a:bodyPr/>
-                    <a:lstStyle/>
-                    <a:p>
-                      <a:pPr algn="ctr" indent="0" marL="0">
-                        <a:buNone/>
-                      </a:pPr>
-                      <a:r>
-                        <a:rPr lang="en-US" sz="1000" dirty="0">
-                          <a:solidFill>
-                            <a:srgbClr val="334155"/>
-                          </a:solidFill>
-                        </a:rPr>
-                        <a:t>40%</a:t>
-                      </a:r>
-                      <a:endParaRPr lang="en-US" sz="1000" dirty="0"/>
-                    </a:p>
-                  </a:txBody>
-                  <a:tcPr marL="73152" marR="73152" marT="54864" marB="54864" anchor="ctr">
-                    <a:lnL w="9525" cap="flat" cmpd="sng" algn="ctr">
-                      <a:solidFill>
-                        <a:srgbClr val="E2E8F0"/>
-                      </a:solidFill>
-                      <a:prstDash val="solid"/>
-                      <a:round/>
-                      <a:headEnd type="none" w="med" len="med"/>
-                      <a:tailEnd type="none" w="med" len="med"/>
-                    </a:lnL>
-                    <a:lnR w="9525" cap="flat" cmpd="sng" algn="ctr">
-                      <a:solidFill>
-                        <a:srgbClr val="E2E8F0"/>
-                      </a:solidFill>
-                      <a:prstDash val="solid"/>
-                      <a:round/>
-                      <a:headEnd type="none" w="med" len="med"/>
-                      <a:tailEnd type="none" w="med" len="med"/>
-                    </a:lnR>
-                    <a:lnT w="9525" cap="flat" cmpd="sng" algn="ctr">
-                      <a:solidFill>
-                        <a:srgbClr val="E2E8F0"/>
-                      </a:solidFill>
-                      <a:prstDash val="solid"/>
-                      <a:round/>
-                      <a:headEnd type="none" w="med" len="med"/>
-                      <a:tailEnd type="none" w="med" len="med"/>
-                    </a:lnT>
-                    <a:lnB w="9525" cap="flat" cmpd="sng" algn="ctr">
-                      <a:solidFill>
-                        <a:srgbClr val="E2E8F0"/>
-                      </a:solidFill>
-                      <a:prstDash val="solid"/>
-                      <a:round/>
-                      <a:headEnd type="none" w="med" len="med"/>
-                      <a:tailEnd type="none" w="med" len="med"/>
-                    </a:lnB>
-                    <a:solidFill>
-                      <a:srgbClr val="FFFFFF"/>
-                    </a:solidFill>
-                  </a:tcPr>
-                </a:tc>
-                <a:tc>
-                  <a:txBody>
-                    <a:bodyPr/>
-                    <a:lstStyle/>
-                    <a:p>
-                      <a:pPr algn="ctr" indent="0" marL="0">
-                        <a:buNone/>
-                      </a:pPr>
-                      <a:r>
-                        <a:rPr lang="en-US" sz="1000" dirty="0">
-                          <a:solidFill>
-                            <a:srgbClr val="334155"/>
-                          </a:solidFill>
-                        </a:rPr>
-                        <a:t>NT$1,128,000</a:t>
-                      </a:r>
-                      <a:endParaRPr lang="en-US" sz="1000" dirty="0"/>
-                    </a:p>
-                  </a:txBody>
-                  <a:tcPr marL="73152" marR="73152" marT="54864" marB="54864" anchor="ctr">
-                    <a:lnL w="9525" cap="flat" cmpd="sng" algn="ctr">
-                      <a:solidFill>
-                        <a:srgbClr val="E2E8F0"/>
-                      </a:solidFill>
-                      <a:prstDash val="solid"/>
-                      <a:round/>
-                      <a:headEnd type="none" w="med" len="med"/>
-                      <a:tailEnd type="none" w="med" len="med"/>
-                    </a:lnL>
-                    <a:lnR w="9525" cap="flat" cmpd="sng" algn="ctr">
-                      <a:solidFill>
-                        <a:srgbClr val="E2E8F0"/>
-                      </a:solidFill>
-                      <a:prstDash val="solid"/>
-                      <a:round/>
-                      <a:headEnd type="none" w="med" len="med"/>
-                      <a:tailEnd type="none" w="med" len="med"/>
-                    </a:lnR>
-                    <a:lnT w="9525" cap="flat" cmpd="sng" algn="ctr">
-                      <a:solidFill>
-                        <a:srgbClr val="E2E8F0"/>
-                      </a:solidFill>
-                      <a:prstDash val="solid"/>
-                      <a:round/>
-                      <a:headEnd type="none" w="med" len="med"/>
-                      <a:tailEnd type="none" w="med" len="med"/>
-                    </a:lnT>
-                    <a:lnB w="9525" cap="flat" cmpd="sng" algn="ctr">
-                      <a:solidFill>
-                        <a:srgbClr val="E2E8F0"/>
-                      </a:solidFill>
-                      <a:prstDash val="solid"/>
-                      <a:round/>
-                      <a:headEnd type="none" w="med" len="med"/>
-                      <a:tailEnd type="none" w="med" len="med"/>
-                    </a:lnB>
-                    <a:solidFill>
-                      <a:srgbClr val="FFFFFF"/>
-                    </a:solidFill>
-                  </a:tcPr>
-                </a:tc>
-              </a:tr>
-            </a:tbl>
-          </a:graphicData>
-        </a:graphic>
-      </p:graphicFrame>
-      <p:sp>
-        <p:nvSpPr>
-          <p:cNvPr id="6" name="Shape 2"/>
+      <p:sp>
+        <p:nvSpPr>
+          <p:cNvPr id="5" name="Shape 2"/>
           <p:cNvSpPr/>
           <p:nvPr/>
         </p:nvSpPr>
         <p:spPr>
           <a:xfrm>
-            <a:off x="6172200" y="3566160"/>
-            <a:ext cx="5468112" cy="914400"/>
+            <a:off x="8229600" y="1554480"/>
+            <a:ext cx="3410712" cy="1828800"/>
           </a:xfrm>
           <a:prstGeom prst="roundRect">
             <a:avLst>
-              <a:gd name="adj" fmla="val 8000"/>
+              <a:gd name="adj" fmla="val 4000"/>
             </a:avLst>
           </a:prstGeom>
           <a:solidFill>
@@ -14617,14 +15710,53 @@
       </p:sp>
       <p:sp>
         <p:nvSpPr>
-          <p:cNvPr id="7" name="Text 3"/>
+          <p:cNvPr id="6" name="Text 3"/>
           <p:cNvSpPr txBox="1"/>
           <p:nvPr/>
         </p:nvSpPr>
         <p:spPr>
           <a:xfrm>
-            <a:off x="6373368" y="3712464"/>
-            <a:ext cx="5065776" cy="621792"/>
+            <a:off x="8430768" y="1700784"/>
+            <a:ext cx="3008376" cy="365760"/>
+          </a:xfrm>
+          <a:prstGeom prst="rect">
+            <a:avLst/>
+          </a:prstGeom>
+          <a:noFill/>
+          <a:ln/>
+        </p:spPr>
+        <p:txBody>
+          <a:bodyPr wrap="square" lIns="0" tIns="0" rIns="0" bIns="0" rtlCol="0" anchor="ctr"/>
+          <a:lstStyle/>
+          <a:p>
+            <a:pPr algn="l" indent="0" marL="0">
+              <a:buNone/>
+            </a:pPr>
+            <a:r>
+              <a:rPr lang="en-US" sz="1350" b="1" dirty="0">
+                <a:solidFill>
+                  <a:srgbClr val="0F172A"/>
+                </a:solidFill>
+                <a:latin typeface="Microsoft JhengHei" pitchFamily="34" charset="0"/>
+                <a:ea typeface="Microsoft JhengHei" pitchFamily="34" charset="-122"/>
+                <a:cs typeface="Microsoft JhengHei" pitchFamily="34" charset="-120"/>
+              </a:rPr>
+              <a:t>為什麼④⑤特別高？</a:t>
+            </a:r>
+            <a:endParaRPr lang="en-US" sz="1350" dirty="0"/>
+          </a:p>
+        </p:txBody>
+      </p:sp>
+      <p:sp>
+        <p:nvSpPr>
+          <p:cNvPr id="7" name="Text 4"/>
+          <p:cNvSpPr txBox="1"/>
+          <p:nvPr/>
+        </p:nvSpPr>
+        <p:spPr>
+          <a:xfrm>
+            <a:off x="8430768" y="2084832"/>
+            <a:ext cx="3008376" cy="1133856"/>
           </a:xfrm>
           <a:prstGeom prst="rect">
             <a:avLst/>
@@ -14651,7 +15783,7 @@
                 <a:ea typeface="Microsoft JhengHei" pitchFamily="34" charset="-122"/>
                 <a:cs typeface="Microsoft JhengHei" pitchFamily="34" charset="-120"/>
               </a:rPr>
-              <a:t>「④⑤雙幣」比重越高，帳面預估獲利越好看，但也代表本金因為賭錯而變少的機會越大。</a:t>
+              <a:t>雙幣理財的「45%」是「沒有賭錯」的最佳情況，並未反映賭錯時可能虧損 20% 以上的情形——數字看起來漂亮，但風險也最高，不能只看這張圖的高度做決定。</a:t>
             </a:r>
             <a:endParaRPr lang="en-US" sz="1100" dirty="0"/>
           </a:p>
@@ -14659,18 +15791,18 @@
       </p:sp>
       <p:sp>
         <p:nvSpPr>
-          <p:cNvPr id="8" name="Shape 4"/>
+          <p:cNvPr id="8" name="Shape 5"/>
           <p:cNvSpPr/>
           <p:nvPr/>
         </p:nvSpPr>
         <p:spPr>
           <a:xfrm>
-            <a:off x="548640" y="4663440"/>
-            <a:ext cx="11094415" cy="1463040"/>
+            <a:off x="8229600" y="3520440"/>
+            <a:ext cx="3410712" cy="1874520"/>
           </a:xfrm>
           <a:prstGeom prst="roundRect">
             <a:avLst>
-              <a:gd name="adj" fmla="val 5000"/>
+              <a:gd name="adj" fmla="val 3902"/>
             </a:avLst>
           </a:prstGeom>
           <a:solidFill>
@@ -14693,14 +15825,14 @@
       </p:sp>
       <p:sp>
         <p:nvSpPr>
-          <p:cNvPr id="9" name="Text 5"/>
+          <p:cNvPr id="9" name="Text 6"/>
           <p:cNvSpPr txBox="1"/>
           <p:nvPr/>
         </p:nvSpPr>
         <p:spPr>
           <a:xfrm>
-            <a:off x="749808" y="4809744"/>
-            <a:ext cx="10692079" cy="365760"/>
+            <a:off x="8430768" y="3666744"/>
+            <a:ext cx="3008376" cy="365760"/>
           </a:xfrm>
           <a:prstGeom prst="rect">
             <a:avLst/>
@@ -14724,7 +15856,7 @@
                 <a:ea typeface="Microsoft JhengHei" pitchFamily="34" charset="-122"/>
                 <a:cs typeface="Microsoft JhengHei" pitchFamily="34" charset="-120"/>
               </a:rPr>
-              <a:t>怎麼選？</a:t>
+              <a:t>務實的看法</a:t>
             </a:r>
             <a:endParaRPr lang="en-US" sz="1350" dirty="0"/>
           </a:p>
@@ -14732,14 +15864,14 @@
       </p:sp>
       <p:sp>
         <p:nvSpPr>
-          <p:cNvPr id="10" name="Text 6"/>
+          <p:cNvPr id="10" name="Text 7"/>
           <p:cNvSpPr txBox="1"/>
           <p:nvPr/>
         </p:nvSpPr>
         <p:spPr>
           <a:xfrm>
-            <a:off x="749808" y="5193792"/>
-            <a:ext cx="10692079" cy="768096"/>
+            <a:off x="8430768" y="4050792"/>
+            <a:ext cx="3008376" cy="1179576"/>
           </a:xfrm>
           <a:prstGeom prst="rect">
             <a:avLst/>
@@ -14758,7 +15890,7 @@
               <a:buNone/>
             </a:pPr>
             <a:r>
-              <a:rPr lang="en-US" sz="1200" dirty="0">
+              <a:rPr lang="en-US" sz="1150" dirty="0">
                 <a:solidFill>
                   <a:srgbClr val="334155"/>
                 </a:solidFill>
@@ -14766,15 +15898,15 @@
                 <a:ea typeface="Microsoft JhengHei" pitchFamily="34" charset="-122"/>
                 <a:cs typeface="Microsoft JhengHei" pitchFamily="34" charset="-120"/>
               </a:rPr>
-              <a:t>如果這筆錢是「不能有本金損失」的閒錢，建議從方案A開始；如果可以承受「部分金額因賭錯而暫時變少」，再考慮拉高④⑤的比重。三個方案僅為示範權重，實際比重應由財務部與風控委員會依風險承受度共同核定。</a:t>
-            </a:r>
-            <a:endParaRPr lang="en-US" sz="1200" dirty="0"/>
-          </a:p>
-        </p:txBody>
-      </p:sp>
-      <p:sp>
-        <p:nvSpPr>
-          <p:cNvPr id="11" name="Text 7"/>
+              <a:t>①Bitfinex 出借在「不賭價格」的前提下，一年約 NT$51 萬，是五種方法中「報酬與安全」平衡最好的選項。</a:t>
+            </a:r>
+            <a:endParaRPr lang="en-US" sz="1150" dirty="0"/>
+          </a:p>
+        </p:txBody>
+      </p:sp>
+      <p:sp>
+        <p:nvSpPr>
+          <p:cNvPr id="11" name="Text 8"/>
           <p:cNvSpPr txBox="1"/>
           <p:nvPr/>
         </p:nvSpPr>
@@ -14813,7 +15945,7 @@
       </p:sp>
       <p:sp>
         <p:nvSpPr>
-          <p:cNvPr id="12" name="Text 8"/>
+          <p:cNvPr id="12" name="Text 9"/>
           <p:cNvSpPr txBox="1"/>
           <p:nvPr/>
         </p:nvSpPr>
@@ -14844,7 +15976,7 @@
                 <a:ea typeface="Microsoft JhengHei" pitchFamily="34" charset="-122"/>
                 <a:cs typeface="Microsoft JhengHei" pitchFamily="34" charset="-120"/>
               </a:rPr>
-              <a:t>9 / 11</a:t>
+              <a:t>9 / 12</a:t>
             </a:r>
             <a:endParaRPr lang="en-US" sz="900" dirty="0"/>
           </a:p>
